--- a/Shopping Assistant Presentation.pptx
+++ b/Shopping Assistant Presentation.pptx
@@ -5,21 +5,21 @@
     <p:sldMasterId id="2147483648" r:id="rId1"/>
   </p:sldMasterIdLst>
   <p:notesMasterIdLst>
-    <p:notesMasterId r:id="rId9"/>
+    <p:notesMasterId r:id="rId14"/>
   </p:notesMasterIdLst>
   <p:sldIdLst>
-    <p:sldId id="263" r:id="rId14"/>
-    <p:sldId id="264" r:id="rId15"/>
-    <p:sldId id="265" r:id="rId16"/>
-    <p:sldId id="266" r:id="rId17"/>
-    <p:sldId id="267" r:id="rId18"/>
-    <p:sldId id="268" r:id="rId19"/>
-    <p:sldId id="269" r:id="rId20"/>
-    <p:sldId id="270" r:id="rId21"/>
-    <p:sldId id="271" r:id="rId22"/>
-    <p:sldId id="272" r:id="rId23"/>
-    <p:sldId id="273" r:id="rId24"/>
-    <p:sldId id="274" r:id="rId25"/>
+    <p:sldId id="263" r:id="rId2"/>
+    <p:sldId id="264" r:id="rId3"/>
+    <p:sldId id="265" r:id="rId4"/>
+    <p:sldId id="266" r:id="rId5"/>
+    <p:sldId id="271" r:id="rId6"/>
+    <p:sldId id="270" r:id="rId7"/>
+    <p:sldId id="272" r:id="rId8"/>
+    <p:sldId id="267" r:id="rId9"/>
+    <p:sldId id="268" r:id="rId10"/>
+    <p:sldId id="269" r:id="rId11"/>
+    <p:sldId id="273" r:id="rId12"/>
+    <p:sldId id="274" r:id="rId13"/>
   </p:sldIdLst>
   <p:sldSz cx="9144000" cy="5143500" type="screen16x9"/>
   <p:notesSz cx="5143500" cy="9144000"/>
@@ -248,8 +248,8 @@
 </p:notesMaster>
 </file>
 
-<file path=ppt/notesSlides/notesSlide10.xml><?xml version="1.0" encoding="utf-8"?>
-<p:notes xmlns:a="http://schemas.openxmlformats.org/drawingml/2006/main" xmlns:p="http://schemas.openxmlformats.org/presentationml/2006/main" xmlns:r="http://schemas.openxmlformats.org/officeDocument/2006/relationships">
+<file path=ppt/notesSlides/notesSlide1.xml><?xml version="1.0" encoding="utf-8"?>
+<p:notes xmlns:a="http://schemas.openxmlformats.org/drawingml/2006/main" xmlns:r="http://schemas.openxmlformats.org/officeDocument/2006/relationships" xmlns:p="http://schemas.openxmlformats.org/presentationml/2006/main">
   <p:cSld>
     <p:spTree>
       <p:nvGrpSpPr>
@@ -281,7 +281,7 @@
           <a:lstStyle/>
           <a:p>
             <a:r>
-              <a:t>Walk through the flow left to right. Stress that code makes every decision and copies every fact; the LLM only rewrites messages the rules could not read.</a:t>
+              <a:t>Introduce the team and the problem: R3, a shopping assistant that never invents prices. Round 1 was the proposal; today we show the working system on the real catalogue.</a:t>
             </a:r>
           </a:p>
         </p:txBody>
@@ -294,8 +294,8 @@
 </p:notes>
 </file>
 
-<file path=ppt/notesSlides/notesSlide11.xml><?xml version="1.0" encoding="utf-8"?>
-<p:notes xmlns:a="http://schemas.openxmlformats.org/drawingml/2006/main" xmlns:p="http://schemas.openxmlformats.org/presentationml/2006/main" xmlns:r="http://schemas.openxmlformats.org/officeDocument/2006/relationships">
+<file path=ppt/notesSlides/notesSlide10.xml><?xml version="1.0" encoding="utf-8"?>
+<p:notes xmlns:a="http://schemas.openxmlformats.org/drawingml/2006/main" xmlns:r="http://schemas.openxmlformats.org/officeDocument/2006/relationships" xmlns:p="http://schemas.openxmlformats.org/presentationml/2006/main">
   <p:cSld>
     <p:spTree>
       <p:nvGrpSpPr>
@@ -327,7 +327,7 @@
           <a:lstStyle/>
           <a:p>
             <a:r>
-              <a:t>Explain the four steps, then point at the diagram: parser, decide with its four branches, the LLM rewrite loop back into decide, then response and guard.</a:t>
+              <a:t>These are real problems we hit while testing on the actual catalogue, not hypothetical ones.</a:t>
             </a:r>
           </a:p>
         </p:txBody>
@@ -340,8 +340,8 @@
 </p:notes>
 </file>
 
-<file path=ppt/notesSlides/notesSlide12.xml><?xml version="1.0" encoding="utf-8"?>
-<p:notes xmlns:a="http://schemas.openxmlformats.org/drawingml/2006/main" xmlns:p="http://schemas.openxmlformats.org/presentationml/2006/main" xmlns:r="http://schemas.openxmlformats.org/officeDocument/2006/relationships">
+<file path=ppt/notesSlides/notesSlide11.xml><?xml version="1.0" encoding="utf-8"?>
+<p:notes xmlns:a="http://schemas.openxmlformats.org/drawingml/2006/main" xmlns:r="http://schemas.openxmlformats.org/officeDocument/2006/relationships" xmlns:p="http://schemas.openxmlformats.org/presentationml/2006/main">
   <p:cSld>
     <p:spTree>
       <p:nvGrpSpPr>
@@ -373,7 +373,7 @@
           <a:lstStyle/>
           <a:p>
             <a:r>
-              <a:t>All numbers come from the organisers' evaluate.py and our latency report. Dev is 40 questions; the 150 test answers are scored by the organisers.</a:t>
+              <a:t>Be honest about limits; the jury rewards it. Then show the path to production.</a:t>
             </a:r>
           </a:p>
         </p:txBody>
@@ -386,8 +386,8 @@
 </p:notes>
 </file>
 
-<file path=ppt/notesSlides/notesSlide13.xml><?xml version="1.0" encoding="utf-8"?>
-<p:notes xmlns:a="http://schemas.openxmlformats.org/drawingml/2006/main" xmlns:p="http://schemas.openxmlformats.org/presentationml/2006/main" xmlns:r="http://schemas.openxmlformats.org/officeDocument/2006/relationships">
+<file path=ppt/notesSlides/notesSlide12.xml><?xml version="1.0" encoding="utf-8"?>
+<p:notes xmlns:a="http://schemas.openxmlformats.org/drawingml/2006/main" xmlns:r="http://schemas.openxmlformats.org/officeDocument/2006/relationships" xmlns:p="http://schemas.openxmlformats.org/presentationml/2006/main">
   <p:cSld>
     <p:spTree>
       <p:nvGrpSpPr>
@@ -419,7 +419,7 @@
           <a:lstStyle/>
           <a:p>
             <a:r>
-              <a:t>Responsibility is 15% of the rubric. Emphasise: no invented facts, honest refusals, and the LLM has no way to put a price or product ID in front of a shopper.</a:t>
+              <a:t>Thank the jury and invite questions. Have the live demo open in a browser tab.</a:t>
             </a:r>
           </a:p>
         </p:txBody>
@@ -432,8 +432,8 @@
 </p:notes>
 </file>
 
-<file path=ppt/notesSlides/notesSlide14.xml><?xml version="1.0" encoding="utf-8"?>
-<p:notes xmlns:a="http://schemas.openxmlformats.org/drawingml/2006/main" xmlns:p="http://schemas.openxmlformats.org/presentationml/2006/main" xmlns:r="http://schemas.openxmlformats.org/officeDocument/2006/relationships">
+<file path=ppt/notesSlides/notesSlide2.xml><?xml version="1.0" encoding="utf-8"?>
+<p:notes xmlns:a="http://schemas.openxmlformats.org/drawingml/2006/main" xmlns:r="http://schemas.openxmlformats.org/officeDocument/2006/relationships" xmlns:p="http://schemas.openxmlformats.org/presentationml/2006/main">
   <p:cSld>
     <p:spTree>
       <p:nvGrpSpPr>
@@ -465,7 +465,7 @@
           <a:lstStyle/>
           <a:p>
             <a:r>
-              <a:t>These are real problems we hit while testing on the actual catalogue, not hypothetical ones.</a:t>
+              <a:t>Why this matters: a chatbot that invents a price or a return rule creates a legal and trust problem. Moffatt v. Air Canada shows companies are held to what their bot says.</a:t>
             </a:r>
           </a:p>
         </p:txBody>
@@ -478,8 +478,8 @@
 </p:notes>
 </file>
 
-<file path=ppt/notesSlides/notesSlide15.xml><?xml version="1.0" encoding="utf-8"?>
-<p:notes xmlns:a="http://schemas.openxmlformats.org/drawingml/2006/main" xmlns:p="http://schemas.openxmlformats.org/presentationml/2006/main" xmlns:r="http://schemas.openxmlformats.org/officeDocument/2006/relationships">
+<file path=ppt/notesSlides/notesSlide3.xml><?xml version="1.0" encoding="utf-8"?>
+<p:notes xmlns:a="http://schemas.openxmlformats.org/drawingml/2006/main" xmlns:r="http://schemas.openxmlformats.org/officeDocument/2006/relationships" xmlns:p="http://schemas.openxmlformats.org/presentationml/2006/main">
   <p:cSld>
     <p:spTree>
       <p:nvGrpSpPr>
@@ -511,7 +511,7 @@
           <a:lstStyle/>
           <a:p>
             <a:r>
-              <a:t>Three differentiators, then the one-line comparison with general-purpose chatbots.</a:t>
+              <a:t>Walk through the flow left to right. Stress that code makes every decision and copies every fact; the LLM only rewrites messages the rules could not read.</a:t>
             </a:r>
           </a:p>
         </p:txBody>
@@ -524,8 +524,8 @@
 </p:notes>
 </file>
 
-<file path=ppt/notesSlides/notesSlide16.xml><?xml version="1.0" encoding="utf-8"?>
-<p:notes xmlns:a="http://schemas.openxmlformats.org/drawingml/2006/main" xmlns:p="http://schemas.openxmlformats.org/presentationml/2006/main" xmlns:r="http://schemas.openxmlformats.org/officeDocument/2006/relationships">
+<file path=ppt/notesSlides/notesSlide4.xml><?xml version="1.0" encoding="utf-8"?>
+<p:notes xmlns:a="http://schemas.openxmlformats.org/drawingml/2006/main" xmlns:r="http://schemas.openxmlformats.org/officeDocument/2006/relationships" xmlns:p="http://schemas.openxmlformats.org/presentationml/2006/main">
   <p:cSld>
     <p:spTree>
       <p:nvGrpSpPr>
@@ -557,7 +557,7 @@
           <a:lstStyle/>
           <a:p>
             <a:r>
-              <a:t>Mention that the stack is light: no GPU, no vector database, runs on a laptop. The project follows the hackathon coding guidelines.</a:t>
+              <a:t>Explain the four steps, then point at the diagram: parser, decide with its four branches, the LLM rewrite loop back into decide, then response and guard.</a:t>
             </a:r>
           </a:p>
         </p:txBody>
@@ -570,8 +570,8 @@
 </p:notes>
 </file>
 
-<file path=ppt/notesSlides/notesSlide17.xml><?xml version="1.0" encoding="utf-8"?>
-<p:notes xmlns:a="http://schemas.openxmlformats.org/drawingml/2006/main" xmlns:p="http://schemas.openxmlformats.org/presentationml/2006/main" xmlns:r="http://schemas.openxmlformats.org/officeDocument/2006/relationships">
+<file path=ppt/notesSlides/notesSlide5.xml><?xml version="1.0" encoding="utf-8"?>
+<p:notes xmlns:a="http://schemas.openxmlformats.org/drawingml/2006/main" xmlns:r="http://schemas.openxmlformats.org/officeDocument/2006/relationships" xmlns:p="http://schemas.openxmlformats.org/presentationml/2006/main">
   <p:cSld>
     <p:spTree>
       <p:nvGrpSpPr>
@@ -603,7 +603,7 @@
           <a:lstStyle/>
           <a:p>
             <a:r>
-              <a:t>Live demo at http://127.0.0.1:8000. Suggested order: price, clarify, follow-up 'lavender wali', a policy question, a refusal, then the LLM fallback question.</a:t>
+              <a:t>Mention that the stack is light: no GPU, no vector database, runs on a laptop. The project follows the hackathon coding guidelines.</a:t>
             </a:r>
           </a:p>
         </p:txBody>
@@ -616,8 +616,8 @@
 </p:notes>
 </file>
 
-<file path=ppt/notesSlides/notesSlide18.xml><?xml version="1.0" encoding="utf-8"?>
-<p:notes xmlns:a="http://schemas.openxmlformats.org/drawingml/2006/main" xmlns:p="http://schemas.openxmlformats.org/presentationml/2006/main" xmlns:r="http://schemas.openxmlformats.org/officeDocument/2006/relationships">
+<file path=ppt/notesSlides/notesSlide6.xml><?xml version="1.0" encoding="utf-8"?>
+<p:notes xmlns:a="http://schemas.openxmlformats.org/drawingml/2006/main" xmlns:r="http://schemas.openxmlformats.org/officeDocument/2006/relationships" xmlns:p="http://schemas.openxmlformats.org/presentationml/2006/main">
   <p:cSld>
     <p:spTree>
       <p:nvGrpSpPr>
@@ -649,7 +649,7 @@
           <a:lstStyle/>
           <a:p>
             <a:r>
-              <a:t>Be honest about limits; the jury rewards it. Then show the path to production.</a:t>
+              <a:t>Three differentiators, then the one-line comparison with general-purpose chatbots.</a:t>
             </a:r>
           </a:p>
         </p:txBody>
@@ -662,8 +662,8 @@
 </p:notes>
 </file>
 
-<file path=ppt/notesSlides/notesSlide19.xml><?xml version="1.0" encoding="utf-8"?>
-<p:notes xmlns:a="http://schemas.openxmlformats.org/drawingml/2006/main" xmlns:p="http://schemas.openxmlformats.org/presentationml/2006/main" xmlns:r="http://schemas.openxmlformats.org/officeDocument/2006/relationships">
+<file path=ppt/notesSlides/notesSlide7.xml><?xml version="1.0" encoding="utf-8"?>
+<p:notes xmlns:a="http://schemas.openxmlformats.org/drawingml/2006/main" xmlns:r="http://schemas.openxmlformats.org/officeDocument/2006/relationships" xmlns:p="http://schemas.openxmlformats.org/presentationml/2006/main">
   <p:cSld>
     <p:spTree>
       <p:nvGrpSpPr>
@@ -695,7 +695,7 @@
           <a:lstStyle/>
           <a:p>
             <a:r>
-              <a:t>Thank the jury and invite questions. Have the live demo open in a browser tab.</a:t>
+              <a:t>Live demo at http://127.0.0.1:8000. Suggested order: price, clarify, follow-up 'lavender wali', a policy question, a refusal, then the LLM fallback question.</a:t>
             </a:r>
           </a:p>
         </p:txBody>
@@ -709,7 +709,7 @@
 </file>
 
 <file path=ppt/notesSlides/notesSlide8.xml><?xml version="1.0" encoding="utf-8"?>
-<p:notes xmlns:a="http://schemas.openxmlformats.org/drawingml/2006/main" xmlns:p="http://schemas.openxmlformats.org/presentationml/2006/main" xmlns:r="http://schemas.openxmlformats.org/officeDocument/2006/relationships">
+<p:notes xmlns:a="http://schemas.openxmlformats.org/drawingml/2006/main" xmlns:r="http://schemas.openxmlformats.org/officeDocument/2006/relationships" xmlns:p="http://schemas.openxmlformats.org/presentationml/2006/main">
   <p:cSld>
     <p:spTree>
       <p:nvGrpSpPr>
@@ -741,7 +741,7 @@
           <a:lstStyle/>
           <a:p>
             <a:r>
-              <a:t>Introduce the team and the problem: R3, a shopping assistant that never invents prices. Round 1 was the proposal; today we show the working system on the real catalogue.</a:t>
+              <a:t>All numbers come from the organisers' evaluate.py and our latency report. Dev is 40 questions; the 150 test answers are scored by the organisers.</a:t>
             </a:r>
           </a:p>
         </p:txBody>
@@ -755,7 +755,7 @@
 </file>
 
 <file path=ppt/notesSlides/notesSlide9.xml><?xml version="1.0" encoding="utf-8"?>
-<p:notes xmlns:a="http://schemas.openxmlformats.org/drawingml/2006/main" xmlns:p="http://schemas.openxmlformats.org/presentationml/2006/main" xmlns:r="http://schemas.openxmlformats.org/officeDocument/2006/relationships">
+<p:notes xmlns:a="http://schemas.openxmlformats.org/drawingml/2006/main" xmlns:r="http://schemas.openxmlformats.org/officeDocument/2006/relationships" xmlns:p="http://schemas.openxmlformats.org/presentationml/2006/main">
   <p:cSld>
     <p:spTree>
       <p:nvGrpSpPr>
@@ -787,7 +787,7 @@
           <a:lstStyle/>
           <a:p>
             <a:r>
-              <a:t>Why this matters: a chatbot that invents a price or a return rule creates a legal and trust problem. Moffatt v. Air Canada shows companies are held to what their bot says.</a:t>
+              <a:t>Responsibility is 15% of the rubric. Emphasise: no invented facts, honest refusals, and the LLM has no way to put a price or product ID in front of a shopper.</a:t>
             </a:r>
           </a:p>
         </p:txBody>
@@ -1112,8 +1112,383 @@
 </p:sldMaster>
 </file>
 
+<file path=ppt/slides/slide1.xml><?xml version="1.0" encoding="utf-8"?>
+<p:sld xmlns:a="http://schemas.openxmlformats.org/drawingml/2006/main" xmlns:r="http://schemas.openxmlformats.org/officeDocument/2006/relationships" xmlns:p="http://schemas.openxmlformats.org/presentationml/2006/main">
+  <p:cSld>
+    <p:bg>
+      <p:bgPr>
+        <a:solidFill>
+          <a:srgbClr val="1F4788"/>
+        </a:solidFill>
+        <a:effectLst/>
+      </p:bgPr>
+    </p:bg>
+    <p:spTree>
+      <p:nvGrpSpPr>
+        <p:cNvPr id="1" name=""/>
+        <p:cNvGrpSpPr/>
+        <p:nvPr/>
+      </p:nvGrpSpPr>
+      <p:grpSpPr>
+        <a:xfrm>
+          <a:off x="0" y="0"/>
+          <a:ext cx="0" cy="0"/>
+          <a:chOff x="0" y="0"/>
+          <a:chExt cx="0" cy="0"/>
+        </a:xfrm>
+      </p:grpSpPr>
+      <p:sp>
+        <p:nvSpPr>
+          <p:cNvPr id="2" name="TextBox 1"/>
+          <p:cNvSpPr txBox="1"/>
+          <p:nvPr/>
+        </p:nvSpPr>
+        <p:spPr>
+          <a:xfrm>
+            <a:off x="457200" y="1097280"/>
+            <a:ext cx="8229600" cy="548640"/>
+          </a:xfrm>
+          <a:prstGeom prst="rect">
+            <a:avLst/>
+          </a:prstGeom>
+          <a:noFill/>
+        </p:spPr>
+        <p:txBody>
+          <a:bodyPr wrap="square" anchor="ctr">
+            <a:spAutoFit/>
+          </a:bodyPr>
+          <a:lstStyle/>
+          <a:p>
+            <a:pPr algn="ctr"/>
+            <a:r>
+              <a:rPr sz="5400" b="1" i="0">
+                <a:solidFill>
+                  <a:srgbClr val="FFFFFF"/>
+                </a:solidFill>
+                <a:latin typeface="Calibri"/>
+              </a:rPr>
+              <a:t>L1 JURY PRESENTATION</a:t>
+            </a:r>
+          </a:p>
+        </p:txBody>
+      </p:sp>
+      <p:sp>
+        <p:nvSpPr>
+          <p:cNvPr id="3" name="TextBox 2"/>
+          <p:cNvSpPr txBox="1"/>
+          <p:nvPr/>
+        </p:nvSpPr>
+        <p:spPr>
+          <a:xfrm>
+            <a:off x="457200" y="1737360"/>
+            <a:ext cx="8229600" cy="365760"/>
+          </a:xfrm>
+          <a:prstGeom prst="rect">
+            <a:avLst/>
+          </a:prstGeom>
+          <a:noFill/>
+        </p:spPr>
+        <p:txBody>
+          <a:bodyPr wrap="square" anchor="ctr">
+            <a:spAutoFit/>
+          </a:bodyPr>
+          <a:lstStyle/>
+          <a:p>
+            <a:pPr algn="ctr"/>
+            <a:r>
+              <a:rPr sz="2800" b="0" i="0">
+                <a:solidFill>
+                  <a:srgbClr val="00A4EF"/>
+                </a:solidFill>
+                <a:latin typeface="Calibri"/>
+              </a:rPr>
+              <a:t>AI Frontier Challenge 2026 · Offline Hackathon L1</a:t>
+            </a:r>
+          </a:p>
+        </p:txBody>
+      </p:sp>
+      <p:sp>
+        <p:nvSpPr>
+          <p:cNvPr id="4" name="TextBox 3"/>
+          <p:cNvSpPr txBox="1"/>
+          <p:nvPr/>
+        </p:nvSpPr>
+        <p:spPr>
+          <a:xfrm>
+            <a:off x="914400" y="2560320"/>
+            <a:ext cx="3200400" cy="274320"/>
+          </a:xfrm>
+          <a:prstGeom prst="rect">
+            <a:avLst/>
+          </a:prstGeom>
+          <a:noFill/>
+        </p:spPr>
+        <p:txBody>
+          <a:bodyPr wrap="square" anchor="t">
+            <a:spAutoFit/>
+          </a:bodyPr>
+          <a:lstStyle/>
+          <a:p>
+            <a:r>
+              <a:rPr sz="1400" b="1" i="0">
+                <a:solidFill>
+                  <a:srgbClr val="F5F5F5"/>
+                </a:solidFill>
+                <a:latin typeface="Calibri"/>
+              </a:rPr>
+              <a:t>Team Name</a:t>
+            </a:r>
+          </a:p>
+        </p:txBody>
+      </p:sp>
+      <p:sp>
+        <p:nvSpPr>
+          <p:cNvPr id="5" name="TextBox 4"/>
+          <p:cNvSpPr txBox="1"/>
+          <p:nvPr/>
+        </p:nvSpPr>
+        <p:spPr>
+          <a:xfrm>
+            <a:off x="914400" y="2880360"/>
+            <a:ext cx="3200400" cy="320040"/>
+          </a:xfrm>
+          <a:prstGeom prst="rect">
+            <a:avLst/>
+          </a:prstGeom>
+          <a:noFill/>
+        </p:spPr>
+        <p:txBody>
+          <a:bodyPr wrap="square" anchor="t">
+            <a:spAutoFit/>
+          </a:bodyPr>
+          <a:lstStyle/>
+          <a:p>
+            <a:r>
+              <a:rPr sz="1800" b="0" i="0">
+                <a:solidFill>
+                  <a:srgbClr val="FFFFFF"/>
+                </a:solidFill>
+                <a:latin typeface="Calibri"/>
+              </a:rPr>
+              <a:t>Tech Titans (TEAM-001450)</a:t>
+            </a:r>
+          </a:p>
+        </p:txBody>
+      </p:sp>
+      <p:sp>
+        <p:nvSpPr>
+          <p:cNvPr id="6" name="TextBox 5"/>
+          <p:cNvSpPr txBox="1"/>
+          <p:nvPr/>
+        </p:nvSpPr>
+        <p:spPr>
+          <a:xfrm>
+            <a:off x="5029200" y="2560320"/>
+            <a:ext cx="3200400" cy="274320"/>
+          </a:xfrm>
+          <a:prstGeom prst="rect">
+            <a:avLst/>
+          </a:prstGeom>
+          <a:noFill/>
+        </p:spPr>
+        <p:txBody>
+          <a:bodyPr wrap="square" anchor="t">
+            <a:spAutoFit/>
+          </a:bodyPr>
+          <a:lstStyle/>
+          <a:p>
+            <a:r>
+              <a:rPr sz="1400" b="1" i="0">
+                <a:solidFill>
+                  <a:srgbClr val="F5F5F5"/>
+                </a:solidFill>
+                <a:latin typeface="Calibri"/>
+              </a:rPr>
+              <a:t>Team Leader</a:t>
+            </a:r>
+          </a:p>
+        </p:txBody>
+      </p:sp>
+      <p:sp>
+        <p:nvSpPr>
+          <p:cNvPr id="7" name="TextBox 6"/>
+          <p:cNvSpPr txBox="1"/>
+          <p:nvPr/>
+        </p:nvSpPr>
+        <p:spPr>
+          <a:xfrm>
+            <a:off x="5029200" y="2880360"/>
+            <a:ext cx="3200400" cy="320040"/>
+          </a:xfrm>
+          <a:prstGeom prst="rect">
+            <a:avLst/>
+          </a:prstGeom>
+          <a:noFill/>
+        </p:spPr>
+        <p:txBody>
+          <a:bodyPr wrap="square" anchor="t">
+            <a:spAutoFit/>
+          </a:bodyPr>
+          <a:lstStyle/>
+          <a:p>
+            <a:r>
+              <a:rPr sz="1800" b="0" i="0">
+                <a:solidFill>
+                  <a:srgbClr val="FFFFFF"/>
+                </a:solidFill>
+                <a:latin typeface="Calibri"/>
+              </a:rPr>
+              <a:t>Varun Raj Chevala</a:t>
+            </a:r>
+          </a:p>
+        </p:txBody>
+      </p:sp>
+      <p:sp>
+        <p:nvSpPr>
+          <p:cNvPr id="8" name="TextBox 7"/>
+          <p:cNvSpPr txBox="1"/>
+          <p:nvPr/>
+        </p:nvSpPr>
+        <p:spPr>
+          <a:xfrm>
+            <a:off x="914400" y="3383280"/>
+            <a:ext cx="3200400" cy="274320"/>
+          </a:xfrm>
+          <a:prstGeom prst="rect">
+            <a:avLst/>
+          </a:prstGeom>
+          <a:noFill/>
+        </p:spPr>
+        <p:txBody>
+          <a:bodyPr wrap="square" anchor="t">
+            <a:spAutoFit/>
+          </a:bodyPr>
+          <a:lstStyle/>
+          <a:p>
+            <a:r>
+              <a:rPr sz="1400" b="1" i="0">
+                <a:solidFill>
+                  <a:srgbClr val="F5F5F5"/>
+                </a:solidFill>
+                <a:latin typeface="Calibri"/>
+              </a:rPr>
+              <a:t>Track</a:t>
+            </a:r>
+          </a:p>
+        </p:txBody>
+      </p:sp>
+      <p:sp>
+        <p:nvSpPr>
+          <p:cNvPr id="9" name="TextBox 8"/>
+          <p:cNvSpPr txBox="1"/>
+          <p:nvPr/>
+        </p:nvSpPr>
+        <p:spPr>
+          <a:xfrm>
+            <a:off x="914400" y="3703320"/>
+            <a:ext cx="3200400" cy="320040"/>
+          </a:xfrm>
+          <a:prstGeom prst="rect">
+            <a:avLst/>
+          </a:prstGeom>
+          <a:noFill/>
+        </p:spPr>
+        <p:txBody>
+          <a:bodyPr wrap="square" anchor="t">
+            <a:spAutoFit/>
+          </a:bodyPr>
+          <a:lstStyle/>
+          <a:p>
+            <a:r>
+              <a:rPr sz="1800" b="0" i="0">
+                <a:solidFill>
+                  <a:srgbClr val="FFFFFF"/>
+                </a:solidFill>
+                <a:latin typeface="Calibri"/>
+              </a:rPr>
+              <a:t>Retail (R3): Shopping Assistant</a:t>
+            </a:r>
+          </a:p>
+        </p:txBody>
+      </p:sp>
+      <p:sp>
+        <p:nvSpPr>
+          <p:cNvPr id="10" name="TextBox 9"/>
+          <p:cNvSpPr txBox="1"/>
+          <p:nvPr/>
+        </p:nvSpPr>
+        <p:spPr>
+          <a:xfrm>
+            <a:off x="5029200" y="3383280"/>
+            <a:ext cx="3200400" cy="274320"/>
+          </a:xfrm>
+          <a:prstGeom prst="rect">
+            <a:avLst/>
+          </a:prstGeom>
+          <a:noFill/>
+        </p:spPr>
+        <p:txBody>
+          <a:bodyPr wrap="square" anchor="t">
+            <a:spAutoFit/>
+          </a:bodyPr>
+          <a:lstStyle/>
+          <a:p>
+            <a:r>
+              <a:rPr sz="1400" b="1" i="0">
+                <a:solidFill>
+                  <a:srgbClr val="F5F5F5"/>
+                </a:solidFill>
+                <a:latin typeface="Calibri"/>
+              </a:rPr>
+              <a:t>Date</a:t>
+            </a:r>
+          </a:p>
+        </p:txBody>
+      </p:sp>
+      <p:sp>
+        <p:nvSpPr>
+          <p:cNvPr id="11" name="TextBox 10"/>
+          <p:cNvSpPr txBox="1"/>
+          <p:nvPr/>
+        </p:nvSpPr>
+        <p:spPr>
+          <a:xfrm>
+            <a:off x="5029200" y="3703320"/>
+            <a:ext cx="3200400" cy="320040"/>
+          </a:xfrm>
+          <a:prstGeom prst="rect">
+            <a:avLst/>
+          </a:prstGeom>
+          <a:noFill/>
+        </p:spPr>
+        <p:txBody>
+          <a:bodyPr wrap="square" anchor="t">
+            <a:spAutoFit/>
+          </a:bodyPr>
+          <a:lstStyle/>
+          <a:p>
+            <a:r>
+              <a:rPr sz="1800" b="0" i="0">
+                <a:solidFill>
+                  <a:srgbClr val="FFFFFF"/>
+                </a:solidFill>
+                <a:latin typeface="Calibri"/>
+              </a:rPr>
+              <a:t>Oct 30, 2026</a:t>
+            </a:r>
+          </a:p>
+        </p:txBody>
+      </p:sp>
+    </p:spTree>
+  </p:cSld>
+  <p:clrMapOvr>
+    <a:masterClrMapping/>
+  </p:clrMapOvr>
+</p:sld>
+</file>
+
 <file path=ppt/slides/slide10.xml><?xml version="1.0" encoding="utf-8"?>
-<p:sld xmlns:a="http://schemas.openxmlformats.org/drawingml/2006/main" xmlns:p="http://schemas.openxmlformats.org/presentationml/2006/main" xmlns:r="http://schemas.openxmlformats.org/officeDocument/2006/relationships">
+<p:sld xmlns:a="http://schemas.openxmlformats.org/drawingml/2006/main" xmlns:r="http://schemas.openxmlformats.org/officeDocument/2006/relationships" xmlns:p="http://schemas.openxmlformats.org/presentationml/2006/main">
   <p:cSld>
     <p:bg>
       <p:bgPr>
@@ -1129,7 +1504,14 @@
         <p:cNvGrpSpPr/>
         <p:nvPr/>
       </p:nvGrpSpPr>
-      <p:grpSpPr/>
+      <p:grpSpPr>
+        <a:xfrm>
+          <a:off x="0" y="0"/>
+          <a:ext cx="0" cy="0"/>
+          <a:chOff x="0" y="0"/>
+          <a:chExt cx="0" cy="0"/>
+        </a:xfrm>
+      </p:grpSpPr>
       <p:sp>
         <p:nvSpPr>
           <p:cNvPr id="2" name="Title bar"/>
@@ -1171,6 +1553,7 @@
           <a:lstStyle/>
           <a:p>
             <a:pPr algn="ctr"/>
+            <a:endParaRPr/>
           </a:p>
         </p:txBody>
       </p:sp>
@@ -1203,7 +1586,7 @@
                 </a:solidFill>
                 <a:latin typeface="Calibri"/>
               </a:rPr>
-              <a:t>Solution Built</a:t>
+              <a:t>Challenges &amp; Mitigation</a:t>
             </a:r>
           </a:p>
         </p:txBody>
@@ -1216,28 +1599,28 @@
         </p:nvSpPr>
         <p:spPr>
           <a:xfrm>
-            <a:off x="457200" y="1005840"/>
-            <a:ext cx="8229600" cy="320040"/>
-          </a:xfrm>
-          <a:prstGeom prst="rect">
-            <a:avLst/>
-          </a:prstGeom>
-          <a:noFill/>
-        </p:spPr>
-        <p:txBody>
-          <a:bodyPr wrap="square" anchor="ctr">
-            <a:spAutoFit/>
-          </a:bodyPr>
-          <a:lstStyle/>
-          <a:p>
-            <a:r>
-              <a:rPr sz="2000" b="1" i="0">
-                <a:solidFill>
-                  <a:srgbClr val="1F4788"/>
-                </a:solidFill>
-                <a:latin typeface="Calibri"/>
-              </a:rPr>
-              <a:t>Solution Overview</a:t>
+            <a:off x="457200" y="914400"/>
+            <a:ext cx="8229600" cy="274320"/>
+          </a:xfrm>
+          <a:prstGeom prst="rect">
+            <a:avLst/>
+          </a:prstGeom>
+          <a:noFill/>
+        </p:spPr>
+        <p:txBody>
+          <a:bodyPr wrap="square" anchor="t">
+            <a:spAutoFit/>
+          </a:bodyPr>
+          <a:lstStyle/>
+          <a:p>
+            <a:r>
+              <a:rPr sz="1600" b="1" i="0">
+                <a:solidFill>
+                  <a:srgbClr val="2D2D2D"/>
+                </a:solidFill>
+                <a:latin typeface="Calibri"/>
+              </a:rPr>
+              <a:t>Challenge 1: Hinglish and confusing names</a:t>
             </a:r>
           </a:p>
         </p:txBody>
@@ -1250,8 +1633,8 @@
         </p:nvSpPr>
         <p:spPr>
           <a:xfrm>
-            <a:off x="640080" y="1371600"/>
-            <a:ext cx="7863840" cy="2103120"/>
+            <a:off x="640080" y="1243584"/>
+            <a:ext cx="7863840" cy="777240"/>
           </a:xfrm>
           <a:prstGeom prst="rect">
             <a:avLst/>
@@ -1264,111 +1647,43 @@
           </a:bodyPr>
           <a:lstStyle/>
           <a:p>
-            <a:pPr marL="342900" indent="-342900">
-              <a:spcAft>
-                <a:spcPts val="400"/>
-              </a:spcAft>
-              <a:buSzPct val="100000"/>
-              <a:buChar char="•"/>
-            </a:pPr>
-            <a:r>
-              <a:rPr sz="1500" b="1" i="0">
+            <a:r>
+              <a:rPr sz="1300" b="1" i="0">
                 <a:solidFill>
                   <a:srgbClr val="2D2D2D"/>
                 </a:solidFill>
                 <a:latin typeface="Calibri"/>
               </a:rPr>
-              <a:t>What: </a:t>
-            </a:r>
-            <a:r>
-              <a:rPr sz="1500" b="0" i="0">
+              <a:t>Problem: </a:t>
+            </a:r>
+            <a:r>
+              <a:rPr sz="1300" b="0" i="0">
                 <a:solidFill>
                   <a:srgbClr val="2D2D2D"/>
                 </a:solidFill>
                 <a:latin typeface="Calibri"/>
               </a:rPr>
-              <a:t>a working chatbot over the 5,000-product catalogue and store policy that cites a product ID or policy section for every fact.</a:t>
-            </a:r>
-          </a:p>
-          <a:p>
-            <a:pPr marL="342900" indent="-342900">
-              <a:spcAft>
-                <a:spcPts val="400"/>
-              </a:spcAft>
-              <a:buSzPct val="100000"/>
-              <a:buChar char="•"/>
-            </a:pPr>
-            <a:r>
-              <a:rPr sz="1500" b="1" i="0">
+              <a:t>Misspelt or split names (“krida ion flex”); Hindi words that are also product names (“khilona”).</a:t>
+            </a:r>
+          </a:p>
+          <a:p>
+            <a:r>
+              <a:rPr sz="1300" b="1" i="0">
                 <a:solidFill>
                   <a:srgbClr val="2D2D2D"/>
                 </a:solidFill>
                 <a:latin typeface="Calibri"/>
               </a:rPr>
-              <a:t>How: </a:t>
-            </a:r>
-            <a:r>
-              <a:rPr sz="1500" b="0" i="0">
+              <a:t>Mitigation: </a:t>
+            </a:r>
+            <a:r>
+              <a:rPr sz="1300" b="0" i="0">
                 <a:solidFill>
                   <a:srgbClr val="2D2D2D"/>
                 </a:solidFill>
                 <a:latin typeface="Calibri"/>
               </a:rPr>
-              <a:t>code reads the question, filters the catalogue and decides: answer, ask which one, or say “I don’t have that”.</a:t>
-            </a:r>
-          </a:p>
-          <a:p>
-            <a:pPr marL="342900" indent="-342900">
-              <a:spcAft>
-                <a:spcPts val="400"/>
-              </a:spcAft>
-              <a:buSzPct val="100000"/>
-              <a:buChar char="•"/>
-            </a:pPr>
-            <a:r>
-              <a:rPr sz="1500" b="1" i="0">
-                <a:solidFill>
-                  <a:srgbClr val="2D2D2D"/>
-                </a:solidFill>
-                <a:latin typeface="Calibri"/>
-              </a:rPr>
-              <a:t>LLM only as a fallback: </a:t>
-            </a:r>
-            <a:r>
-              <a:rPr sz="1500" b="0" i="0">
-                <a:solidFill>
-                  <a:srgbClr val="2D2D2D"/>
-                </a:solidFill>
-                <a:latin typeface="Calibri"/>
-              </a:rPr>
-              <a:t>when the rules can’t understand a message (“bread garam karne wali machine”), Groq rewrites it and the rules decide again.</a:t>
-            </a:r>
-          </a:p>
-          <a:p>
-            <a:pPr marL="342900" indent="-342900">
-              <a:spcAft>
-                <a:spcPts val="400"/>
-              </a:spcAft>
-              <a:buSzPct val="100000"/>
-              <a:buChar char="•"/>
-            </a:pPr>
-            <a:r>
-              <a:rPr sz="1500" b="1" i="0">
-                <a:solidFill>
-                  <a:srgbClr val="2D2D2D"/>
-                </a:solidFill>
-                <a:latin typeface="Calibri"/>
-              </a:rPr>
-              <a:t>Safe: </a:t>
-            </a:r>
-            <a:r>
-              <a:rPr sz="1500" b="0" i="0">
-                <a:solidFill>
-                  <a:srgbClr val="2D2D2D"/>
-                </a:solidFill>
-                <a:latin typeface="Calibri"/>
-              </a:rPr>
-              <a:t>every price comes from the catalogue, and a final guard removes any ₹ amount that isn’t backed by a cited product.</a:t>
+              <a:t>Catalogue-built vocabulary, fuzzy matching, and ignoring coincidental names.</a:t>
             </a:r>
           </a:p>
         </p:txBody>
@@ -1381,8 +1696,8 @@
         </p:nvSpPr>
         <p:spPr>
           <a:xfrm>
-            <a:off x="457200" y="3566160"/>
-            <a:ext cx="8229600" cy="1097280"/>
+            <a:off x="457200" y="2084832"/>
+            <a:ext cx="8229600" cy="9144"/>
           </a:xfrm>
           <a:prstGeom prst="rect">
             <a:avLst/>
@@ -1414,30 +1729,126 @@
           <a:lstStyle/>
           <a:p>
             <a:pPr algn="ctr"/>
-          </a:p>
-        </p:txBody>
-      </p:sp>
-      <p:sp>
-        <p:nvSpPr>
-          <p:cNvPr id="7" name="Step 1"/>
+            <a:endParaRPr/>
+          </a:p>
+        </p:txBody>
+      </p:sp>
+      <p:sp>
+        <p:nvSpPr>
+          <p:cNvPr id="7" name="TextBox 6"/>
+          <p:cNvSpPr txBox="1"/>
+          <p:nvPr/>
+        </p:nvSpPr>
+        <p:spPr>
+          <a:xfrm>
+            <a:off x="457200" y="2176272"/>
+            <a:ext cx="8229600" cy="274320"/>
+          </a:xfrm>
+          <a:prstGeom prst="rect">
+            <a:avLst/>
+          </a:prstGeom>
+          <a:noFill/>
+        </p:spPr>
+        <p:txBody>
+          <a:bodyPr wrap="square" anchor="t">
+            <a:spAutoFit/>
+          </a:bodyPr>
+          <a:lstStyle/>
+          <a:p>
+            <a:r>
+              <a:rPr sz="1600" b="1" i="0">
+                <a:solidFill>
+                  <a:srgbClr val="2D2D2D"/>
+                </a:solidFill>
+                <a:latin typeface="Calibri"/>
+              </a:rPr>
+              <a:t>Challenge 2: Ambiguous questions and missing facts</a:t>
+            </a:r>
+          </a:p>
+        </p:txBody>
+      </p:sp>
+      <p:sp>
+        <p:nvSpPr>
+          <p:cNvPr id="8" name="TextBox 7"/>
+          <p:cNvSpPr txBox="1"/>
+          <p:nvPr/>
+        </p:nvSpPr>
+        <p:spPr>
+          <a:xfrm>
+            <a:off x="640080" y="2505456"/>
+            <a:ext cx="7863840" cy="777240"/>
+          </a:xfrm>
+          <a:prstGeom prst="rect">
+            <a:avLst/>
+          </a:prstGeom>
+          <a:noFill/>
+        </p:spPr>
+        <p:txBody>
+          <a:bodyPr wrap="square" anchor="t">
+            <a:spAutoFit/>
+          </a:bodyPr>
+          <a:lstStyle/>
+          <a:p>
+            <a:r>
+              <a:rPr sz="1300" b="1" i="0">
+                <a:solidFill>
+                  <a:srgbClr val="2D2D2D"/>
+                </a:solidFill>
+                <a:latin typeface="Calibri"/>
+              </a:rPr>
+              <a:t>Problem: </a:t>
+            </a:r>
+            <a:r>
+              <a:rPr sz="1300" b="0" i="0">
+                <a:solidFill>
+                  <a:srgbClr val="2D2D2D"/>
+                </a:solidFill>
+                <a:latin typeface="Calibri"/>
+              </a:rPr>
+              <a:t>Many variants differ in price or stock, and many attributes are simply not listed.</a:t>
+            </a:r>
+          </a:p>
+          <a:p>
+            <a:r>
+              <a:rPr sz="1300" b="1" i="0">
+                <a:solidFill>
+                  <a:srgbClr val="2D2D2D"/>
+                </a:solidFill>
+                <a:latin typeface="Calibri"/>
+              </a:rPr>
+              <a:t>Mitigation: </a:t>
+            </a:r>
+            <a:r>
+              <a:rPr sz="1300" b="0" i="0">
+                <a:solidFill>
+                  <a:srgbClr val="2D2D2D"/>
+                </a:solidFill>
+                <a:latin typeface="Calibri"/>
+              </a:rPr>
+              <a:t>Clarify only when the asked detail differs; treat missing facts as unknown and refuse instead of guessing.</a:t>
+            </a:r>
+          </a:p>
+        </p:txBody>
+      </p:sp>
+      <p:sp>
+        <p:nvSpPr>
+          <p:cNvPr id="9" name="Rectangle 8"/>
           <p:cNvSpPr/>
           <p:nvPr/>
         </p:nvSpPr>
         <p:spPr>
           <a:xfrm>
-            <a:off x="594360" y="3749039"/>
-            <a:ext cx="1371600" cy="731520"/>
-          </a:xfrm>
-          <a:prstGeom prst="roundRect">
+            <a:off x="457200" y="3346704"/>
+            <a:ext cx="8229600" cy="9144"/>
+          </a:xfrm>
+          <a:prstGeom prst="rect">
             <a:avLst/>
           </a:prstGeom>
           <a:solidFill>
-            <a:srgbClr val="FFFFFF"/>
+            <a:srgbClr val="F5F5F5"/>
           </a:solidFill>
-          <a:ln w="12700">
-            <a:solidFill>
-              <a:srgbClr val="1F4788"/>
-            </a:solidFill>
+          <a:ln>
+            <a:noFill/>
           </a:ln>
           <a:effectLst/>
         </p:spPr>
@@ -1456,412 +1867,107 @@
           </a:fontRef>
         </p:style>
         <p:txBody>
-          <a:bodyPr rtlCol="0" anchor="ctr" wrap="square" lIns="54864" rIns="54864"/>
+          <a:bodyPr rtlCol="0" anchor="ctr"/>
           <a:lstStyle/>
           <a:p>
             <a:pPr algn="ctr"/>
-            <a:r>
-              <a:rPr sz="1100" b="1" i="0">
-                <a:solidFill>
-                  <a:srgbClr val="1F4788"/>
-                </a:solidFill>
-                <a:latin typeface="Calibri"/>
-              </a:rPr>
-              <a:t>Shopper question in English or Hinglish</a:t>
-            </a:r>
-          </a:p>
-        </p:txBody>
-      </p:sp>
-      <p:sp>
-        <p:nvSpPr>
-          <p:cNvPr id="8" name="Arrow 1"/>
-          <p:cNvSpPr/>
-          <p:nvPr/>
-        </p:nvSpPr>
-        <p:spPr>
-          <a:xfrm>
-            <a:off x="2011680" y="4032504"/>
-            <a:ext cx="182880" cy="164592"/>
-          </a:xfrm>
-          <a:prstGeom prst="rightArrow">
-            <a:avLst/>
-          </a:prstGeom>
-          <a:solidFill>
-            <a:srgbClr val="00A4EF"/>
-          </a:solidFill>
-          <a:ln>
-            <a:noFill/>
-          </a:ln>
-          <a:effectLst/>
-        </p:spPr>
-        <p:style>
-          <a:lnRef idx="1">
-            <a:schemeClr val="accent1"/>
-          </a:lnRef>
-          <a:fillRef idx="3">
-            <a:schemeClr val="accent1"/>
-          </a:fillRef>
-          <a:effectRef idx="2">
-            <a:schemeClr val="accent1"/>
-          </a:effectRef>
-          <a:fontRef idx="minor">
-            <a:schemeClr val="lt1"/>
-          </a:fontRef>
-        </p:style>
-        <p:txBody>
-          <a:bodyPr rtlCol="0" anchor="ctr"/>
-          <a:lstStyle/>
-          <a:p>
-            <a:pPr algn="ctr"/>
-          </a:p>
-        </p:txBody>
-      </p:sp>
-      <p:sp>
-        <p:nvSpPr>
-          <p:cNvPr id="9" name="Step 2"/>
-          <p:cNvSpPr/>
-          <p:nvPr/>
-        </p:nvSpPr>
-        <p:spPr>
-          <a:xfrm>
-            <a:off x="2240280" y="3749039"/>
-            <a:ext cx="1371600" cy="731520"/>
-          </a:xfrm>
-          <a:prstGeom prst="roundRect">
-            <a:avLst/>
-          </a:prstGeom>
-          <a:solidFill>
-            <a:srgbClr val="FFFFFF"/>
-          </a:solidFill>
-          <a:ln w="12700">
-            <a:solidFill>
-              <a:srgbClr val="1F4788"/>
-            </a:solidFill>
-          </a:ln>
-          <a:effectLst/>
-        </p:spPr>
-        <p:style>
-          <a:lnRef idx="1">
-            <a:schemeClr val="accent1"/>
-          </a:lnRef>
-          <a:fillRef idx="3">
-            <a:schemeClr val="accent1"/>
-          </a:fillRef>
-          <a:effectRef idx="2">
-            <a:schemeClr val="accent1"/>
-          </a:effectRef>
-          <a:fontRef idx="minor">
-            <a:schemeClr val="lt1"/>
-          </a:fontRef>
-        </p:style>
-        <p:txBody>
-          <a:bodyPr rtlCol="0" anchor="ctr" wrap="square" lIns="54864" rIns="54864"/>
-          <a:lstStyle/>
-          <a:p>
-            <a:pPr algn="ctr"/>
-            <a:r>
-              <a:rPr sz="1100" b="1" i="0">
-                <a:solidFill>
-                  <a:srgbClr val="1F4788"/>
-                </a:solidFill>
-                <a:latin typeface="Calibri"/>
-              </a:rPr>
-              <a:t>Parse names, filters and budget</a:t>
-            </a:r>
-          </a:p>
-        </p:txBody>
-      </p:sp>
-      <p:sp>
-        <p:nvSpPr>
-          <p:cNvPr id="10" name="Arrow 2"/>
-          <p:cNvSpPr/>
-          <p:nvPr/>
-        </p:nvSpPr>
-        <p:spPr>
-          <a:xfrm>
-            <a:off x="3657600" y="4032504"/>
-            <a:ext cx="182880" cy="164592"/>
-          </a:xfrm>
-          <a:prstGeom prst="rightArrow">
-            <a:avLst/>
-          </a:prstGeom>
-          <a:solidFill>
-            <a:srgbClr val="00A4EF"/>
-          </a:solidFill>
-          <a:ln>
-            <a:noFill/>
-          </a:ln>
-          <a:effectLst/>
-        </p:spPr>
-        <p:style>
-          <a:lnRef idx="1">
-            <a:schemeClr val="accent1"/>
-          </a:lnRef>
-          <a:fillRef idx="3">
-            <a:schemeClr val="accent1"/>
-          </a:fillRef>
-          <a:effectRef idx="2">
-            <a:schemeClr val="accent1"/>
-          </a:effectRef>
-          <a:fontRef idx="minor">
-            <a:schemeClr val="lt1"/>
-          </a:fontRef>
-        </p:style>
-        <p:txBody>
-          <a:bodyPr rtlCol="0" anchor="ctr"/>
-          <a:lstStyle/>
-          <a:p>
-            <a:pPr algn="ctr"/>
-          </a:p>
-        </p:txBody>
-      </p:sp>
-      <p:sp>
-        <p:nvSpPr>
-          <p:cNvPr id="11" name="Step 3"/>
-          <p:cNvSpPr/>
-          <p:nvPr/>
-        </p:nvSpPr>
-        <p:spPr>
-          <a:xfrm>
-            <a:off x="3886200" y="3749039"/>
-            <a:ext cx="1371600" cy="731520"/>
-          </a:xfrm>
-          <a:prstGeom prst="roundRect">
-            <a:avLst/>
-          </a:prstGeom>
-          <a:solidFill>
-            <a:srgbClr val="FFFFFF"/>
-          </a:solidFill>
-          <a:ln w="12700">
-            <a:solidFill>
-              <a:srgbClr val="1F4788"/>
-            </a:solidFill>
-          </a:ln>
-          <a:effectLst/>
-        </p:spPr>
-        <p:style>
-          <a:lnRef idx="1">
-            <a:schemeClr val="accent1"/>
-          </a:lnRef>
-          <a:fillRef idx="3">
-            <a:schemeClr val="accent1"/>
-          </a:fillRef>
-          <a:effectRef idx="2">
-            <a:schemeClr val="accent1"/>
-          </a:effectRef>
-          <a:fontRef idx="minor">
-            <a:schemeClr val="lt1"/>
-          </a:fontRef>
-        </p:style>
-        <p:txBody>
-          <a:bodyPr rtlCol="0" anchor="ctr" wrap="square" lIns="54864" rIns="54864"/>
-          <a:lstStyle/>
-          <a:p>
-            <a:pPr algn="ctr"/>
-            <a:r>
-              <a:rPr sz="1100" b="1" i="0">
-                <a:solidFill>
-                  <a:srgbClr val="1F4788"/>
-                </a:solidFill>
-                <a:latin typeface="Calibri"/>
-              </a:rPr>
-              <a:t>Decide: answer, clarify or refuse</a:t>
-            </a:r>
-          </a:p>
-        </p:txBody>
-      </p:sp>
-      <p:sp>
-        <p:nvSpPr>
-          <p:cNvPr id="12" name="Arrow 3"/>
-          <p:cNvSpPr/>
-          <p:nvPr/>
-        </p:nvSpPr>
-        <p:spPr>
-          <a:xfrm>
-            <a:off x="5303520" y="4032504"/>
-            <a:ext cx="182880" cy="164592"/>
-          </a:xfrm>
-          <a:prstGeom prst="rightArrow">
-            <a:avLst/>
-          </a:prstGeom>
-          <a:solidFill>
-            <a:srgbClr val="00A4EF"/>
-          </a:solidFill>
-          <a:ln>
-            <a:noFill/>
-          </a:ln>
-          <a:effectLst/>
-        </p:spPr>
-        <p:style>
-          <a:lnRef idx="1">
-            <a:schemeClr val="accent1"/>
-          </a:lnRef>
-          <a:fillRef idx="3">
-            <a:schemeClr val="accent1"/>
-          </a:fillRef>
-          <a:effectRef idx="2">
-            <a:schemeClr val="accent1"/>
-          </a:effectRef>
-          <a:fontRef idx="minor">
-            <a:schemeClr val="lt1"/>
-          </a:fontRef>
-        </p:style>
-        <p:txBody>
-          <a:bodyPr rtlCol="0" anchor="ctr"/>
-          <a:lstStyle/>
-          <a:p>
-            <a:pPr algn="ctr"/>
-          </a:p>
-        </p:txBody>
-      </p:sp>
-      <p:sp>
-        <p:nvSpPr>
-          <p:cNvPr id="13" name="Step 4"/>
-          <p:cNvSpPr/>
-          <p:nvPr/>
-        </p:nvSpPr>
-        <p:spPr>
-          <a:xfrm>
-            <a:off x="5532120" y="3749039"/>
-            <a:ext cx="1371600" cy="731520"/>
-          </a:xfrm>
-          <a:prstGeom prst="roundRect">
-            <a:avLst/>
-          </a:prstGeom>
-          <a:solidFill>
-            <a:srgbClr val="FFFFFF"/>
-          </a:solidFill>
-          <a:ln w="12700">
-            <a:solidFill>
-              <a:srgbClr val="1F4788"/>
-            </a:solidFill>
-          </a:ln>
-          <a:effectLst/>
-        </p:spPr>
-        <p:style>
-          <a:lnRef idx="1">
-            <a:schemeClr val="accent1"/>
-          </a:lnRef>
-          <a:fillRef idx="3">
-            <a:schemeClr val="accent1"/>
-          </a:fillRef>
-          <a:effectRef idx="2">
-            <a:schemeClr val="accent1"/>
-          </a:effectRef>
-          <a:fontRef idx="minor">
-            <a:schemeClr val="lt1"/>
-          </a:fontRef>
-        </p:style>
-        <p:txBody>
-          <a:bodyPr rtlCol="0" anchor="ctr" wrap="square" lIns="54864" rIns="54864"/>
-          <a:lstStyle/>
-          <a:p>
-            <a:pPr algn="ctr"/>
-            <a:r>
-              <a:rPr sz="1100" b="1" i="0">
-                <a:solidFill>
-                  <a:srgbClr val="1F4788"/>
-                </a:solidFill>
-                <a:latin typeface="Calibri"/>
-              </a:rPr>
-              <a:t>LLM rewrite only if not understood</a:t>
-            </a:r>
-          </a:p>
-        </p:txBody>
-      </p:sp>
-      <p:sp>
-        <p:nvSpPr>
-          <p:cNvPr id="14" name="Arrow 4"/>
-          <p:cNvSpPr/>
-          <p:nvPr/>
-        </p:nvSpPr>
-        <p:spPr>
-          <a:xfrm>
-            <a:off x="6949440" y="4032504"/>
-            <a:ext cx="182880" cy="164592"/>
-          </a:xfrm>
-          <a:prstGeom prst="rightArrow">
-            <a:avLst/>
-          </a:prstGeom>
-          <a:solidFill>
-            <a:srgbClr val="00A4EF"/>
-          </a:solidFill>
-          <a:ln>
-            <a:noFill/>
-          </a:ln>
-          <a:effectLst/>
-        </p:spPr>
-        <p:style>
-          <a:lnRef idx="1">
-            <a:schemeClr val="accent1"/>
-          </a:lnRef>
-          <a:fillRef idx="3">
-            <a:schemeClr val="accent1"/>
-          </a:fillRef>
-          <a:effectRef idx="2">
-            <a:schemeClr val="accent1"/>
-          </a:effectRef>
-          <a:fontRef idx="minor">
-            <a:schemeClr val="lt1"/>
-          </a:fontRef>
-        </p:style>
-        <p:txBody>
-          <a:bodyPr rtlCol="0" anchor="ctr"/>
-          <a:lstStyle/>
-          <a:p>
-            <a:pPr algn="ctr"/>
-          </a:p>
-        </p:txBody>
-      </p:sp>
-      <p:sp>
-        <p:nvSpPr>
-          <p:cNvPr id="15" name="Step 5"/>
-          <p:cNvSpPr/>
-          <p:nvPr/>
-        </p:nvSpPr>
-        <p:spPr>
-          <a:xfrm>
-            <a:off x="7178040" y="3749039"/>
-            <a:ext cx="1371600" cy="731520"/>
-          </a:xfrm>
-          <a:prstGeom prst="roundRect">
-            <a:avLst/>
-          </a:prstGeom>
-          <a:solidFill>
-            <a:srgbClr val="1F4788"/>
-          </a:solidFill>
-          <a:ln>
-            <a:noFill/>
-          </a:ln>
-          <a:effectLst/>
-        </p:spPr>
-        <p:style>
-          <a:lnRef idx="1">
-            <a:schemeClr val="accent1"/>
-          </a:lnRef>
-          <a:fillRef idx="3">
-            <a:schemeClr val="accent1"/>
-          </a:fillRef>
-          <a:effectRef idx="2">
-            <a:schemeClr val="accent1"/>
-          </a:effectRef>
-          <a:fontRef idx="minor">
-            <a:schemeClr val="lt1"/>
-          </a:fontRef>
-        </p:style>
-        <p:txBody>
-          <a:bodyPr rtlCol="0" anchor="ctr" wrap="square" lIns="54864" rIns="54864"/>
-          <a:lstStyle/>
-          <a:p>
-            <a:pPr algn="ctr"/>
-            <a:r>
-              <a:rPr sz="1100" b="1" i="0">
-                <a:solidFill>
-                  <a:srgbClr val="FFFFFF"/>
-                </a:solidFill>
-                <a:latin typeface="Calibri"/>
-              </a:rPr>
-              <a:t>Reply with catalogue facts and citations</a:t>
+            <a:endParaRPr/>
+          </a:p>
+        </p:txBody>
+      </p:sp>
+      <p:sp>
+        <p:nvSpPr>
+          <p:cNvPr id="10" name="TextBox 9"/>
+          <p:cNvSpPr txBox="1"/>
+          <p:nvPr/>
+        </p:nvSpPr>
+        <p:spPr>
+          <a:xfrm>
+            <a:off x="457200" y="3438144"/>
+            <a:ext cx="8229600" cy="274320"/>
+          </a:xfrm>
+          <a:prstGeom prst="rect">
+            <a:avLst/>
+          </a:prstGeom>
+          <a:noFill/>
+        </p:spPr>
+        <p:txBody>
+          <a:bodyPr wrap="square" anchor="t">
+            <a:spAutoFit/>
+          </a:bodyPr>
+          <a:lstStyle/>
+          <a:p>
+            <a:r>
+              <a:rPr sz="1600" b="1" i="0">
+                <a:solidFill>
+                  <a:srgbClr val="2D2D2D"/>
+                </a:solidFill>
+                <a:latin typeface="Calibri"/>
+              </a:rPr>
+              <a:t>Challenge 3: An unpredictable, rate-limited LLM</a:t>
+            </a:r>
+          </a:p>
+        </p:txBody>
+      </p:sp>
+      <p:sp>
+        <p:nvSpPr>
+          <p:cNvPr id="11" name="TextBox 10"/>
+          <p:cNvSpPr txBox="1"/>
+          <p:nvPr/>
+        </p:nvSpPr>
+        <p:spPr>
+          <a:xfrm>
+            <a:off x="640080" y="3767328"/>
+            <a:ext cx="7863840" cy="777240"/>
+          </a:xfrm>
+          <a:prstGeom prst="rect">
+            <a:avLst/>
+          </a:prstGeom>
+          <a:noFill/>
+        </p:spPr>
+        <p:txBody>
+          <a:bodyPr wrap="square" anchor="t">
+            <a:spAutoFit/>
+          </a:bodyPr>
+          <a:lstStyle/>
+          <a:p>
+            <a:r>
+              <a:rPr sz="1300" b="1" i="0">
+                <a:solidFill>
+                  <a:srgbClr val="2D2D2D"/>
+                </a:solidFill>
+                <a:latin typeface="Calibri"/>
+              </a:rPr>
+              <a:t>Problem: </a:t>
+            </a:r>
+            <a:r>
+              <a:rPr sz="1300" b="0" i="0">
+                <a:solidFill>
+                  <a:srgbClr val="2D2D2D"/>
+                </a:solidFill>
+                <a:latin typeface="Calibri"/>
+              </a:rPr>
+              <a:t>Wrong mappings (clothes dryer → hair dryer), invented brands, and HTTP 429 rate limits.</a:t>
+            </a:r>
+          </a:p>
+          <a:p>
+            <a:r>
+              <a:rPr sz="1300" b="1" i="0">
+                <a:solidFill>
+                  <a:srgbClr val="2D2D2D"/>
+                </a:solidFill>
+                <a:latin typeface="Calibri"/>
+              </a:rPr>
+              <a:t>Mitigation: </a:t>
+            </a:r>
+            <a:r>
+              <a:rPr sz="1300" b="0" i="0">
+                <a:solidFill>
+                  <a:srgbClr val="2D2D2D"/>
+                </a:solidFill>
+                <a:latin typeface="Calibri"/>
+              </a:rPr>
+              <a:t>Translate-then-map prompt, validation, one retry and back-off; the rules keep answering.</a:t>
             </a:r>
           </a:p>
         </p:txBody>
@@ -1875,7 +1981,7 @@
 </file>
 
 <file path=ppt/slides/slide11.xml><?xml version="1.0" encoding="utf-8"?>
-<p:sld xmlns:a="http://schemas.openxmlformats.org/drawingml/2006/main" xmlns:p="http://schemas.openxmlformats.org/presentationml/2006/main" xmlns:r="http://schemas.openxmlformats.org/officeDocument/2006/relationships">
+<p:sld xmlns:a="http://schemas.openxmlformats.org/drawingml/2006/main" xmlns:r="http://schemas.openxmlformats.org/officeDocument/2006/relationships" xmlns:p="http://schemas.openxmlformats.org/presentationml/2006/main">
   <p:cSld>
     <p:bg>
       <p:bgPr>
@@ -1891,7 +1997,14 @@
         <p:cNvGrpSpPr/>
         <p:nvPr/>
       </p:nvGrpSpPr>
-      <p:grpSpPr/>
+      <p:grpSpPr>
+        <a:xfrm>
+          <a:off x="0" y="0"/>
+          <a:ext cx="0" cy="0"/>
+          <a:chOff x="0" y="0"/>
+          <a:chExt cx="0" cy="0"/>
+        </a:xfrm>
+      </p:grpSpPr>
       <p:sp>
         <p:nvSpPr>
           <p:cNvPr id="2" name="Title bar"/>
@@ -1933,6 +2046,7 @@
           <a:lstStyle/>
           <a:p>
             <a:pPr algn="ctr"/>
+            <a:endParaRPr/>
           </a:p>
         </p:txBody>
       </p:sp>
@@ -1965,7 +2079,7 @@
                 </a:solidFill>
                 <a:latin typeface="Calibri"/>
               </a:rPr>
-              <a:t>Design Steps &amp; Architecture</a:t>
+              <a:t>Limitations &amp; Next Steps</a:t>
             </a:r>
           </a:p>
         </p:txBody>
@@ -1979,7 +2093,7 @@
         <p:spPr>
           <a:xfrm>
             <a:off x="457200" y="1005840"/>
-            <a:ext cx="3749039" cy="320040"/>
+            <a:ext cx="8229600" cy="320040"/>
           </a:xfrm>
           <a:prstGeom prst="rect">
             <a:avLst/>
@@ -1993,13 +2107,13 @@
           <a:lstStyle/>
           <a:p>
             <a:r>
-              <a:rPr sz="1800" b="1" i="0">
+              <a:rPr sz="2000" b="1" i="0">
                 <a:solidFill>
                   <a:srgbClr val="1F4788"/>
                 </a:solidFill>
                 <a:latin typeface="Calibri"/>
               </a:rPr>
-              <a:t>Technical Implementation</a:t>
+              <a:t>Known Limitations</a:t>
             </a:r>
           </a:p>
         </p:txBody>
@@ -2012,8 +2126,8 @@
         </p:nvSpPr>
         <p:spPr>
           <a:xfrm>
-            <a:off x="548640" y="1371600"/>
-            <a:ext cx="3657600" cy="3200400"/>
+            <a:off x="640080" y="1371600"/>
+            <a:ext cx="7863840" cy="1463040"/>
           </a:xfrm>
           <a:prstGeom prst="rect">
             <a:avLst/>
@@ -2026,209 +2140,172 @@
           </a:bodyPr>
           <a:lstStyle/>
           <a:p>
-            <a:pPr>
+            <a:pPr marL="342900" indent="-342900">
               <a:spcAft>
-                <a:spcPts val="800"/>
+                <a:spcPts val="400"/>
               </a:spcAft>
+              <a:buSzPct val="100000"/>
+              <a:buChar char="•"/>
             </a:pPr>
             <a:r>
-              <a:rPr sz="1300" b="1" i="0">
+              <a:rPr sz="1500" b="0" i="0">
                 <a:solidFill>
                   <a:srgbClr val="2D2D2D"/>
                 </a:solidFill>
                 <a:latin typeface="Calibri"/>
               </a:rPr>
-              <a:t>1. Understand: </a:t>
-            </a:r>
-            <a:r>
-              <a:rPr sz="1300" b="0" i="0">
+              <a:t>The Hinglish word list is hand-written; very unusual phrasing can still be refused.</a:t>
+            </a:r>
+          </a:p>
+          <a:p>
+            <a:pPr marL="342900" indent="-342900">
+              <a:spcAft>
+                <a:spcPts val="400"/>
+              </a:spcAft>
+              <a:buSzPct val="100000"/>
+              <a:buChar char="•"/>
+            </a:pPr>
+            <a:r>
+              <a:rPr sz="1500" b="0" i="0">
                 <a:solidFill>
                   <a:srgbClr val="2D2D2D"/>
                 </a:solidFill>
                 <a:latin typeface="Calibri"/>
               </a:rPr>
-              <a:t>parser built from the catalogue’s own brands, product lines, colours and units; fuzzy matching fixes “krida ion flex”.</a:t>
-            </a:r>
-          </a:p>
-          <a:p>
-            <a:pPr>
+              <a:t>The LLM fallback needs network access, adds ~0.5 s, and can occasionally pick the wrong product type.</a:t>
+            </a:r>
+          </a:p>
+          <a:p>
+            <a:pPr marL="342900" indent="-342900">
               <a:spcAft>
-                <a:spcPts val="800"/>
+                <a:spcPts val="400"/>
               </a:spcAft>
+              <a:buSzPct val="100000"/>
+              <a:buChar char="•"/>
             </a:pPr>
             <a:r>
-              <a:rPr sz="1300" b="1" i="0">
+              <a:rPr sz="1500" b="0" i="0">
                 <a:solidFill>
                   <a:srgbClr val="2D2D2D"/>
                 </a:solidFill>
                 <a:latin typeface="Calibri"/>
               </a:rPr>
-              <a:t>2. Decide: </a:t>
-            </a:r>
-            <a:r>
-              <a:rPr sz="1300" b="0" i="0">
+              <a:t>Conversation memory and rate limiting are in-memory: demo scale, no user accounts.</a:t>
+            </a:r>
+          </a:p>
+        </p:txBody>
+      </p:sp>
+      <p:sp>
+        <p:nvSpPr>
+          <p:cNvPr id="6" name="TextBox 5"/>
+          <p:cNvSpPr txBox="1"/>
+          <p:nvPr/>
+        </p:nvSpPr>
+        <p:spPr>
+          <a:xfrm>
+            <a:off x="457200" y="2788920"/>
+            <a:ext cx="8229600" cy="320040"/>
+          </a:xfrm>
+          <a:prstGeom prst="rect">
+            <a:avLst/>
+          </a:prstGeom>
+          <a:noFill/>
+        </p:spPr>
+        <p:txBody>
+          <a:bodyPr wrap="square" anchor="ctr">
+            <a:spAutoFit/>
+          </a:bodyPr>
+          <a:lstStyle/>
+          <a:p>
+            <a:r>
+              <a:rPr sz="2000" b="1" i="0">
+                <a:solidFill>
+                  <a:srgbClr val="1F4788"/>
+                </a:solidFill>
+                <a:latin typeface="Calibri"/>
+              </a:rPr>
+              <a:t>Next Steps</a:t>
+            </a:r>
+          </a:p>
+        </p:txBody>
+      </p:sp>
+      <p:sp>
+        <p:nvSpPr>
+          <p:cNvPr id="7" name="TextBox 6"/>
+          <p:cNvSpPr txBox="1"/>
+          <p:nvPr/>
+        </p:nvSpPr>
+        <p:spPr>
+          <a:xfrm>
+            <a:off x="640080" y="3154680"/>
+            <a:ext cx="7863840" cy="1463040"/>
+          </a:xfrm>
+          <a:prstGeom prst="rect">
+            <a:avLst/>
+          </a:prstGeom>
+          <a:noFill/>
+        </p:spPr>
+        <p:txBody>
+          <a:bodyPr wrap="square" anchor="t">
+            <a:spAutoFit/>
+          </a:bodyPr>
+          <a:lstStyle/>
+          <a:p>
+            <a:pPr marL="342900" indent="-342900">
+              <a:spcAft>
+                <a:spcPts val="400"/>
+              </a:spcAft>
+              <a:buSzPct val="100000"/>
+              <a:buChar char="•"/>
+            </a:pPr>
+            <a:r>
+              <a:rPr sz="1500" b="0" i="0">
                 <a:solidFill>
                   <a:srgbClr val="2D2D2D"/>
                 </a:solidFill>
                 <a:latin typeface="Calibri"/>
               </a:rPr>
-              <a:t>filters, policy router and conversation memory choose answer, clarify or refuse, all in code.</a:t>
-            </a:r>
-          </a:p>
-          <a:p>
-            <a:pPr>
+              <a:t>Learn new Hinglish words and product aliases from real shopper logs.</a:t>
+            </a:r>
+          </a:p>
+          <a:p>
+            <a:pPr marL="342900" indent="-342900">
               <a:spcAft>
-                <a:spcPts val="800"/>
+                <a:spcPts val="400"/>
               </a:spcAft>
+              <a:buSzPct val="100000"/>
+              <a:buChar char="•"/>
             </a:pPr>
             <a:r>
-              <a:rPr sz="1300" b="1" i="0">
+              <a:rPr sz="1500" b="0" i="0">
                 <a:solidFill>
                   <a:srgbClr val="2D2D2D"/>
                 </a:solidFill>
                 <a:latin typeface="Calibri"/>
               </a:rPr>
-              <a:t>3. Fallback: </a:t>
-            </a:r>
-            <a:r>
-              <a:rPr sz="1300" b="0" i="0">
+              <a:t>Add a feedback button so wrong answers are flagged and reviewed.</a:t>
+            </a:r>
+          </a:p>
+          <a:p>
+            <a:pPr marL="342900" indent="-342900">
+              <a:spcAft>
+                <a:spcPts val="400"/>
+              </a:spcAft>
+              <a:buSzPct val="100000"/>
+              <a:buChar char="•"/>
+            </a:pPr>
+            <a:r>
+              <a:rPr sz="1500" b="0" i="0">
                 <a:solidFill>
                   <a:srgbClr val="2D2D2D"/>
                 </a:solidFill>
                 <a:latin typeface="Calibri"/>
               </a:rPr>
-              <a:t>Groq gpt-oss-20b rewrites messages the rules can’t read; the output is validated and the rules decide again.</a:t>
-            </a:r>
-          </a:p>
-          <a:p>
-            <a:pPr>
-              <a:spcAft>
-                <a:spcPts val="800"/>
-              </a:spcAft>
-            </a:pPr>
-            <a:r>
-              <a:rPr sz="1300" b="1" i="0">
-                <a:solidFill>
-                  <a:srgbClr val="2D2D2D"/>
-                </a:solidFill>
-                <a:latin typeface="Calibri"/>
-              </a:rPr>
-              <a:t>4. Reply and check: </a:t>
-            </a:r>
-            <a:r>
-              <a:rPr sz="1300" b="0" i="0">
-                <a:solidFill>
-                  <a:srgbClr val="2D2D2D"/>
-                </a:solidFill>
-                <a:latin typeface="Calibri"/>
-              </a:rPr>
-              <a:t>facts are copied from the catalogue, and the guard re-checks every ₹ amount with the scorer’s rules.</a:t>
-            </a:r>
-          </a:p>
-        </p:txBody>
-      </p:sp>
-      <p:sp>
-        <p:nvSpPr>
-          <p:cNvPr id="6" name="TextBox 5"/>
-          <p:cNvSpPr txBox="1"/>
-          <p:nvPr/>
-        </p:nvSpPr>
-        <p:spPr>
-          <a:xfrm>
-            <a:off x="4434840" y="1005840"/>
-            <a:ext cx="4251960" cy="320040"/>
-          </a:xfrm>
-          <a:prstGeom prst="rect">
-            <a:avLst/>
-          </a:prstGeom>
-          <a:noFill/>
-        </p:spPr>
-        <p:txBody>
-          <a:bodyPr wrap="square" anchor="ctr">
-            <a:spAutoFit/>
-          </a:bodyPr>
-          <a:lstStyle/>
-          <a:p>
-            <a:r>
-              <a:rPr sz="1800" b="1" i="0">
-                <a:solidFill>
-                  <a:srgbClr val="1F4788"/>
-                </a:solidFill>
-                <a:latin typeface="Calibri"/>
-              </a:rPr>
-              <a:t>Architecture Diagram</a:t>
-            </a:r>
-          </a:p>
-        </p:txBody>
-      </p:sp>
-      <p:sp>
-        <p:nvSpPr>
-          <p:cNvPr id="7" name="Diagram panel"/>
-          <p:cNvSpPr/>
-          <p:nvPr/>
-        </p:nvSpPr>
-        <p:spPr>
-          <a:xfrm>
-            <a:off x="4434840" y="1371600"/>
-            <a:ext cx="4251960" cy="3154680"/>
-          </a:xfrm>
-          <a:prstGeom prst="rect">
-            <a:avLst/>
-          </a:prstGeom>
-          <a:solidFill>
-            <a:srgbClr val="F5F5F5"/>
-          </a:solidFill>
-          <a:ln>
-            <a:noFill/>
-          </a:ln>
-          <a:effectLst/>
-        </p:spPr>
-        <p:style>
-          <a:lnRef idx="1">
-            <a:schemeClr val="accent1"/>
-          </a:lnRef>
-          <a:fillRef idx="3">
-            <a:schemeClr val="accent1"/>
-          </a:fillRef>
-          <a:effectRef idx="2">
-            <a:schemeClr val="accent1"/>
-          </a:effectRef>
-          <a:fontRef idx="minor">
-            <a:schemeClr val="lt1"/>
-          </a:fontRef>
-        </p:style>
-        <p:txBody>
-          <a:bodyPr rtlCol="0" anchor="ctr"/>
-          <a:lstStyle/>
-          <a:p>
-            <a:pPr algn="ctr"/>
-          </a:p>
-        </p:txBody>
-      </p:sp>
-      <p:pic>
-        <p:nvPicPr>
-          <p:cNvPr id="8" name="Architecture diagram" descr="Architecture: shopper message, parser, decide with policy router, follow-up turn, named product and filters, LLM rewrite only if needed, response, guard, final reply"/>
-          <p:cNvPicPr>
-            <a:picLocks noChangeAspect="1"/>
-          </p:cNvPicPr>
-          <p:nvPr/>
-        </p:nvPicPr>
-        <p:blipFill>
-          <a:blip r:embed="rId3"/>
-          <a:stretch>
-            <a:fillRect/>
-          </a:stretch>
-        </p:blipFill>
-        <p:spPr>
-          <a:xfrm>
-            <a:off x="4526280" y="1592580"/>
-            <a:ext cx="4069080" cy="2712720"/>
-          </a:xfrm>
-          <a:prstGeom prst="rect">
-            <a:avLst/>
-          </a:prstGeom>
-        </p:spPr>
-      </p:pic>
+              <a:t>Move memory to a shared store and add authentication for production use.</a:t>
+            </a:r>
+          </a:p>
+        </p:txBody>
+      </p:sp>
     </p:spTree>
   </p:cSld>
   <p:clrMapOvr>
@@ -2238,7 +2315,145 @@
 </file>
 
 <file path=ppt/slides/slide12.xml><?xml version="1.0" encoding="utf-8"?>
-<p:sld xmlns:a="http://schemas.openxmlformats.org/drawingml/2006/main" xmlns:p="http://schemas.openxmlformats.org/presentationml/2006/main" xmlns:r="http://schemas.openxmlformats.org/officeDocument/2006/relationships">
+<p:sld xmlns:a="http://schemas.openxmlformats.org/drawingml/2006/main" xmlns:r="http://schemas.openxmlformats.org/officeDocument/2006/relationships" xmlns:p="http://schemas.openxmlformats.org/presentationml/2006/main">
+  <p:cSld>
+    <p:bg>
+      <p:bgPr>
+        <a:solidFill>
+          <a:srgbClr val="1F4788"/>
+        </a:solidFill>
+        <a:effectLst/>
+      </p:bgPr>
+    </p:bg>
+    <p:spTree>
+      <p:nvGrpSpPr>
+        <p:cNvPr id="1" name=""/>
+        <p:cNvGrpSpPr/>
+        <p:nvPr/>
+      </p:nvGrpSpPr>
+      <p:grpSpPr>
+        <a:xfrm>
+          <a:off x="0" y="0"/>
+          <a:ext cx="0" cy="0"/>
+          <a:chOff x="0" y="0"/>
+          <a:chExt cx="0" cy="0"/>
+        </a:xfrm>
+      </p:grpSpPr>
+      <p:sp>
+        <p:nvSpPr>
+          <p:cNvPr id="2" name="TextBox 1"/>
+          <p:cNvSpPr txBox="1"/>
+          <p:nvPr/>
+        </p:nvSpPr>
+        <p:spPr>
+          <a:xfrm>
+            <a:off x="457200" y="1554480"/>
+            <a:ext cx="8229600" cy="731520"/>
+          </a:xfrm>
+          <a:prstGeom prst="rect">
+            <a:avLst/>
+          </a:prstGeom>
+          <a:noFill/>
+        </p:spPr>
+        <p:txBody>
+          <a:bodyPr wrap="square" anchor="ctr">
+            <a:spAutoFit/>
+          </a:bodyPr>
+          <a:lstStyle/>
+          <a:p>
+            <a:pPr algn="ctr"/>
+            <a:r>
+              <a:rPr sz="5400" b="1" i="0">
+                <a:solidFill>
+                  <a:srgbClr val="FFFFFF"/>
+                </a:solidFill>
+                <a:latin typeface="Calibri"/>
+              </a:rPr>
+              <a:t>THANK YOU</a:t>
+            </a:r>
+          </a:p>
+        </p:txBody>
+      </p:sp>
+      <p:sp>
+        <p:nvSpPr>
+          <p:cNvPr id="3" name="TextBox 2"/>
+          <p:cNvSpPr txBox="1"/>
+          <p:nvPr/>
+        </p:nvSpPr>
+        <p:spPr>
+          <a:xfrm>
+            <a:off x="457200" y="2331720"/>
+            <a:ext cx="8229600" cy="457200"/>
+          </a:xfrm>
+          <a:prstGeom prst="rect">
+            <a:avLst/>
+          </a:prstGeom>
+          <a:noFill/>
+        </p:spPr>
+        <p:txBody>
+          <a:bodyPr wrap="square" anchor="ctr">
+            <a:spAutoFit/>
+          </a:bodyPr>
+          <a:lstStyle/>
+          <a:p>
+            <a:pPr algn="ctr"/>
+            <a:r>
+              <a:rPr sz="2800" b="0" i="0">
+                <a:solidFill>
+                  <a:srgbClr val="00A4EF"/>
+                </a:solidFill>
+                <a:latin typeface="Calibri"/>
+              </a:rPr>
+              <a:t>Questions?</a:t>
+            </a:r>
+          </a:p>
+        </p:txBody>
+      </p:sp>
+      <p:sp>
+        <p:nvSpPr>
+          <p:cNvPr id="4" name="TextBox 3"/>
+          <p:cNvSpPr txBox="1"/>
+          <p:nvPr/>
+        </p:nvSpPr>
+        <p:spPr>
+          <a:xfrm>
+            <a:off x="457200" y="3108960"/>
+            <a:ext cx="8229600" cy="365760"/>
+          </a:xfrm>
+          <a:prstGeom prst="rect">
+            <a:avLst/>
+          </a:prstGeom>
+          <a:noFill/>
+        </p:spPr>
+        <p:txBody>
+          <a:bodyPr wrap="square" anchor="t">
+            <a:spAutoFit/>
+          </a:bodyPr>
+          <a:lstStyle/>
+          <a:p>
+            <a:pPr algn="ctr"/>
+            <a:r>
+              <a:rPr sz="1600" b="0" i="0">
+                <a:solidFill>
+                  <a:srgbClr val="FFFFFF"/>
+                </a:solidFill>
+                <a:latin typeface="Calibri"/>
+              </a:rPr>
+              <a:t>Tech Titans · Retail (R3) · Shopping Assistant that doesn’t lie</a:t>
+            </a:r>
+          </a:p>
+        </p:txBody>
+      </p:sp>
+    </p:spTree>
+  </p:cSld>
+  <p:clrMapOvr>
+    <a:masterClrMapping/>
+  </p:clrMapOvr>
+</p:sld>
+</file>
+
+<file path=ppt/slides/slide2.xml><?xml version="1.0" encoding="utf-8"?>
+<p:sld xmlns:a="http://schemas.openxmlformats.org/drawingml/2006/main" xmlns:r="http://schemas.openxmlformats.org/officeDocument/2006/relationships" xmlns:p="http://schemas.openxmlformats.org/presentationml/2006/main">
   <p:cSld>
     <p:bg>
       <p:bgPr>
@@ -2254,7 +2469,14 @@
         <p:cNvGrpSpPr/>
         <p:nvPr/>
       </p:nvGrpSpPr>
-      <p:grpSpPr/>
+      <p:grpSpPr>
+        <a:xfrm>
+          <a:off x="0" y="0"/>
+          <a:ext cx="0" cy="0"/>
+          <a:chOff x="0" y="0"/>
+          <a:chExt cx="0" cy="0"/>
+        </a:xfrm>
+      </p:grpSpPr>
       <p:sp>
         <p:nvSpPr>
           <p:cNvPr id="2" name="Title bar"/>
@@ -2296,6 +2518,7 @@
           <a:lstStyle/>
           <a:p>
             <a:pPr algn="ctr"/>
+            <a:endParaRPr/>
           </a:p>
         </p:txBody>
       </p:sp>
@@ -2328,52 +2551,42 @@
                 </a:solidFill>
                 <a:latin typeface="Calibri"/>
               </a:rPr>
-              <a:t>Results &amp; Evaluation</a:t>
-            </a:r>
-          </a:p>
-        </p:txBody>
-      </p:sp>
-      <p:sp>
-        <p:nvSpPr>
-          <p:cNvPr id="4" name="Rectangle 3"/>
-          <p:cNvSpPr/>
-          <p:nvPr/>
-        </p:nvSpPr>
-        <p:spPr>
-          <a:xfrm>
-            <a:off x="731520" y="1005840"/>
-            <a:ext cx="2468880" cy="73152"/>
-          </a:xfrm>
-          <a:prstGeom prst="rect">
-            <a:avLst/>
-          </a:prstGeom>
-          <a:solidFill>
-            <a:srgbClr val="00A4EF"/>
-          </a:solidFill>
-          <a:ln>
-            <a:noFill/>
-          </a:ln>
-          <a:effectLst/>
-        </p:spPr>
-        <p:style>
-          <a:lnRef idx="1">
-            <a:schemeClr val="accent1"/>
-          </a:lnRef>
-          <a:fillRef idx="3">
-            <a:schemeClr val="accent1"/>
-          </a:fillRef>
-          <a:effectRef idx="2">
-            <a:schemeClr val="accent1"/>
-          </a:effectRef>
-          <a:fontRef idx="minor">
-            <a:schemeClr val="lt1"/>
-          </a:fontRef>
-        </p:style>
-        <p:txBody>
-          <a:bodyPr rtlCol="0" anchor="ctr"/>
-          <a:lstStyle/>
-          <a:p>
-            <a:pPr algn="ctr"/>
+              <a:t>Use Case</a:t>
+            </a:r>
+          </a:p>
+        </p:txBody>
+      </p:sp>
+      <p:sp>
+        <p:nvSpPr>
+          <p:cNvPr id="4" name="TextBox 3"/>
+          <p:cNvSpPr txBox="1"/>
+          <p:nvPr/>
+        </p:nvSpPr>
+        <p:spPr>
+          <a:xfrm>
+            <a:off x="457200" y="1005840"/>
+            <a:ext cx="8229600" cy="320040"/>
+          </a:xfrm>
+          <a:prstGeom prst="rect">
+            <a:avLst/>
+          </a:prstGeom>
+          <a:noFill/>
+        </p:spPr>
+        <p:txBody>
+          <a:bodyPr wrap="square" anchor="ctr">
+            <a:spAutoFit/>
+          </a:bodyPr>
+          <a:lstStyle/>
+          <a:p>
+            <a:r>
+              <a:rPr sz="2000" b="1" i="0">
+                <a:solidFill>
+                  <a:srgbClr val="1F4788"/>
+                </a:solidFill>
+                <a:latin typeface="Calibri"/>
+              </a:rPr>
+              <a:t>Problem Statement</a:t>
+            </a:r>
           </a:p>
         </p:txBody>
       </p:sp>
@@ -2385,445 +2598,8 @@
         </p:nvSpPr>
         <p:spPr>
           <a:xfrm>
-            <a:off x="731520" y="1115568"/>
-            <a:ext cx="2468880" cy="594360"/>
-          </a:xfrm>
-          <a:prstGeom prst="rect">
-            <a:avLst/>
-          </a:prstGeom>
-          <a:noFill/>
-        </p:spPr>
-        <p:txBody>
-          <a:bodyPr wrap="square" anchor="ctr">
-            <a:spAutoFit/>
-          </a:bodyPr>
-          <a:lstStyle/>
-          <a:p>
-            <a:pPr algn="ctr"/>
-            <a:r>
-              <a:rPr sz="3600" b="1" i="0">
-                <a:solidFill>
-                  <a:srgbClr val="1F4788"/>
-                </a:solidFill>
-                <a:latin typeface="Calibri"/>
-              </a:rPr>
-              <a:t>1.000</a:t>
-            </a:r>
-          </a:p>
-        </p:txBody>
-      </p:sp>
-      <p:sp>
-        <p:nvSpPr>
-          <p:cNvPr id="6" name="TextBox 5"/>
-          <p:cNvSpPr txBox="1"/>
-          <p:nvPr/>
-        </p:nvSpPr>
-        <p:spPr>
-          <a:xfrm>
-            <a:off x="731520" y="1737360"/>
-            <a:ext cx="2468880" cy="320040"/>
-          </a:xfrm>
-          <a:prstGeom prst="rect">
-            <a:avLst/>
-          </a:prstGeom>
-          <a:noFill/>
-        </p:spPr>
-        <p:txBody>
-          <a:bodyPr wrap="square" anchor="t">
-            <a:spAutoFit/>
-          </a:bodyPr>
-          <a:lstStyle/>
-          <a:p>
-            <a:pPr algn="ctr"/>
-            <a:r>
-              <a:rPr sz="1400" b="1" i="0">
-                <a:solidFill>
-                  <a:srgbClr val="1F4788"/>
-                </a:solidFill>
-                <a:latin typeface="Calibri"/>
-              </a:rPr>
-              <a:t>Dev score (baseline 0.73)</a:t>
-            </a:r>
-          </a:p>
-        </p:txBody>
-      </p:sp>
-      <p:sp>
-        <p:nvSpPr>
-          <p:cNvPr id="7" name="TextBox 6"/>
-          <p:cNvSpPr txBox="1"/>
-          <p:nvPr/>
-        </p:nvSpPr>
-        <p:spPr>
-          <a:xfrm>
-            <a:off x="731520" y="2103120"/>
-            <a:ext cx="2468880" cy="1005840"/>
-          </a:xfrm>
-          <a:prstGeom prst="rect">
-            <a:avLst/>
-          </a:prstGeom>
-          <a:noFill/>
-        </p:spPr>
-        <p:txBody>
-          <a:bodyPr wrap="square" anchor="t">
-            <a:spAutoFit/>
-          </a:bodyPr>
-          <a:lstStyle/>
-          <a:p>
-            <a:pPr algn="ctr"/>
-            <a:r>
-              <a:rPr sz="1200" b="0" i="0">
-                <a:solidFill>
-                  <a:srgbClr val="2D2D2D"/>
-                </a:solidFill>
-                <a:latin typeface="Calibri"/>
-              </a:rPr>
-              <a:t>Official evaluate.py on 40 dev questions: action, grounding and helpfulness all perfect.</a:t>
-            </a:r>
-          </a:p>
-        </p:txBody>
-      </p:sp>
-      <p:sp>
-        <p:nvSpPr>
-          <p:cNvPr id="8" name="Rectangle 7"/>
-          <p:cNvSpPr/>
-          <p:nvPr/>
-        </p:nvSpPr>
-        <p:spPr>
-          <a:xfrm>
-            <a:off x="3566160" y="1005840"/>
-            <a:ext cx="2468880" cy="73152"/>
-          </a:xfrm>
-          <a:prstGeom prst="rect">
-            <a:avLst/>
-          </a:prstGeom>
-          <a:solidFill>
-            <a:srgbClr val="00A4EF"/>
-          </a:solidFill>
-          <a:ln>
-            <a:noFill/>
-          </a:ln>
-          <a:effectLst/>
-        </p:spPr>
-        <p:style>
-          <a:lnRef idx="1">
-            <a:schemeClr val="accent1"/>
-          </a:lnRef>
-          <a:fillRef idx="3">
-            <a:schemeClr val="accent1"/>
-          </a:fillRef>
-          <a:effectRef idx="2">
-            <a:schemeClr val="accent1"/>
-          </a:effectRef>
-          <a:fontRef idx="minor">
-            <a:schemeClr val="lt1"/>
-          </a:fontRef>
-        </p:style>
-        <p:txBody>
-          <a:bodyPr rtlCol="0" anchor="ctr"/>
-          <a:lstStyle/>
-          <a:p>
-            <a:pPr algn="ctr"/>
-          </a:p>
-        </p:txBody>
-      </p:sp>
-      <p:sp>
-        <p:nvSpPr>
-          <p:cNvPr id="9" name="TextBox 8"/>
-          <p:cNvSpPr txBox="1"/>
-          <p:nvPr/>
-        </p:nvSpPr>
-        <p:spPr>
-          <a:xfrm>
-            <a:off x="3566160" y="1115568"/>
-            <a:ext cx="2468880" cy="594360"/>
-          </a:xfrm>
-          <a:prstGeom prst="rect">
-            <a:avLst/>
-          </a:prstGeom>
-          <a:noFill/>
-        </p:spPr>
-        <p:txBody>
-          <a:bodyPr wrap="square" anchor="ctr">
-            <a:spAutoFit/>
-          </a:bodyPr>
-          <a:lstStyle/>
-          <a:p>
-            <a:pPr algn="ctr"/>
-            <a:r>
-              <a:rPr sz="3600" b="1" i="0">
-                <a:solidFill>
-                  <a:srgbClr val="1F4788"/>
-                </a:solidFill>
-                <a:latin typeface="Calibri"/>
-              </a:rPr>
-              <a:t>0</a:t>
-            </a:r>
-          </a:p>
-        </p:txBody>
-      </p:sp>
-      <p:sp>
-        <p:nvSpPr>
-          <p:cNvPr id="10" name="TextBox 9"/>
-          <p:cNvSpPr txBox="1"/>
-          <p:nvPr/>
-        </p:nvSpPr>
-        <p:spPr>
-          <a:xfrm>
-            <a:off x="3566160" y="1737360"/>
-            <a:ext cx="2468880" cy="320040"/>
-          </a:xfrm>
-          <a:prstGeom prst="rect">
-            <a:avLst/>
-          </a:prstGeom>
-          <a:noFill/>
-        </p:spPr>
-        <p:txBody>
-          <a:bodyPr wrap="square" anchor="t">
-            <a:spAutoFit/>
-          </a:bodyPr>
-          <a:lstStyle/>
-          <a:p>
-            <a:pPr algn="ctr"/>
-            <a:r>
-              <a:rPr sz="1400" b="1" i="0">
-                <a:solidFill>
-                  <a:srgbClr val="1F4788"/>
-                </a:solidFill>
-                <a:latin typeface="Calibri"/>
-              </a:rPr>
-              <a:t>Hallucinated prices</a:t>
-            </a:r>
-          </a:p>
-        </p:txBody>
-      </p:sp>
-      <p:sp>
-        <p:nvSpPr>
-          <p:cNvPr id="11" name="TextBox 10"/>
-          <p:cNvSpPr txBox="1"/>
-          <p:nvPr/>
-        </p:nvSpPr>
-        <p:spPr>
-          <a:xfrm>
-            <a:off x="3566160" y="2103120"/>
-            <a:ext cx="2468880" cy="1005840"/>
-          </a:xfrm>
-          <a:prstGeom prst="rect">
-            <a:avLst/>
-          </a:prstGeom>
-          <a:noFill/>
-        </p:spPr>
-        <p:txBody>
-          <a:bodyPr wrap="square" anchor="t">
-            <a:spAutoFit/>
-          </a:bodyPr>
-          <a:lstStyle/>
-          <a:p>
-            <a:pPr algn="ctr"/>
-            <a:r>
-              <a:rPr sz="1200" b="0" i="0">
-                <a:solidFill>
-                  <a:srgbClr val="2D2D2D"/>
-                </a:solidFill>
-                <a:latin typeface="Calibri"/>
-              </a:rPr>
-              <a:t>Every ₹ amount is copied from the catalogue and re-checked by the price guard.</a:t>
-            </a:r>
-          </a:p>
-        </p:txBody>
-      </p:sp>
-      <p:sp>
-        <p:nvSpPr>
-          <p:cNvPr id="12" name="Rectangle 11"/>
-          <p:cNvSpPr/>
-          <p:nvPr/>
-        </p:nvSpPr>
-        <p:spPr>
-          <a:xfrm>
-            <a:off x="6400800" y="1005840"/>
-            <a:ext cx="2468880" cy="73152"/>
-          </a:xfrm>
-          <a:prstGeom prst="rect">
-            <a:avLst/>
-          </a:prstGeom>
-          <a:solidFill>
-            <a:srgbClr val="00A4EF"/>
-          </a:solidFill>
-          <a:ln>
-            <a:noFill/>
-          </a:ln>
-          <a:effectLst/>
-        </p:spPr>
-        <p:style>
-          <a:lnRef idx="1">
-            <a:schemeClr val="accent1"/>
-          </a:lnRef>
-          <a:fillRef idx="3">
-            <a:schemeClr val="accent1"/>
-          </a:fillRef>
-          <a:effectRef idx="2">
-            <a:schemeClr val="accent1"/>
-          </a:effectRef>
-          <a:fontRef idx="minor">
-            <a:schemeClr val="lt1"/>
-          </a:fontRef>
-        </p:style>
-        <p:txBody>
-          <a:bodyPr rtlCol="0" anchor="ctr"/>
-          <a:lstStyle/>
-          <a:p>
-            <a:pPr algn="ctr"/>
-          </a:p>
-        </p:txBody>
-      </p:sp>
-      <p:sp>
-        <p:nvSpPr>
-          <p:cNvPr id="13" name="TextBox 12"/>
-          <p:cNvSpPr txBox="1"/>
-          <p:nvPr/>
-        </p:nvSpPr>
-        <p:spPr>
-          <a:xfrm>
-            <a:off x="6400800" y="1115568"/>
-            <a:ext cx="2468880" cy="594360"/>
-          </a:xfrm>
-          <a:prstGeom prst="rect">
-            <a:avLst/>
-          </a:prstGeom>
-          <a:noFill/>
-        </p:spPr>
-        <p:txBody>
-          <a:bodyPr wrap="square" anchor="ctr">
-            <a:spAutoFit/>
-          </a:bodyPr>
-          <a:lstStyle/>
-          <a:p>
-            <a:pPr algn="ctr"/>
-            <a:r>
-              <a:rPr sz="3600" b="1" i="0">
-                <a:solidFill>
-                  <a:srgbClr val="1F4788"/>
-                </a:solidFill>
-                <a:latin typeface="Calibri"/>
-              </a:rPr>
-              <a:t>~1 ms</a:t>
-            </a:r>
-          </a:p>
-        </p:txBody>
-      </p:sp>
-      <p:sp>
-        <p:nvSpPr>
-          <p:cNvPr id="14" name="TextBox 13"/>
-          <p:cNvSpPr txBox="1"/>
-          <p:nvPr/>
-        </p:nvSpPr>
-        <p:spPr>
-          <a:xfrm>
-            <a:off x="6400800" y="1737360"/>
-            <a:ext cx="2468880" cy="320040"/>
-          </a:xfrm>
-          <a:prstGeom prst="rect">
-            <a:avLst/>
-          </a:prstGeom>
-          <a:noFill/>
-        </p:spPr>
-        <p:txBody>
-          <a:bodyPr wrap="square" anchor="t">
-            <a:spAutoFit/>
-          </a:bodyPr>
-          <a:lstStyle/>
-          <a:p>
-            <a:pPr algn="ctr"/>
-            <a:r>
-              <a:rPr sz="1400" b="1" i="0">
-                <a:solidFill>
-                  <a:srgbClr val="1F4788"/>
-                </a:solidFill>
-                <a:latin typeface="Calibri"/>
-              </a:rPr>
-              <a:t>Per query, $0 cost</a:t>
-            </a:r>
-          </a:p>
-        </p:txBody>
-      </p:sp>
-      <p:sp>
-        <p:nvSpPr>
-          <p:cNvPr id="15" name="TextBox 14"/>
-          <p:cNvSpPr txBox="1"/>
-          <p:nvPr/>
-        </p:nvSpPr>
-        <p:spPr>
-          <a:xfrm>
-            <a:off x="6400800" y="2103120"/>
-            <a:ext cx="2468880" cy="1005840"/>
-          </a:xfrm>
-          <a:prstGeom prst="rect">
-            <a:avLst/>
-          </a:prstGeom>
-          <a:noFill/>
-        </p:spPr>
-        <p:txBody>
-          <a:bodyPr wrap="square" anchor="t">
-            <a:spAutoFit/>
-          </a:bodyPr>
-          <a:lstStyle/>
-          <a:p>
-            <a:pPr algn="ctr"/>
-            <a:r>
-              <a:rPr sz="1200" b="0" i="0">
-                <a:solidFill>
-                  <a:srgbClr val="2D2D2D"/>
-                </a:solidFill>
-                <a:latin typeface="Calibri"/>
-              </a:rPr>
-              <a:t>Rules answer offline with 0 tokens. The LLM fallback uses ~900 tokens, ~0.5 s, ~$0.0001.</a:t>
-            </a:r>
-          </a:p>
-        </p:txBody>
-      </p:sp>
-      <p:sp>
-        <p:nvSpPr>
-          <p:cNvPr id="16" name="TextBox 15"/>
-          <p:cNvSpPr txBox="1"/>
-          <p:nvPr/>
-        </p:nvSpPr>
-        <p:spPr>
-          <a:xfrm>
-            <a:off x="457200" y="3246120"/>
-            <a:ext cx="8229600" cy="320040"/>
-          </a:xfrm>
-          <a:prstGeom prst="rect">
-            <a:avLst/>
-          </a:prstGeom>
-          <a:noFill/>
-        </p:spPr>
-        <p:txBody>
-          <a:bodyPr wrap="square" anchor="ctr">
-            <a:spAutoFit/>
-          </a:bodyPr>
-          <a:lstStyle/>
-          <a:p>
-            <a:r>
-              <a:rPr sz="1600" b="1" i="0">
-                <a:solidFill>
-                  <a:srgbClr val="1F4788"/>
-                </a:solidFill>
-                <a:latin typeface="Calibri"/>
-              </a:rPr>
-              <a:t>Test Set and Quality Checks</a:t>
-            </a:r>
-          </a:p>
-        </p:txBody>
-      </p:sp>
-      <p:sp>
-        <p:nvSpPr>
-          <p:cNvPr id="17" name="TextBox 16"/>
-          <p:cNvSpPr txBox="1"/>
-          <p:nvPr/>
-        </p:nvSpPr>
-        <p:spPr>
-          <a:xfrm>
-            <a:off x="640080" y="3611880"/>
-            <a:ext cx="7863840" cy="1097280"/>
+            <a:off x="640080" y="1417320"/>
+            <a:ext cx="7863840" cy="1371600"/>
           </a:xfrm>
           <a:prstGeom prst="rect">
             <a:avLst/>
@@ -2844,13 +2620,13 @@
               <a:buChar char="•"/>
             </a:pPr>
             <a:r>
-              <a:rPr sz="1400" b="0" i="0">
+              <a:rPr sz="1600" b="0" i="0">
                 <a:solidFill>
                   <a:srgbClr val="2D2D2D"/>
                 </a:solidFill>
                 <a:latin typeface="Calibri"/>
               </a:rPr>
-              <a:t>150 test questions answered: 82 answer, 30 clarify, 38 refuse, close to the expected test mix.</a:t>
+              <a:t>Shopping chatbots often invent products, prices and return rules that are not in the catalogue, and shoppers act on them.</a:t>
             </a:r>
           </a:p>
           <a:p>
@@ -2862,13 +2638,13 @@
               <a:buChar char="•"/>
             </a:pPr>
             <a:r>
-              <a:rPr sz="1400" b="0" i="0">
+              <a:rPr sz="1600" b="0" i="0">
                 <a:solidFill>
                   <a:srgbClr val="2D2D2D"/>
                 </a:solidFill>
                 <a:latin typeface="Calibri"/>
               </a:rPr>
-              <a:t>71 automated tests pass; ruff lint clean; pip-audit finds no known vulnerabilities.</a:t>
+              <a:t>Affected: online shoppers, and retailers who must honour what their bot says.</a:t>
             </a:r>
           </a:p>
           <a:p>
@@ -2880,13 +2656,124 @@
               <a:buChar char="•"/>
             </a:pPr>
             <a:r>
-              <a:rPr sz="1400" b="0" i="0">
+              <a:rPr sz="1600" b="0" i="0">
                 <a:solidFill>
                   <a:srgbClr val="2D2D2D"/>
                 </a:solidFill>
                 <a:latin typeface="Calibri"/>
               </a:rPr>
-              <a:t>Every example in our questions guide was verified against the live assistant.</a:t>
+              <a:t>Impact: in Moffatt v. Air Canada (2024), a tribunal made the airline pay for a refund rule its chatbot got wrong.</a:t>
+            </a:r>
+          </a:p>
+        </p:txBody>
+      </p:sp>
+      <p:sp>
+        <p:nvSpPr>
+          <p:cNvPr id="6" name="TextBox 5"/>
+          <p:cNvSpPr txBox="1"/>
+          <p:nvPr/>
+        </p:nvSpPr>
+        <p:spPr>
+          <a:xfrm>
+            <a:off x="457200" y="2834640"/>
+            <a:ext cx="8229600" cy="320040"/>
+          </a:xfrm>
+          <a:prstGeom prst="rect">
+            <a:avLst/>
+          </a:prstGeom>
+          <a:noFill/>
+        </p:spPr>
+        <p:txBody>
+          <a:bodyPr wrap="square" anchor="ctr">
+            <a:spAutoFit/>
+          </a:bodyPr>
+          <a:lstStyle/>
+          <a:p>
+            <a:r>
+              <a:rPr sz="2000" b="1" i="0">
+                <a:solidFill>
+                  <a:srgbClr val="1F4788"/>
+                </a:solidFill>
+                <a:latin typeface="Calibri"/>
+              </a:rPr>
+              <a:t>Market Opportunity</a:t>
+            </a:r>
+          </a:p>
+        </p:txBody>
+      </p:sp>
+      <p:sp>
+        <p:nvSpPr>
+          <p:cNvPr id="7" name="TextBox 6"/>
+          <p:cNvSpPr txBox="1"/>
+          <p:nvPr/>
+        </p:nvSpPr>
+        <p:spPr>
+          <a:xfrm>
+            <a:off x="640080" y="3246120"/>
+            <a:ext cx="7863840" cy="1371600"/>
+          </a:xfrm>
+          <a:prstGeom prst="rect">
+            <a:avLst/>
+          </a:prstGeom>
+          <a:noFill/>
+        </p:spPr>
+        <p:txBody>
+          <a:bodyPr wrap="square" anchor="t">
+            <a:spAutoFit/>
+          </a:bodyPr>
+          <a:lstStyle/>
+          <a:p>
+            <a:pPr marL="342900" indent="-342900">
+              <a:spcAft>
+                <a:spcPts val="400"/>
+              </a:spcAft>
+              <a:buSzPct val="100000"/>
+              <a:buChar char="•"/>
+            </a:pPr>
+            <a:r>
+              <a:rPr sz="1600" b="0" i="0">
+                <a:solidFill>
+                  <a:srgbClr val="2D2D2D"/>
+                </a:solidFill>
+                <a:latin typeface="Calibri"/>
+              </a:rPr>
+              <a:t>India’s online retail is expected to grow from US$75 billion in 2024 to US$260 billion by 2030 (Deloitte and FICCI, 2025).</a:t>
+            </a:r>
+          </a:p>
+          <a:p>
+            <a:pPr marL="342900" indent="-342900">
+              <a:spcAft>
+                <a:spcPts val="400"/>
+              </a:spcAft>
+              <a:buSzPct val="100000"/>
+              <a:buChar char="•"/>
+            </a:pPr>
+            <a:r>
+              <a:rPr sz="1600" b="0" i="0">
+                <a:solidFill>
+                  <a:srgbClr val="2D2D2D"/>
+                </a:solidFill>
+                <a:latin typeface="Calibri"/>
+              </a:rPr>
+              <a:t>Target users: India’s online shoppers, expected to reach 400 million by 2030 (Redseer).</a:t>
+            </a:r>
+          </a:p>
+          <a:p>
+            <a:pPr marL="342900" indent="-342900">
+              <a:spcAft>
+                <a:spcPts val="400"/>
+              </a:spcAft>
+              <a:buSzPct val="100000"/>
+              <a:buChar char="•"/>
+            </a:pPr>
+            <a:r>
+              <a:rPr sz="1600" b="0" i="0">
+                <a:solidFill>
+                  <a:srgbClr val="2D2D2D"/>
+                </a:solidFill>
+                <a:latin typeface="Calibri"/>
+              </a:rPr>
+              <a:t>Smaller retailers need a low-cost assistant that states only catalogue facts.</a:t>
             </a:r>
           </a:p>
         </p:txBody>
@@ -2899,8 +2786,8 @@
 </p:sld>
 </file>
 
-<file path=ppt/slides/slide13.xml><?xml version="1.0" encoding="utf-8"?>
-<p:sld xmlns:a="http://schemas.openxmlformats.org/drawingml/2006/main" xmlns:p="http://schemas.openxmlformats.org/presentationml/2006/main" xmlns:r="http://schemas.openxmlformats.org/officeDocument/2006/relationships">
+<file path=ppt/slides/slide3.xml><?xml version="1.0" encoding="utf-8"?>
+<p:sld xmlns:a="http://schemas.openxmlformats.org/drawingml/2006/main" xmlns:r="http://schemas.openxmlformats.org/officeDocument/2006/relationships" xmlns:p="http://schemas.openxmlformats.org/presentationml/2006/main">
   <p:cSld>
     <p:bg>
       <p:bgPr>
@@ -2916,7 +2803,14 @@
         <p:cNvGrpSpPr/>
         <p:nvPr/>
       </p:nvGrpSpPr>
-      <p:grpSpPr/>
+      <p:grpSpPr>
+        <a:xfrm>
+          <a:off x="0" y="0"/>
+          <a:ext cx="0" cy="0"/>
+          <a:chOff x="0" y="0"/>
+          <a:chExt cx="0" cy="0"/>
+        </a:xfrm>
+      </p:grpSpPr>
       <p:sp>
         <p:nvSpPr>
           <p:cNvPr id="2" name="Title bar"/>
@@ -2958,6 +2852,7 @@
           <a:lstStyle/>
           <a:p>
             <a:pPr algn="ctr"/>
+            <a:endParaRPr/>
           </a:p>
         </p:txBody>
       </p:sp>
@@ -2990,7 +2885,7 @@
                 </a:solidFill>
                 <a:latin typeface="Calibri"/>
               </a:rPr>
-              <a:t>Responsible AI</a:t>
+              <a:t>Solution Built</a:t>
             </a:r>
           </a:p>
         </p:txBody>
@@ -3024,7 +2919,7 @@
                 </a:solidFill>
                 <a:latin typeface="Calibri"/>
               </a:rPr>
-              <a:t>How Every Answer Stays Grounded</a:t>
+              <a:t>Solution Overview</a:t>
             </a:r>
           </a:p>
         </p:txBody>
@@ -3038,7 +2933,7 @@
         <p:spPr>
           <a:xfrm>
             <a:off x="640080" y="1371600"/>
-            <a:ext cx="7863840" cy="1463040"/>
+            <a:ext cx="7863840" cy="2103120"/>
           </a:xfrm>
           <a:prstGeom prst="rect">
             <a:avLst/>
@@ -3059,13 +2954,22 @@
               <a:buChar char="•"/>
             </a:pPr>
             <a:r>
+              <a:rPr sz="1500" b="1" i="0">
+                <a:solidFill>
+                  <a:srgbClr val="2D2D2D"/>
+                </a:solidFill>
+                <a:latin typeface="Calibri"/>
+              </a:rPr>
+              <a:t>What: </a:t>
+            </a:r>
+            <a:r>
               <a:rPr sz="1500" b="0" i="0">
                 <a:solidFill>
                   <a:srgbClr val="2D2D2D"/>
                 </a:solidFill>
                 <a:latin typeface="Calibri"/>
               </a:rPr>
-              <a:t>Every fact carries a product ID or policy section, and the Sources panel shows the exact catalogue row.</a:t>
+              <a:t>a working chatbot over the 5,000-product catalogue and store policy that cites a product ID or policy section for every fact.</a:t>
             </a:r>
           </a:p>
           <a:p>
@@ -3077,13 +2981,22 @@
               <a:buChar char="•"/>
             </a:pPr>
             <a:r>
+              <a:rPr sz="1500" b="1" i="0">
+                <a:solidFill>
+                  <a:srgbClr val="2D2D2D"/>
+                </a:solidFill>
+                <a:latin typeface="Calibri"/>
+              </a:rPr>
+              <a:t>How: </a:t>
+            </a:r>
+            <a:r>
               <a:rPr sz="1500" b="0" i="0">
                 <a:solidFill>
                   <a:srgbClr val="2D2D2D"/>
                 </a:solidFill>
                 <a:latin typeface="Calibri"/>
               </a:rPr>
-              <a:t>Missing ≠ false: if the catalogue doesn’t list a feature, the assistant says so instead of guessing.</a:t>
+              <a:t>code reads the question, filters the catalogue and decides: answer, ask which one, or say “I don’t have that”.</a:t>
             </a:r>
           </a:p>
           <a:p>
@@ -3095,72 +3008,24 @@
               <a:buChar char="•"/>
             </a:pPr>
             <a:r>
+              <a:rPr sz="1500" b="1" i="0">
+                <a:solidFill>
+                  <a:srgbClr val="2D2D2D"/>
+                </a:solidFill>
+                <a:latin typeface="Calibri"/>
+              </a:rPr>
+              <a:t>LLM only as a fallback: </a:t>
+            </a:r>
+            <a:r>
               <a:rPr sz="1500" b="0" i="0">
                 <a:solidFill>
                   <a:srgbClr val="2D2D2D"/>
                 </a:solidFill>
                 <a:latin typeface="Calibri"/>
               </a:rPr>
-              <a:t>It asks which product is meant when several match, and refuses unsold items, other brands and policy gaps.</a:t>
-            </a:r>
-          </a:p>
-        </p:txBody>
-      </p:sp>
-      <p:sp>
-        <p:nvSpPr>
-          <p:cNvPr id="6" name="TextBox 5"/>
-          <p:cNvSpPr txBox="1"/>
-          <p:nvPr/>
-        </p:nvSpPr>
-        <p:spPr>
-          <a:xfrm>
-            <a:off x="457200" y="2788920"/>
-            <a:ext cx="8229600" cy="320040"/>
-          </a:xfrm>
-          <a:prstGeom prst="rect">
-            <a:avLst/>
-          </a:prstGeom>
-          <a:noFill/>
-        </p:spPr>
-        <p:txBody>
-          <a:bodyPr wrap="square" anchor="ctr">
-            <a:spAutoFit/>
-          </a:bodyPr>
-          <a:lstStyle/>
-          <a:p>
-            <a:r>
-              <a:rPr sz="2000" b="1" i="0">
-                <a:solidFill>
-                  <a:srgbClr val="1F4788"/>
-                </a:solidFill>
-                <a:latin typeface="Calibri"/>
-              </a:rPr>
-              <a:t>Safe Use of the LLM</a:t>
-            </a:r>
-          </a:p>
-        </p:txBody>
-      </p:sp>
-      <p:sp>
-        <p:nvSpPr>
-          <p:cNvPr id="7" name="TextBox 6"/>
-          <p:cNvSpPr txBox="1"/>
-          <p:nvPr/>
-        </p:nvSpPr>
-        <p:spPr>
-          <a:xfrm>
-            <a:off x="640080" y="3154680"/>
-            <a:ext cx="7863840" cy="1463040"/>
-          </a:xfrm>
-          <a:prstGeom prst="rect">
-            <a:avLst/>
-          </a:prstGeom>
-          <a:noFill/>
-        </p:spPr>
-        <p:txBody>
-          <a:bodyPr wrap="square" anchor="t">
-            <a:spAutoFit/>
-          </a:bodyPr>
-          <a:lstStyle/>
+              <a:t>when the rules can’t understand a message (“bread garam karne wali machine”), Groq rewrites it and the rules decide again.</a:t>
+            </a:r>
+          </a:p>
           <a:p>
             <a:pPr marL="342900" indent="-342900">
               <a:spcAft>
@@ -3170,49 +3035,520 @@
               <a:buChar char="•"/>
             </a:pPr>
             <a:r>
+              <a:rPr sz="1500" b="1" i="0">
+                <a:solidFill>
+                  <a:srgbClr val="2D2D2D"/>
+                </a:solidFill>
+                <a:latin typeface="Calibri"/>
+              </a:rPr>
+              <a:t>Safe: </a:t>
+            </a:r>
+            <a:r>
               <a:rPr sz="1500" b="0" i="0">
                 <a:solidFill>
                   <a:srgbClr val="2D2D2D"/>
                 </a:solidFill>
                 <a:latin typeface="Calibri"/>
               </a:rPr>
-              <a:t>Fallback only, and it never writes prices, stock or IDs; its output is validated and invented brands are dropped.</a:t>
-            </a:r>
-          </a:p>
-          <a:p>
-            <a:pPr marL="342900" indent="-342900">
-              <a:spcAft>
-                <a:spcPts val="400"/>
-              </a:spcAft>
-              <a:buSzPct val="100000"/>
-              <a:buChar char="•"/>
-            </a:pPr>
-            <a:r>
-              <a:rPr sz="1500" b="0" i="0">
-                <a:solidFill>
-                  <a:srgbClr val="2D2D2D"/>
-                </a:solidFill>
-                <a:latin typeface="Calibri"/>
-              </a:rPr>
-              <a:t>Shopper text is treated as data (prompt-injection safe); the API key lives in .env, never in code.</a:t>
-            </a:r>
-          </a:p>
-          <a:p>
-            <a:pPr marL="342900" indent="-342900">
-              <a:spcAft>
-                <a:spcPts val="400"/>
-              </a:spcAft>
-              <a:buSzPct val="100000"/>
-              <a:buChar char="•"/>
-            </a:pPr>
-            <a:r>
-              <a:rPr sz="1500" b="0" i="0">
-                <a:solidFill>
-                  <a:srgbClr val="2D2D2D"/>
-                </a:solidFill>
-                <a:latin typeface="Calibri"/>
-              </a:rPr>
-              <a:t>Timeouts, retries and rate-limit handling; if Groq is down, the rules keep answering offline.</a:t>
+              <a:t>every price comes from the catalogue, and a final guard removes any ₹ amount that isn’t backed by a cited product.</a:t>
+            </a:r>
+          </a:p>
+        </p:txBody>
+      </p:sp>
+      <p:sp>
+        <p:nvSpPr>
+          <p:cNvPr id="6" name="Rectangle 5"/>
+          <p:cNvSpPr/>
+          <p:nvPr/>
+        </p:nvSpPr>
+        <p:spPr>
+          <a:xfrm>
+            <a:off x="457200" y="3566160"/>
+            <a:ext cx="8229600" cy="1097280"/>
+          </a:xfrm>
+          <a:prstGeom prst="rect">
+            <a:avLst/>
+          </a:prstGeom>
+          <a:solidFill>
+            <a:srgbClr val="F5F5F5"/>
+          </a:solidFill>
+          <a:ln>
+            <a:noFill/>
+          </a:ln>
+          <a:effectLst/>
+        </p:spPr>
+        <p:style>
+          <a:lnRef idx="1">
+            <a:schemeClr val="accent1"/>
+          </a:lnRef>
+          <a:fillRef idx="3">
+            <a:schemeClr val="accent1"/>
+          </a:fillRef>
+          <a:effectRef idx="2">
+            <a:schemeClr val="accent1"/>
+          </a:effectRef>
+          <a:fontRef idx="minor">
+            <a:schemeClr val="lt1"/>
+          </a:fontRef>
+        </p:style>
+        <p:txBody>
+          <a:bodyPr rtlCol="0" anchor="ctr"/>
+          <a:lstStyle/>
+          <a:p>
+            <a:pPr algn="ctr"/>
+            <a:endParaRPr/>
+          </a:p>
+        </p:txBody>
+      </p:sp>
+      <p:sp>
+        <p:nvSpPr>
+          <p:cNvPr id="7" name="Step 1"/>
+          <p:cNvSpPr/>
+          <p:nvPr/>
+        </p:nvSpPr>
+        <p:spPr>
+          <a:xfrm>
+            <a:off x="594360" y="3749039"/>
+            <a:ext cx="1371600" cy="731520"/>
+          </a:xfrm>
+          <a:prstGeom prst="roundRect">
+            <a:avLst/>
+          </a:prstGeom>
+          <a:solidFill>
+            <a:srgbClr val="FFFFFF"/>
+          </a:solidFill>
+          <a:ln w="12700">
+            <a:solidFill>
+              <a:srgbClr val="1F4788"/>
+            </a:solidFill>
+          </a:ln>
+          <a:effectLst/>
+        </p:spPr>
+        <p:style>
+          <a:lnRef idx="1">
+            <a:schemeClr val="accent1"/>
+          </a:lnRef>
+          <a:fillRef idx="3">
+            <a:schemeClr val="accent1"/>
+          </a:fillRef>
+          <a:effectRef idx="2">
+            <a:schemeClr val="accent1"/>
+          </a:effectRef>
+          <a:fontRef idx="minor">
+            <a:schemeClr val="lt1"/>
+          </a:fontRef>
+        </p:style>
+        <p:txBody>
+          <a:bodyPr wrap="square" lIns="54864" rIns="54864" rtlCol="0" anchor="ctr"/>
+          <a:lstStyle/>
+          <a:p>
+            <a:pPr algn="ctr"/>
+            <a:r>
+              <a:rPr sz="1100" b="1" i="0">
+                <a:solidFill>
+                  <a:srgbClr val="1F4788"/>
+                </a:solidFill>
+                <a:latin typeface="Calibri"/>
+              </a:rPr>
+              <a:t>Shopper question in English or Hinglish</a:t>
+            </a:r>
+          </a:p>
+        </p:txBody>
+      </p:sp>
+      <p:sp>
+        <p:nvSpPr>
+          <p:cNvPr id="8" name="Arrow 1"/>
+          <p:cNvSpPr/>
+          <p:nvPr/>
+        </p:nvSpPr>
+        <p:spPr>
+          <a:xfrm>
+            <a:off x="2011680" y="4032504"/>
+            <a:ext cx="182880" cy="164592"/>
+          </a:xfrm>
+          <a:prstGeom prst="rightArrow">
+            <a:avLst/>
+          </a:prstGeom>
+          <a:solidFill>
+            <a:srgbClr val="00A4EF"/>
+          </a:solidFill>
+          <a:ln>
+            <a:noFill/>
+          </a:ln>
+          <a:effectLst/>
+        </p:spPr>
+        <p:style>
+          <a:lnRef idx="1">
+            <a:schemeClr val="accent1"/>
+          </a:lnRef>
+          <a:fillRef idx="3">
+            <a:schemeClr val="accent1"/>
+          </a:fillRef>
+          <a:effectRef idx="2">
+            <a:schemeClr val="accent1"/>
+          </a:effectRef>
+          <a:fontRef idx="minor">
+            <a:schemeClr val="lt1"/>
+          </a:fontRef>
+        </p:style>
+        <p:txBody>
+          <a:bodyPr rtlCol="0" anchor="ctr"/>
+          <a:lstStyle/>
+          <a:p>
+            <a:pPr algn="ctr"/>
+            <a:endParaRPr/>
+          </a:p>
+        </p:txBody>
+      </p:sp>
+      <p:sp>
+        <p:nvSpPr>
+          <p:cNvPr id="9" name="Step 2"/>
+          <p:cNvSpPr/>
+          <p:nvPr/>
+        </p:nvSpPr>
+        <p:spPr>
+          <a:xfrm>
+            <a:off x="2240280" y="3749039"/>
+            <a:ext cx="1371600" cy="731520"/>
+          </a:xfrm>
+          <a:prstGeom prst="roundRect">
+            <a:avLst/>
+          </a:prstGeom>
+          <a:solidFill>
+            <a:srgbClr val="FFFFFF"/>
+          </a:solidFill>
+          <a:ln w="12700">
+            <a:solidFill>
+              <a:srgbClr val="1F4788"/>
+            </a:solidFill>
+          </a:ln>
+          <a:effectLst/>
+        </p:spPr>
+        <p:style>
+          <a:lnRef idx="1">
+            <a:schemeClr val="accent1"/>
+          </a:lnRef>
+          <a:fillRef idx="3">
+            <a:schemeClr val="accent1"/>
+          </a:fillRef>
+          <a:effectRef idx="2">
+            <a:schemeClr val="accent1"/>
+          </a:effectRef>
+          <a:fontRef idx="minor">
+            <a:schemeClr val="lt1"/>
+          </a:fontRef>
+        </p:style>
+        <p:txBody>
+          <a:bodyPr wrap="square" lIns="54864" rIns="54864" rtlCol="0" anchor="ctr"/>
+          <a:lstStyle/>
+          <a:p>
+            <a:pPr algn="ctr"/>
+            <a:r>
+              <a:rPr sz="1100" b="1" i="0">
+                <a:solidFill>
+                  <a:srgbClr val="1F4788"/>
+                </a:solidFill>
+                <a:latin typeface="Calibri"/>
+              </a:rPr>
+              <a:t>Parse names, filters and budget</a:t>
+            </a:r>
+          </a:p>
+        </p:txBody>
+      </p:sp>
+      <p:sp>
+        <p:nvSpPr>
+          <p:cNvPr id="10" name="Arrow 2"/>
+          <p:cNvSpPr/>
+          <p:nvPr/>
+        </p:nvSpPr>
+        <p:spPr>
+          <a:xfrm>
+            <a:off x="3657600" y="4032504"/>
+            <a:ext cx="182880" cy="164592"/>
+          </a:xfrm>
+          <a:prstGeom prst="rightArrow">
+            <a:avLst/>
+          </a:prstGeom>
+          <a:solidFill>
+            <a:srgbClr val="00A4EF"/>
+          </a:solidFill>
+          <a:ln>
+            <a:noFill/>
+          </a:ln>
+          <a:effectLst/>
+        </p:spPr>
+        <p:style>
+          <a:lnRef idx="1">
+            <a:schemeClr val="accent1"/>
+          </a:lnRef>
+          <a:fillRef idx="3">
+            <a:schemeClr val="accent1"/>
+          </a:fillRef>
+          <a:effectRef idx="2">
+            <a:schemeClr val="accent1"/>
+          </a:effectRef>
+          <a:fontRef idx="minor">
+            <a:schemeClr val="lt1"/>
+          </a:fontRef>
+        </p:style>
+        <p:txBody>
+          <a:bodyPr rtlCol="0" anchor="ctr"/>
+          <a:lstStyle/>
+          <a:p>
+            <a:pPr algn="ctr"/>
+            <a:endParaRPr/>
+          </a:p>
+        </p:txBody>
+      </p:sp>
+      <p:sp>
+        <p:nvSpPr>
+          <p:cNvPr id="11" name="Step 3"/>
+          <p:cNvSpPr/>
+          <p:nvPr/>
+        </p:nvSpPr>
+        <p:spPr>
+          <a:xfrm>
+            <a:off x="3886200" y="3749039"/>
+            <a:ext cx="1371600" cy="731520"/>
+          </a:xfrm>
+          <a:prstGeom prst="roundRect">
+            <a:avLst/>
+          </a:prstGeom>
+          <a:solidFill>
+            <a:srgbClr val="FFFFFF"/>
+          </a:solidFill>
+          <a:ln w="12700">
+            <a:solidFill>
+              <a:srgbClr val="1F4788"/>
+            </a:solidFill>
+          </a:ln>
+          <a:effectLst/>
+        </p:spPr>
+        <p:style>
+          <a:lnRef idx="1">
+            <a:schemeClr val="accent1"/>
+          </a:lnRef>
+          <a:fillRef idx="3">
+            <a:schemeClr val="accent1"/>
+          </a:fillRef>
+          <a:effectRef idx="2">
+            <a:schemeClr val="accent1"/>
+          </a:effectRef>
+          <a:fontRef idx="minor">
+            <a:schemeClr val="lt1"/>
+          </a:fontRef>
+        </p:style>
+        <p:txBody>
+          <a:bodyPr wrap="square" lIns="54864" rIns="54864" rtlCol="0" anchor="ctr"/>
+          <a:lstStyle/>
+          <a:p>
+            <a:pPr algn="ctr"/>
+            <a:r>
+              <a:rPr sz="1100" b="1" i="0">
+                <a:solidFill>
+                  <a:srgbClr val="1F4788"/>
+                </a:solidFill>
+                <a:latin typeface="Calibri"/>
+              </a:rPr>
+              <a:t>Decide: answer, clarify or refuse</a:t>
+            </a:r>
+          </a:p>
+        </p:txBody>
+      </p:sp>
+      <p:sp>
+        <p:nvSpPr>
+          <p:cNvPr id="12" name="Arrow 3"/>
+          <p:cNvSpPr/>
+          <p:nvPr/>
+        </p:nvSpPr>
+        <p:spPr>
+          <a:xfrm>
+            <a:off x="5303520" y="4032504"/>
+            <a:ext cx="182880" cy="164592"/>
+          </a:xfrm>
+          <a:prstGeom prst="rightArrow">
+            <a:avLst/>
+          </a:prstGeom>
+          <a:solidFill>
+            <a:srgbClr val="00A4EF"/>
+          </a:solidFill>
+          <a:ln>
+            <a:noFill/>
+          </a:ln>
+          <a:effectLst/>
+        </p:spPr>
+        <p:style>
+          <a:lnRef idx="1">
+            <a:schemeClr val="accent1"/>
+          </a:lnRef>
+          <a:fillRef idx="3">
+            <a:schemeClr val="accent1"/>
+          </a:fillRef>
+          <a:effectRef idx="2">
+            <a:schemeClr val="accent1"/>
+          </a:effectRef>
+          <a:fontRef idx="minor">
+            <a:schemeClr val="lt1"/>
+          </a:fontRef>
+        </p:style>
+        <p:txBody>
+          <a:bodyPr rtlCol="0" anchor="ctr"/>
+          <a:lstStyle/>
+          <a:p>
+            <a:pPr algn="ctr"/>
+            <a:endParaRPr/>
+          </a:p>
+        </p:txBody>
+      </p:sp>
+      <p:sp>
+        <p:nvSpPr>
+          <p:cNvPr id="13" name="Step 4"/>
+          <p:cNvSpPr/>
+          <p:nvPr/>
+        </p:nvSpPr>
+        <p:spPr>
+          <a:xfrm>
+            <a:off x="5532120" y="3749039"/>
+            <a:ext cx="1371600" cy="731520"/>
+          </a:xfrm>
+          <a:prstGeom prst="roundRect">
+            <a:avLst/>
+          </a:prstGeom>
+          <a:solidFill>
+            <a:srgbClr val="FFFFFF"/>
+          </a:solidFill>
+          <a:ln w="12700">
+            <a:solidFill>
+              <a:srgbClr val="1F4788"/>
+            </a:solidFill>
+          </a:ln>
+          <a:effectLst/>
+        </p:spPr>
+        <p:style>
+          <a:lnRef idx="1">
+            <a:schemeClr val="accent1"/>
+          </a:lnRef>
+          <a:fillRef idx="3">
+            <a:schemeClr val="accent1"/>
+          </a:fillRef>
+          <a:effectRef idx="2">
+            <a:schemeClr val="accent1"/>
+          </a:effectRef>
+          <a:fontRef idx="minor">
+            <a:schemeClr val="lt1"/>
+          </a:fontRef>
+        </p:style>
+        <p:txBody>
+          <a:bodyPr wrap="square" lIns="54864" rIns="54864" rtlCol="0" anchor="ctr"/>
+          <a:lstStyle/>
+          <a:p>
+            <a:pPr algn="ctr"/>
+            <a:r>
+              <a:rPr sz="1100" b="1" i="0">
+                <a:solidFill>
+                  <a:srgbClr val="1F4788"/>
+                </a:solidFill>
+                <a:latin typeface="Calibri"/>
+              </a:rPr>
+              <a:t>LLM rewrite only if not understood</a:t>
+            </a:r>
+          </a:p>
+        </p:txBody>
+      </p:sp>
+      <p:sp>
+        <p:nvSpPr>
+          <p:cNvPr id="14" name="Arrow 4"/>
+          <p:cNvSpPr/>
+          <p:nvPr/>
+        </p:nvSpPr>
+        <p:spPr>
+          <a:xfrm>
+            <a:off x="6949440" y="4032504"/>
+            <a:ext cx="182880" cy="164592"/>
+          </a:xfrm>
+          <a:prstGeom prst="rightArrow">
+            <a:avLst/>
+          </a:prstGeom>
+          <a:solidFill>
+            <a:srgbClr val="00A4EF"/>
+          </a:solidFill>
+          <a:ln>
+            <a:noFill/>
+          </a:ln>
+          <a:effectLst/>
+        </p:spPr>
+        <p:style>
+          <a:lnRef idx="1">
+            <a:schemeClr val="accent1"/>
+          </a:lnRef>
+          <a:fillRef idx="3">
+            <a:schemeClr val="accent1"/>
+          </a:fillRef>
+          <a:effectRef idx="2">
+            <a:schemeClr val="accent1"/>
+          </a:effectRef>
+          <a:fontRef idx="minor">
+            <a:schemeClr val="lt1"/>
+          </a:fontRef>
+        </p:style>
+        <p:txBody>
+          <a:bodyPr rtlCol="0" anchor="ctr"/>
+          <a:lstStyle/>
+          <a:p>
+            <a:pPr algn="ctr"/>
+            <a:endParaRPr/>
+          </a:p>
+        </p:txBody>
+      </p:sp>
+      <p:sp>
+        <p:nvSpPr>
+          <p:cNvPr id="15" name="Step 5"/>
+          <p:cNvSpPr/>
+          <p:nvPr/>
+        </p:nvSpPr>
+        <p:spPr>
+          <a:xfrm>
+            <a:off x="7178040" y="3749039"/>
+            <a:ext cx="1371600" cy="731520"/>
+          </a:xfrm>
+          <a:prstGeom prst="roundRect">
+            <a:avLst/>
+          </a:prstGeom>
+          <a:solidFill>
+            <a:srgbClr val="1F4788"/>
+          </a:solidFill>
+          <a:ln>
+            <a:noFill/>
+          </a:ln>
+          <a:effectLst/>
+        </p:spPr>
+        <p:style>
+          <a:lnRef idx="1">
+            <a:schemeClr val="accent1"/>
+          </a:lnRef>
+          <a:fillRef idx="3">
+            <a:schemeClr val="accent1"/>
+          </a:fillRef>
+          <a:effectRef idx="2">
+            <a:schemeClr val="accent1"/>
+          </a:effectRef>
+          <a:fontRef idx="minor">
+            <a:schemeClr val="lt1"/>
+          </a:fontRef>
+        </p:style>
+        <p:txBody>
+          <a:bodyPr wrap="square" lIns="54864" rIns="54864" rtlCol="0" anchor="ctr"/>
+          <a:lstStyle/>
+          <a:p>
+            <a:pPr algn="ctr"/>
+            <a:r>
+              <a:rPr sz="1100" b="1" i="0">
+                <a:solidFill>
+                  <a:srgbClr val="FFFFFF"/>
+                </a:solidFill>
+                <a:latin typeface="Calibri"/>
+              </a:rPr>
+              <a:t>Reply with catalogue facts and citations</a:t>
             </a:r>
           </a:p>
         </p:txBody>
@@ -3225,8 +3561,8 @@
 </p:sld>
 </file>
 
-<file path=ppt/slides/slide14.xml><?xml version="1.0" encoding="utf-8"?>
-<p:sld xmlns:a="http://schemas.openxmlformats.org/drawingml/2006/main" xmlns:p="http://schemas.openxmlformats.org/presentationml/2006/main" xmlns:r="http://schemas.openxmlformats.org/officeDocument/2006/relationships">
+<file path=ppt/slides/slide4.xml><?xml version="1.0" encoding="utf-8"?>
+<p:sld xmlns:a="http://schemas.openxmlformats.org/drawingml/2006/main" xmlns:r="http://schemas.openxmlformats.org/officeDocument/2006/relationships" xmlns:p="http://schemas.openxmlformats.org/presentationml/2006/main">
   <p:cSld>
     <p:bg>
       <p:bgPr>
@@ -3242,7 +3578,14 @@
         <p:cNvGrpSpPr/>
         <p:nvPr/>
       </p:nvGrpSpPr>
-      <p:grpSpPr/>
+      <p:grpSpPr>
+        <a:xfrm>
+          <a:off x="0" y="0"/>
+          <a:ext cx="0" cy="0"/>
+          <a:chOff x="0" y="0"/>
+          <a:chExt cx="0" cy="0"/>
+        </a:xfrm>
+      </p:grpSpPr>
       <p:sp>
         <p:nvSpPr>
           <p:cNvPr id="2" name="Title bar"/>
@@ -3284,6 +3627,7 @@
           <a:lstStyle/>
           <a:p>
             <a:pPr algn="ctr"/>
+            <a:endParaRPr/>
           </a:p>
         </p:txBody>
       </p:sp>
@@ -3316,7 +3660,7 @@
                 </a:solidFill>
                 <a:latin typeface="Calibri"/>
               </a:rPr>
-              <a:t>Challenges &amp; Mitigation</a:t>
+              <a:t>Design Steps &amp; Architecture</a:t>
             </a:r>
           </a:p>
         </p:txBody>
@@ -3329,8 +3673,42 @@
         </p:nvSpPr>
         <p:spPr>
           <a:xfrm>
-            <a:off x="457200" y="914400"/>
-            <a:ext cx="8229600" cy="274320"/>
+            <a:off x="457200" y="1005840"/>
+            <a:ext cx="3749039" cy="320040"/>
+          </a:xfrm>
+          <a:prstGeom prst="rect">
+            <a:avLst/>
+          </a:prstGeom>
+          <a:noFill/>
+        </p:spPr>
+        <p:txBody>
+          <a:bodyPr wrap="square" anchor="ctr">
+            <a:spAutoFit/>
+          </a:bodyPr>
+          <a:lstStyle/>
+          <a:p>
+            <a:r>
+              <a:rPr sz="1800" b="1" i="0">
+                <a:solidFill>
+                  <a:srgbClr val="1F4788"/>
+                </a:solidFill>
+                <a:latin typeface="Calibri"/>
+              </a:rPr>
+              <a:t>Technical Implementation</a:t>
+            </a:r>
+          </a:p>
+        </p:txBody>
+      </p:sp>
+      <p:sp>
+        <p:nvSpPr>
+          <p:cNvPr id="5" name="TextBox 4"/>
+          <p:cNvSpPr txBox="1"/>
+          <p:nvPr/>
+        </p:nvSpPr>
+        <p:spPr>
+          <a:xfrm>
+            <a:off x="548640" y="1371600"/>
+            <a:ext cx="3657600" cy="3200400"/>
           </a:xfrm>
           <a:prstGeom prst="rect">
             <a:avLst/>
@@ -3343,40 +3721,36 @@
           </a:bodyPr>
           <a:lstStyle/>
           <a:p>
-            <a:r>
-              <a:rPr sz="1600" b="1" i="0">
+            <a:pPr>
+              <a:spcAft>
+                <a:spcPts val="800"/>
+              </a:spcAft>
+            </a:pPr>
+            <a:r>
+              <a:rPr sz="1300" b="1" i="0">
                 <a:solidFill>
                   <a:srgbClr val="2D2D2D"/>
                 </a:solidFill>
                 <a:latin typeface="Calibri"/>
               </a:rPr>
-              <a:t>Challenge 1: Hinglish and confusing names</a:t>
-            </a:r>
-          </a:p>
-        </p:txBody>
-      </p:sp>
-      <p:sp>
-        <p:nvSpPr>
-          <p:cNvPr id="5" name="TextBox 4"/>
-          <p:cNvSpPr txBox="1"/>
-          <p:nvPr/>
-        </p:nvSpPr>
-        <p:spPr>
-          <a:xfrm>
-            <a:off x="640080" y="1243584"/>
-            <a:ext cx="7863840" cy="777240"/>
-          </a:xfrm>
-          <a:prstGeom prst="rect">
-            <a:avLst/>
-          </a:prstGeom>
-          <a:noFill/>
-        </p:spPr>
-        <p:txBody>
-          <a:bodyPr wrap="square" anchor="t">
-            <a:spAutoFit/>
-          </a:bodyPr>
-          <a:lstStyle/>
-          <a:p>
+              <a:t>1. Understand: </a:t>
+            </a:r>
+            <a:r>
+              <a:rPr sz="1300" b="0" i="0">
+                <a:solidFill>
+                  <a:srgbClr val="2D2D2D"/>
+                </a:solidFill>
+                <a:latin typeface="Calibri"/>
+              </a:rPr>
+              <a:t>parser built from the catalogue’s own brands, product lines, colours and units; fuzzy matching fixes “krida ion flex”.</a:t>
+            </a:r>
+          </a:p>
+          <a:p>
+            <a:pPr>
+              <a:spcAft>
+                <a:spcPts val="800"/>
+              </a:spcAft>
+            </a:pPr>
             <a:r>
               <a:rPr sz="1300" b="1" i="0">
                 <a:solidFill>
@@ -3384,7 +3758,7 @@
                 </a:solidFill>
                 <a:latin typeface="Calibri"/>
               </a:rPr>
-              <a:t>Problem: </a:t>
+              <a:t>2. Decide: </a:t>
             </a:r>
             <a:r>
               <a:rPr sz="1300" b="0" i="0">
@@ -3393,10 +3767,15 @@
                 </a:solidFill>
                 <a:latin typeface="Calibri"/>
               </a:rPr>
-              <a:t>Misspelt or split names (“krida ion flex”); Hindi words that are also product names (“khilona”).</a:t>
-            </a:r>
-          </a:p>
-          <a:p>
+              <a:t>filters, policy router and conversation memory choose answer, clarify or refuse, all in code.</a:t>
+            </a:r>
+          </a:p>
+          <a:p>
+            <a:pPr>
+              <a:spcAft>
+                <a:spcPts val="800"/>
+              </a:spcAft>
+            </a:pPr>
             <a:r>
               <a:rPr sz="1300" b="1" i="0">
                 <a:solidFill>
@@ -3404,7 +3783,7 @@
                 </a:solidFill>
                 <a:latin typeface="Calibri"/>
               </a:rPr>
-              <a:t>Mitigation: </a:t>
+              <a:t>3. Fallback: </a:t>
             </a:r>
             <a:r>
               <a:rPr sz="1300" b="0" i="0">
@@ -3413,21 +3792,80 @@
                 </a:solidFill>
                 <a:latin typeface="Calibri"/>
               </a:rPr>
-              <a:t>Catalogue-built vocabulary, fuzzy matching, and ignoring coincidental names.</a:t>
-            </a:r>
-          </a:p>
-        </p:txBody>
-      </p:sp>
-      <p:sp>
-        <p:nvSpPr>
-          <p:cNvPr id="6" name="Rectangle 5"/>
+              <a:t>Groq gpt-oss-20b rewrites messages the rules can’t read; the output is validated and the rules decide again.</a:t>
+            </a:r>
+          </a:p>
+          <a:p>
+            <a:pPr>
+              <a:spcAft>
+                <a:spcPts val="800"/>
+              </a:spcAft>
+            </a:pPr>
+            <a:r>
+              <a:rPr sz="1300" b="1" i="0">
+                <a:solidFill>
+                  <a:srgbClr val="2D2D2D"/>
+                </a:solidFill>
+                <a:latin typeface="Calibri"/>
+              </a:rPr>
+              <a:t>4. Reply and check: </a:t>
+            </a:r>
+            <a:r>
+              <a:rPr sz="1300" b="0" i="0">
+                <a:solidFill>
+                  <a:srgbClr val="2D2D2D"/>
+                </a:solidFill>
+                <a:latin typeface="Calibri"/>
+              </a:rPr>
+              <a:t>facts are copied from the catalogue, and the guard re-checks every ₹ amount with the scorer’s rules.</a:t>
+            </a:r>
+          </a:p>
+        </p:txBody>
+      </p:sp>
+      <p:sp>
+        <p:nvSpPr>
+          <p:cNvPr id="6" name="TextBox 5"/>
+          <p:cNvSpPr txBox="1"/>
+          <p:nvPr/>
+        </p:nvSpPr>
+        <p:spPr>
+          <a:xfrm>
+            <a:off x="4434840" y="1005840"/>
+            <a:ext cx="4251960" cy="320040"/>
+          </a:xfrm>
+          <a:prstGeom prst="rect">
+            <a:avLst/>
+          </a:prstGeom>
+          <a:noFill/>
+        </p:spPr>
+        <p:txBody>
+          <a:bodyPr wrap="square" anchor="ctr">
+            <a:spAutoFit/>
+          </a:bodyPr>
+          <a:lstStyle/>
+          <a:p>
+            <a:r>
+              <a:rPr sz="1800" b="1" i="0">
+                <a:solidFill>
+                  <a:srgbClr val="1F4788"/>
+                </a:solidFill>
+                <a:latin typeface="Calibri"/>
+              </a:rPr>
+              <a:t>Architecture Diagram</a:t>
+            </a:r>
+          </a:p>
+        </p:txBody>
+      </p:sp>
+      <p:sp>
+        <p:nvSpPr>
+          <p:cNvPr id="7" name="Diagram panel"/>
           <p:cNvSpPr/>
           <p:nvPr/>
         </p:nvSpPr>
         <p:spPr>
           <a:xfrm>
-            <a:off x="457200" y="2084832"/>
-            <a:ext cx="8229600" cy="9144"/>
+            <a:off x="4434840" y="1371600"/>
+            <a:ext cx="4251960" cy="3154680"/>
           </a:xfrm>
           <a:prstGeom prst="rect">
             <a:avLst/>
@@ -3459,247 +3897,34 @@
           <a:lstStyle/>
           <a:p>
             <a:pPr algn="ctr"/>
-          </a:p>
-        </p:txBody>
-      </p:sp>
-      <p:sp>
-        <p:nvSpPr>
-          <p:cNvPr id="7" name="TextBox 6"/>
-          <p:cNvSpPr txBox="1"/>
-          <p:nvPr/>
-        </p:nvSpPr>
-        <p:spPr>
-          <a:xfrm>
-            <a:off x="457200" y="2176272"/>
-            <a:ext cx="8229600" cy="274320"/>
-          </a:xfrm>
-          <a:prstGeom prst="rect">
-            <a:avLst/>
-          </a:prstGeom>
-          <a:noFill/>
-        </p:spPr>
-        <p:txBody>
-          <a:bodyPr wrap="square" anchor="t">
-            <a:spAutoFit/>
-          </a:bodyPr>
-          <a:lstStyle/>
-          <a:p>
-            <a:r>
-              <a:rPr sz="1600" b="1" i="0">
-                <a:solidFill>
-                  <a:srgbClr val="2D2D2D"/>
-                </a:solidFill>
-                <a:latin typeface="Calibri"/>
-              </a:rPr>
-              <a:t>Challenge 2: Ambiguous questions and missing facts</a:t>
-            </a:r>
-          </a:p>
-        </p:txBody>
-      </p:sp>
-      <p:sp>
-        <p:nvSpPr>
-          <p:cNvPr id="8" name="TextBox 7"/>
-          <p:cNvSpPr txBox="1"/>
-          <p:nvPr/>
-        </p:nvSpPr>
-        <p:spPr>
-          <a:xfrm>
-            <a:off x="640080" y="2505456"/>
-            <a:ext cx="7863840" cy="777240"/>
-          </a:xfrm>
-          <a:prstGeom prst="rect">
-            <a:avLst/>
-          </a:prstGeom>
-          <a:noFill/>
-        </p:spPr>
-        <p:txBody>
-          <a:bodyPr wrap="square" anchor="t">
-            <a:spAutoFit/>
-          </a:bodyPr>
-          <a:lstStyle/>
-          <a:p>
-            <a:r>
-              <a:rPr sz="1300" b="1" i="0">
-                <a:solidFill>
-                  <a:srgbClr val="2D2D2D"/>
-                </a:solidFill>
-                <a:latin typeface="Calibri"/>
-              </a:rPr>
-              <a:t>Problem: </a:t>
-            </a:r>
-            <a:r>
-              <a:rPr sz="1300" b="0" i="0">
-                <a:solidFill>
-                  <a:srgbClr val="2D2D2D"/>
-                </a:solidFill>
-                <a:latin typeface="Calibri"/>
-              </a:rPr>
-              <a:t>Many variants differ in price or stock, and many attributes are simply not listed.</a:t>
-            </a:r>
-          </a:p>
-          <a:p>
-            <a:r>
-              <a:rPr sz="1300" b="1" i="0">
-                <a:solidFill>
-                  <a:srgbClr val="2D2D2D"/>
-                </a:solidFill>
-                <a:latin typeface="Calibri"/>
-              </a:rPr>
-              <a:t>Mitigation: </a:t>
-            </a:r>
-            <a:r>
-              <a:rPr sz="1300" b="0" i="0">
-                <a:solidFill>
-                  <a:srgbClr val="2D2D2D"/>
-                </a:solidFill>
-                <a:latin typeface="Calibri"/>
-              </a:rPr>
-              <a:t>Clarify only when the asked detail differs; treat missing facts as unknown and refuse instead of guessing.</a:t>
-            </a:r>
-          </a:p>
-        </p:txBody>
-      </p:sp>
-      <p:sp>
-        <p:nvSpPr>
-          <p:cNvPr id="9" name="Rectangle 8"/>
-          <p:cNvSpPr/>
-          <p:nvPr/>
-        </p:nvSpPr>
-        <p:spPr>
-          <a:xfrm>
-            <a:off x="457200" y="3346704"/>
-            <a:ext cx="8229600" cy="9144"/>
-          </a:xfrm>
-          <a:prstGeom prst="rect">
-            <a:avLst/>
-          </a:prstGeom>
-          <a:solidFill>
-            <a:srgbClr val="F5F5F5"/>
-          </a:solidFill>
-          <a:ln>
-            <a:noFill/>
-          </a:ln>
-          <a:effectLst/>
-        </p:spPr>
-        <p:style>
-          <a:lnRef idx="1">
-            <a:schemeClr val="accent1"/>
-          </a:lnRef>
-          <a:fillRef idx="3">
-            <a:schemeClr val="accent1"/>
-          </a:fillRef>
-          <a:effectRef idx="2">
-            <a:schemeClr val="accent1"/>
-          </a:effectRef>
-          <a:fontRef idx="minor">
-            <a:schemeClr val="lt1"/>
-          </a:fontRef>
-        </p:style>
-        <p:txBody>
-          <a:bodyPr rtlCol="0" anchor="ctr"/>
-          <a:lstStyle/>
-          <a:p>
-            <a:pPr algn="ctr"/>
-          </a:p>
-        </p:txBody>
-      </p:sp>
-      <p:sp>
-        <p:nvSpPr>
-          <p:cNvPr id="10" name="TextBox 9"/>
-          <p:cNvSpPr txBox="1"/>
-          <p:nvPr/>
-        </p:nvSpPr>
-        <p:spPr>
-          <a:xfrm>
-            <a:off x="457200" y="3438144"/>
-            <a:ext cx="8229600" cy="274320"/>
-          </a:xfrm>
-          <a:prstGeom prst="rect">
-            <a:avLst/>
-          </a:prstGeom>
-          <a:noFill/>
-        </p:spPr>
-        <p:txBody>
-          <a:bodyPr wrap="square" anchor="t">
-            <a:spAutoFit/>
-          </a:bodyPr>
-          <a:lstStyle/>
-          <a:p>
-            <a:r>
-              <a:rPr sz="1600" b="1" i="0">
-                <a:solidFill>
-                  <a:srgbClr val="2D2D2D"/>
-                </a:solidFill>
-                <a:latin typeface="Calibri"/>
-              </a:rPr>
-              <a:t>Challenge 3: An unpredictable, rate-limited LLM</a:t>
-            </a:r>
-          </a:p>
-        </p:txBody>
-      </p:sp>
-      <p:sp>
-        <p:nvSpPr>
-          <p:cNvPr id="11" name="TextBox 10"/>
-          <p:cNvSpPr txBox="1"/>
-          <p:nvPr/>
-        </p:nvSpPr>
-        <p:spPr>
-          <a:xfrm>
-            <a:off x="640080" y="3767328"/>
-            <a:ext cx="7863840" cy="777240"/>
-          </a:xfrm>
-          <a:prstGeom prst="rect">
-            <a:avLst/>
-          </a:prstGeom>
-          <a:noFill/>
-        </p:spPr>
-        <p:txBody>
-          <a:bodyPr wrap="square" anchor="t">
-            <a:spAutoFit/>
-          </a:bodyPr>
-          <a:lstStyle/>
-          <a:p>
-            <a:r>
-              <a:rPr sz="1300" b="1" i="0">
-                <a:solidFill>
-                  <a:srgbClr val="2D2D2D"/>
-                </a:solidFill>
-                <a:latin typeface="Calibri"/>
-              </a:rPr>
-              <a:t>Problem: </a:t>
-            </a:r>
-            <a:r>
-              <a:rPr sz="1300" b="0" i="0">
-                <a:solidFill>
-                  <a:srgbClr val="2D2D2D"/>
-                </a:solidFill>
-                <a:latin typeface="Calibri"/>
-              </a:rPr>
-              <a:t>Wrong mappings (clothes dryer → hair dryer), invented brands, and HTTP 429 rate limits.</a:t>
-            </a:r>
-          </a:p>
-          <a:p>
-            <a:r>
-              <a:rPr sz="1300" b="1" i="0">
-                <a:solidFill>
-                  <a:srgbClr val="2D2D2D"/>
-                </a:solidFill>
-                <a:latin typeface="Calibri"/>
-              </a:rPr>
-              <a:t>Mitigation: </a:t>
-            </a:r>
-            <a:r>
-              <a:rPr sz="1300" b="0" i="0">
-                <a:solidFill>
-                  <a:srgbClr val="2D2D2D"/>
-                </a:solidFill>
-                <a:latin typeface="Calibri"/>
-              </a:rPr>
-              <a:t>Translate-then-map prompt, validation, one retry and back-off; the rules keep answering.</a:t>
-            </a:r>
-          </a:p>
-        </p:txBody>
-      </p:sp>
+            <a:endParaRPr/>
+          </a:p>
+        </p:txBody>
+      </p:sp>
+      <p:pic>
+        <p:nvPicPr>
+          <p:cNvPr id="8" name="Architecture diagram" descr="Architecture: shopper message, parser, decide with policy router, follow-up turn, named product and filters, LLM rewrite only if needed, response, guard, final reply"/>
+          <p:cNvPicPr>
+            <a:picLocks noChangeAspect="1"/>
+          </p:cNvPicPr>
+          <p:nvPr/>
+        </p:nvPicPr>
+        <p:blipFill>
+          <a:blip r:embed="rId3"/>
+          <a:stretch>
+            <a:fillRect/>
+          </a:stretch>
+        </p:blipFill>
+        <p:spPr>
+          <a:xfrm>
+            <a:off x="4526280" y="1592580"/>
+            <a:ext cx="4069080" cy="2712720"/>
+          </a:xfrm>
+          <a:prstGeom prst="rect">
+            <a:avLst/>
+          </a:prstGeom>
+        </p:spPr>
+      </p:pic>
     </p:spTree>
   </p:cSld>
   <p:clrMapOvr>
@@ -3708,8 +3933,8 @@
 </p:sld>
 </file>
 
-<file path=ppt/slides/slide15.xml><?xml version="1.0" encoding="utf-8"?>
-<p:sld xmlns:a="http://schemas.openxmlformats.org/drawingml/2006/main" xmlns:p="http://schemas.openxmlformats.org/presentationml/2006/main" xmlns:r="http://schemas.openxmlformats.org/officeDocument/2006/relationships">
+<file path=ppt/slides/slide5.xml><?xml version="1.0" encoding="utf-8"?>
+<p:sld xmlns:a="http://schemas.openxmlformats.org/drawingml/2006/main" xmlns:r="http://schemas.openxmlformats.org/officeDocument/2006/relationships" xmlns:p="http://schemas.openxmlformats.org/presentationml/2006/main">
   <p:cSld>
     <p:bg>
       <p:bgPr>
@@ -3725,7 +3950,14 @@
         <p:cNvGrpSpPr/>
         <p:nvPr/>
       </p:nvGrpSpPr>
-      <p:grpSpPr/>
+      <p:grpSpPr>
+        <a:xfrm>
+          <a:off x="0" y="0"/>
+          <a:ext cx="0" cy="0"/>
+          <a:chOff x="0" y="0"/>
+          <a:chExt cx="0" cy="0"/>
+        </a:xfrm>
+      </p:grpSpPr>
       <p:sp>
         <p:nvSpPr>
           <p:cNvPr id="2" name="Title bar"/>
@@ -3767,6 +3999,7 @@
           <a:lstStyle/>
           <a:p>
             <a:pPr algn="ctr"/>
+            <a:endParaRPr/>
           </a:p>
         </p:txBody>
       </p:sp>
@@ -3799,30 +4032,66 @@
                 </a:solidFill>
                 <a:latin typeface="Calibri"/>
               </a:rPr>
-              <a:t>Unique Selling Proposition (USP)</a:t>
-            </a:r>
-          </a:p>
-        </p:txBody>
-      </p:sp>
-      <p:sp>
-        <p:nvSpPr>
-          <p:cNvPr id="4" name="Rectangle 3"/>
+              <a:t>Tools &amp; Technologies</a:t>
+            </a:r>
+          </a:p>
+        </p:txBody>
+      </p:sp>
+      <p:sp>
+        <p:nvSpPr>
+          <p:cNvPr id="4" name="TextBox 3"/>
+          <p:cNvSpPr txBox="1"/>
+          <p:nvPr/>
+        </p:nvSpPr>
+        <p:spPr>
+          <a:xfrm>
+            <a:off x="457200" y="1005840"/>
+            <a:ext cx="8229600" cy="320040"/>
+          </a:xfrm>
+          <a:prstGeom prst="rect">
+            <a:avLst/>
+          </a:prstGeom>
+          <a:noFill/>
+        </p:spPr>
+        <p:txBody>
+          <a:bodyPr wrap="square" anchor="ctr">
+            <a:spAutoFit/>
+          </a:bodyPr>
+          <a:lstStyle/>
+          <a:p>
+            <a:r>
+              <a:rPr sz="2000" b="1" i="0">
+                <a:solidFill>
+                  <a:srgbClr val="1F4788"/>
+                </a:solidFill>
+                <a:latin typeface="Calibri"/>
+              </a:rPr>
+              <a:t>Tech Stack</a:t>
+            </a:r>
+          </a:p>
+        </p:txBody>
+      </p:sp>
+      <p:sp>
+        <p:nvSpPr>
+          <p:cNvPr id="5" name="Tool 1"/>
           <p:cNvSpPr/>
           <p:nvPr/>
         </p:nvSpPr>
         <p:spPr>
           <a:xfrm>
-            <a:off x="731520" y="1005840"/>
-            <a:ext cx="2468880" cy="73152"/>
-          </a:xfrm>
-          <a:prstGeom prst="rect">
+            <a:off x="457200" y="1417320"/>
+            <a:ext cx="1920240" cy="777240"/>
+          </a:xfrm>
+          <a:prstGeom prst="roundRect">
             <a:avLst/>
           </a:prstGeom>
           <a:solidFill>
-            <a:srgbClr val="00A4EF"/>
+            <a:srgbClr val="FFFFFF"/>
           </a:solidFill>
-          <a:ln>
-            <a:noFill/>
+          <a:ln w="12700">
+            <a:solidFill>
+              <a:srgbClr val="1F4788"/>
+            </a:solidFill>
           </a:ln>
           <a:effectLst/>
         </p:spPr>
@@ -3841,114 +4110,55 @@
           </a:fontRef>
         </p:style>
         <p:txBody>
-          <a:bodyPr rtlCol="0" anchor="ctr"/>
+          <a:bodyPr wrap="square" lIns="54864" rIns="54864" rtlCol="0" anchor="ctr"/>
           <a:lstStyle/>
           <a:p>
             <a:pPr algn="ctr"/>
-          </a:p>
-        </p:txBody>
-      </p:sp>
-      <p:sp>
-        <p:nvSpPr>
-          <p:cNvPr id="5" name="TextBox 4"/>
-          <p:cNvSpPr txBox="1"/>
-          <p:nvPr/>
-        </p:nvSpPr>
-        <p:spPr>
-          <a:xfrm>
-            <a:off x="731520" y="1143000"/>
-            <a:ext cx="2468880" cy="320040"/>
-          </a:xfrm>
-          <a:prstGeom prst="rect">
-            <a:avLst/>
-          </a:prstGeom>
-          <a:noFill/>
-        </p:spPr>
-        <p:txBody>
-          <a:bodyPr wrap="square" anchor="t">
-            <a:spAutoFit/>
-          </a:bodyPr>
-          <a:lstStyle/>
+            <a:r>
+              <a:rPr sz="1300" b="1" i="0">
+                <a:solidFill>
+                  <a:srgbClr val="1F4788"/>
+                </a:solidFill>
+                <a:latin typeface="Calibri"/>
+              </a:rPr>
+              <a:t>Python 3.11 + uv</a:t>
+            </a:r>
+          </a:p>
           <a:p>
             <a:pPr algn="ctr"/>
             <a:r>
-              <a:rPr sz="1400" b="1" i="0">
-                <a:solidFill>
-                  <a:srgbClr val="1F4788"/>
-                </a:solidFill>
-                <a:latin typeface="Calibri"/>
-              </a:rPr>
-              <a:t>Key Differentiator 1</a:t>
-            </a:r>
-          </a:p>
-        </p:txBody>
-      </p:sp>
-      <p:sp>
-        <p:nvSpPr>
-          <p:cNvPr id="6" name="TextBox 5"/>
-          <p:cNvSpPr txBox="1"/>
-          <p:nvPr/>
-        </p:nvSpPr>
-        <p:spPr>
-          <a:xfrm>
-            <a:off x="731520" y="1508760"/>
-            <a:ext cx="2468880" cy="1645920"/>
-          </a:xfrm>
-          <a:prstGeom prst="rect">
-            <a:avLst/>
-          </a:prstGeom>
-          <a:noFill/>
-        </p:spPr>
-        <p:txBody>
-          <a:bodyPr wrap="square" anchor="t">
-            <a:spAutoFit/>
-          </a:bodyPr>
-          <a:lstStyle/>
-          <a:p>
-            <a:pPr algn="ctr"/>
-            <a:r>
-              <a:rPr sz="1200" b="1" i="0">
-                <a:solidFill>
-                  <a:srgbClr val="1F4788"/>
-                </a:solidFill>
-                <a:latin typeface="Calibri"/>
-              </a:rPr>
-              <a:t>Prices cannot be invented</a:t>
-            </a:r>
-          </a:p>
-          <a:p>
-            <a:pPr algn="ctr"/>
-            <a:r>
-              <a:rPr sz="1200" b="0" i="0">
-                <a:solidFill>
-                  <a:srgbClr val="1F4788"/>
-                </a:solidFill>
-                <a:latin typeface="Calibri"/>
-              </a:rPr>
-              <a:t>Code copies every price from the catalogue and the guard re-checks every ₹ amount: 0 hallucinated prices.</a:t>
-            </a:r>
-          </a:p>
-        </p:txBody>
-      </p:sp>
-      <p:sp>
-        <p:nvSpPr>
-          <p:cNvPr id="7" name="Rectangle 6"/>
+              <a:rPr sz="1050" b="0" i="0">
+                <a:solidFill>
+                  <a:srgbClr val="5F5F5F"/>
+                </a:solidFill>
+                <a:latin typeface="Calibri"/>
+              </a:rPr>
+              <a:t>language, locked dependencies</a:t>
+            </a:r>
+          </a:p>
+        </p:txBody>
+      </p:sp>
+      <p:sp>
+        <p:nvSpPr>
+          <p:cNvPr id="6" name="Tool 2"/>
           <p:cNvSpPr/>
           <p:nvPr/>
         </p:nvSpPr>
         <p:spPr>
           <a:xfrm>
-            <a:off x="3566160" y="1005840"/>
-            <a:ext cx="2468880" cy="73152"/>
-          </a:xfrm>
-          <a:prstGeom prst="rect">
+            <a:off x="2560320" y="1417320"/>
+            <a:ext cx="1920240" cy="777240"/>
+          </a:xfrm>
+          <a:prstGeom prst="roundRect">
             <a:avLst/>
           </a:prstGeom>
           <a:solidFill>
-            <a:srgbClr val="00A4EF"/>
+            <a:srgbClr val="FFFFFF"/>
           </a:solidFill>
-          <a:ln>
-            <a:noFill/>
+          <a:ln w="12700">
+            <a:solidFill>
+              <a:srgbClr val="1F4788"/>
+            </a:solidFill>
           </a:ln>
           <a:effectLst/>
         </p:spPr>
@@ -3967,114 +4177,55 @@
           </a:fontRef>
         </p:style>
         <p:txBody>
-          <a:bodyPr rtlCol="0" anchor="ctr"/>
+          <a:bodyPr wrap="square" lIns="54864" rIns="54864" rtlCol="0" anchor="ctr"/>
           <a:lstStyle/>
           <a:p>
             <a:pPr algn="ctr"/>
-          </a:p>
-        </p:txBody>
-      </p:sp>
-      <p:sp>
-        <p:nvSpPr>
-          <p:cNvPr id="8" name="TextBox 7"/>
-          <p:cNvSpPr txBox="1"/>
-          <p:nvPr/>
-        </p:nvSpPr>
-        <p:spPr>
-          <a:xfrm>
-            <a:off x="3566160" y="1143000"/>
-            <a:ext cx="2468880" cy="320040"/>
-          </a:xfrm>
-          <a:prstGeom prst="rect">
-            <a:avLst/>
-          </a:prstGeom>
-          <a:noFill/>
-        </p:spPr>
-        <p:txBody>
-          <a:bodyPr wrap="square" anchor="t">
-            <a:spAutoFit/>
-          </a:bodyPr>
-          <a:lstStyle/>
+            <a:r>
+              <a:rPr sz="1300" b="1" i="0">
+                <a:solidFill>
+                  <a:srgbClr val="1F4788"/>
+                </a:solidFill>
+                <a:latin typeface="Calibri"/>
+              </a:rPr>
+              <a:t>FastAPI + Pydantic</a:t>
+            </a:r>
+          </a:p>
           <a:p>
             <a:pPr algn="ctr"/>
             <a:r>
-              <a:rPr sz="1400" b="1" i="0">
-                <a:solidFill>
-                  <a:srgbClr val="1F4788"/>
-                </a:solidFill>
-                <a:latin typeface="Calibri"/>
-              </a:rPr>
-              <a:t>Key Differentiator 2</a:t>
-            </a:r>
-          </a:p>
-        </p:txBody>
-      </p:sp>
-      <p:sp>
-        <p:nvSpPr>
-          <p:cNvPr id="9" name="TextBox 8"/>
-          <p:cNvSpPr txBox="1"/>
-          <p:nvPr/>
-        </p:nvSpPr>
-        <p:spPr>
-          <a:xfrm>
-            <a:off x="3566160" y="1508760"/>
-            <a:ext cx="2468880" cy="1645920"/>
-          </a:xfrm>
-          <a:prstGeom prst="rect">
-            <a:avLst/>
-          </a:prstGeom>
-          <a:noFill/>
-        </p:spPr>
-        <p:txBody>
-          <a:bodyPr wrap="square" anchor="t">
-            <a:spAutoFit/>
-          </a:bodyPr>
-          <a:lstStyle/>
-          <a:p>
-            <a:pPr algn="ctr"/>
-            <a:r>
-              <a:rPr sz="1200" b="1" i="0">
-                <a:solidFill>
-                  <a:srgbClr val="1F4788"/>
-                </a:solidFill>
-                <a:latin typeface="Calibri"/>
-              </a:rPr>
-              <a:t>Rules first, LLM only when needed</a:t>
-            </a:r>
-          </a:p>
-          <a:p>
-            <a:pPr algn="ctr"/>
-            <a:r>
-              <a:rPr sz="1200" b="0" i="0">
-                <a:solidFill>
-                  <a:srgbClr val="1F4788"/>
-                </a:solidFill>
-                <a:latin typeface="Calibri"/>
-              </a:rPr>
-              <a:t>~1 ms and $0 per query. The LLM only rewrites unclear messages and never states a fact.</a:t>
-            </a:r>
-          </a:p>
-        </p:txBody>
-      </p:sp>
-      <p:sp>
-        <p:nvSpPr>
-          <p:cNvPr id="10" name="Rectangle 9"/>
+              <a:rPr sz="1050" b="0" i="0">
+                <a:solidFill>
+                  <a:srgbClr val="5F5F5F"/>
+                </a:solidFill>
+                <a:latin typeface="Calibri"/>
+              </a:rPr>
+              <a:t>API and validation</a:t>
+            </a:r>
+          </a:p>
+        </p:txBody>
+      </p:sp>
+      <p:sp>
+        <p:nvSpPr>
+          <p:cNvPr id="7" name="Tool 3"/>
           <p:cNvSpPr/>
           <p:nvPr/>
         </p:nvSpPr>
         <p:spPr>
           <a:xfrm>
-            <a:off x="6400800" y="1005840"/>
-            <a:ext cx="2468880" cy="73152"/>
-          </a:xfrm>
-          <a:prstGeom prst="rect">
+            <a:off x="4663440" y="1417320"/>
+            <a:ext cx="1920240" cy="777240"/>
+          </a:xfrm>
+          <a:prstGeom prst="roundRect">
             <a:avLst/>
           </a:prstGeom>
           <a:solidFill>
-            <a:srgbClr val="00A4EF"/>
+            <a:srgbClr val="FFFFFF"/>
           </a:solidFill>
-          <a:ln>
-            <a:noFill/>
+          <a:ln w="12700">
+            <a:solidFill>
+              <a:srgbClr val="1F4788"/>
+            </a:solidFill>
           </a:ln>
           <a:effectLst/>
         </p:spPr>
@@ -4093,91 +4244,365 @@
           </a:fontRef>
         </p:style>
         <p:txBody>
-          <a:bodyPr rtlCol="0" anchor="ctr"/>
+          <a:bodyPr wrap="square" lIns="54864" rIns="54864" rtlCol="0" anchor="ctr"/>
           <a:lstStyle/>
           <a:p>
             <a:pPr algn="ctr"/>
-          </a:p>
-        </p:txBody>
-      </p:sp>
-      <p:sp>
-        <p:nvSpPr>
-          <p:cNvPr id="11" name="TextBox 10"/>
-          <p:cNvSpPr txBox="1"/>
-          <p:nvPr/>
-        </p:nvSpPr>
-        <p:spPr>
-          <a:xfrm>
-            <a:off x="6400800" y="1143000"/>
-            <a:ext cx="2468880" cy="320040"/>
-          </a:xfrm>
-          <a:prstGeom prst="rect">
-            <a:avLst/>
-          </a:prstGeom>
-          <a:noFill/>
-        </p:spPr>
-        <p:txBody>
-          <a:bodyPr wrap="square" anchor="t">
-            <a:spAutoFit/>
-          </a:bodyPr>
-          <a:lstStyle/>
+            <a:r>
+              <a:rPr sz="1300" b="1" i="0">
+                <a:solidFill>
+                  <a:srgbClr val="1F4788"/>
+                </a:solidFill>
+                <a:latin typeface="Calibri"/>
+              </a:rPr>
+              <a:t>rapidfuzz</a:t>
+            </a:r>
+          </a:p>
           <a:p>
             <a:pPr algn="ctr"/>
             <a:r>
-              <a:rPr sz="1400" b="1" i="0">
+              <a:rPr sz="1050" b="0" i="0">
+                <a:solidFill>
+                  <a:srgbClr val="5F5F5F"/>
+                </a:solidFill>
+                <a:latin typeface="Calibri"/>
+              </a:rPr>
+              <a:t>fuzzy name matching</a:t>
+            </a:r>
+          </a:p>
+        </p:txBody>
+      </p:sp>
+      <p:sp>
+        <p:nvSpPr>
+          <p:cNvPr id="8" name="Tool 4"/>
+          <p:cNvSpPr/>
+          <p:nvPr/>
+        </p:nvSpPr>
+        <p:spPr>
+          <a:xfrm>
+            <a:off x="6766559" y="1417320"/>
+            <a:ext cx="1920240" cy="777240"/>
+          </a:xfrm>
+          <a:prstGeom prst="roundRect">
+            <a:avLst/>
+          </a:prstGeom>
+          <a:solidFill>
+            <a:srgbClr val="FFFFFF"/>
+          </a:solidFill>
+          <a:ln w="12700">
+            <a:solidFill>
+              <a:srgbClr val="1F4788"/>
+            </a:solidFill>
+          </a:ln>
+          <a:effectLst/>
+        </p:spPr>
+        <p:style>
+          <a:lnRef idx="1">
+            <a:schemeClr val="accent1"/>
+          </a:lnRef>
+          <a:fillRef idx="3">
+            <a:schemeClr val="accent1"/>
+          </a:fillRef>
+          <a:effectRef idx="2">
+            <a:schemeClr val="accent1"/>
+          </a:effectRef>
+          <a:fontRef idx="minor">
+            <a:schemeClr val="lt1"/>
+          </a:fontRef>
+        </p:style>
+        <p:txBody>
+          <a:bodyPr wrap="square" lIns="54864" rIns="54864" rtlCol="0" anchor="ctr"/>
+          <a:lstStyle/>
+          <a:p>
+            <a:pPr algn="ctr"/>
+            <a:r>
+              <a:rPr sz="1300" b="1" i="0">
                 <a:solidFill>
                   <a:srgbClr val="1F4788"/>
                 </a:solidFill>
                 <a:latin typeface="Calibri"/>
               </a:rPr>
-              <a:t>Key Differentiator 3</a:t>
-            </a:r>
-          </a:p>
-        </p:txBody>
-      </p:sp>
-      <p:sp>
-        <p:nvSpPr>
-          <p:cNvPr id="12" name="TextBox 11"/>
-          <p:cNvSpPr txBox="1"/>
-          <p:nvPr/>
-        </p:nvSpPr>
-        <p:spPr>
-          <a:xfrm>
-            <a:off x="6400800" y="1508760"/>
-            <a:ext cx="2468880" cy="1645920"/>
-          </a:xfrm>
-          <a:prstGeom prst="rect">
-            <a:avLst/>
-          </a:prstGeom>
-          <a:noFill/>
-        </p:spPr>
-        <p:txBody>
-          <a:bodyPr wrap="square" anchor="t">
-            <a:spAutoFit/>
-          </a:bodyPr>
-          <a:lstStyle/>
+              <a:t>HTML / CSS / JS</a:t>
+            </a:r>
+          </a:p>
           <a:p>
             <a:pPr algn="ctr"/>
             <a:r>
-              <a:rPr sz="1200" b="1" i="0">
+              <a:rPr sz="1050" b="0" i="0">
+                <a:solidFill>
+                  <a:srgbClr val="5F5F5F"/>
+                </a:solidFill>
+                <a:latin typeface="Calibri"/>
+              </a:rPr>
+              <a:t>chat UI with Sources panel</a:t>
+            </a:r>
+          </a:p>
+        </p:txBody>
+      </p:sp>
+      <p:sp>
+        <p:nvSpPr>
+          <p:cNvPr id="9" name="Tool 5"/>
+          <p:cNvSpPr/>
+          <p:nvPr/>
+        </p:nvSpPr>
+        <p:spPr>
+          <a:xfrm>
+            <a:off x="457200" y="2331720"/>
+            <a:ext cx="1920240" cy="777240"/>
+          </a:xfrm>
+          <a:prstGeom prst="roundRect">
+            <a:avLst/>
+          </a:prstGeom>
+          <a:solidFill>
+            <a:srgbClr val="FFFFFF"/>
+          </a:solidFill>
+          <a:ln w="12700">
+            <a:solidFill>
+              <a:srgbClr val="1F4788"/>
+            </a:solidFill>
+          </a:ln>
+          <a:effectLst/>
+        </p:spPr>
+        <p:style>
+          <a:lnRef idx="1">
+            <a:schemeClr val="accent1"/>
+          </a:lnRef>
+          <a:fillRef idx="3">
+            <a:schemeClr val="accent1"/>
+          </a:fillRef>
+          <a:effectRef idx="2">
+            <a:schemeClr val="accent1"/>
+          </a:effectRef>
+          <a:fontRef idx="minor">
+            <a:schemeClr val="lt1"/>
+          </a:fontRef>
+        </p:style>
+        <p:txBody>
+          <a:bodyPr wrap="square" lIns="54864" rIns="54864" rtlCol="0" anchor="ctr"/>
+          <a:lstStyle/>
+          <a:p>
+            <a:pPr algn="ctr"/>
+            <a:r>
+              <a:rPr sz="1300" b="1" i="0">
                 <a:solidFill>
                   <a:srgbClr val="1F4788"/>
                 </a:solidFill>
                 <a:latin typeface="Calibri"/>
               </a:rPr>
-              <a:t>Built for Indian shoppers</a:t>
+              <a:t>Groq API</a:t>
             </a:r>
           </a:p>
           <a:p>
             <a:pPr algn="ctr"/>
             <a:r>
-              <a:rPr sz="1200" b="0" i="0">
+              <a:rPr sz="1050" b="0" i="0">
+                <a:solidFill>
+                  <a:srgbClr val="5F5F5F"/>
+                </a:solidFill>
+                <a:latin typeface="Calibri"/>
+              </a:rPr>
+              <a:t>gpt-oss-20b LLM fallback</a:t>
+            </a:r>
+          </a:p>
+        </p:txBody>
+      </p:sp>
+      <p:sp>
+        <p:nvSpPr>
+          <p:cNvPr id="10" name="Tool 6"/>
+          <p:cNvSpPr/>
+          <p:nvPr/>
+        </p:nvSpPr>
+        <p:spPr>
+          <a:xfrm>
+            <a:off x="2560320" y="2331720"/>
+            <a:ext cx="1920240" cy="777240"/>
+          </a:xfrm>
+          <a:prstGeom prst="roundRect">
+            <a:avLst/>
+          </a:prstGeom>
+          <a:solidFill>
+            <a:srgbClr val="FFFFFF"/>
+          </a:solidFill>
+          <a:ln w="12700">
+            <a:solidFill>
+              <a:srgbClr val="1F4788"/>
+            </a:solidFill>
+          </a:ln>
+          <a:effectLst/>
+        </p:spPr>
+        <p:style>
+          <a:lnRef idx="1">
+            <a:schemeClr val="accent1"/>
+          </a:lnRef>
+          <a:fillRef idx="3">
+            <a:schemeClr val="accent1"/>
+          </a:fillRef>
+          <a:effectRef idx="2">
+            <a:schemeClr val="accent1"/>
+          </a:effectRef>
+          <a:fontRef idx="minor">
+            <a:schemeClr val="lt1"/>
+          </a:fontRef>
+        </p:style>
+        <p:txBody>
+          <a:bodyPr wrap="square" lIns="54864" rIns="54864" rtlCol="0" anchor="ctr"/>
+          <a:lstStyle/>
+          <a:p>
+            <a:pPr algn="ctr"/>
+            <a:r>
+              <a:rPr sz="1300" b="1" i="0">
                 <a:solidFill>
                   <a:srgbClr val="1F4788"/>
                 </a:solidFill>
                 <a:latin typeface="Calibri"/>
               </a:rPr>
-              <a:t>Understands Hinglish, misspellings and descriptions like “baal sukhane wala machine”, and remembers budget and filters across turns.</a:t>
+              <a:t>pytest</a:t>
+            </a:r>
+          </a:p>
+          <a:p>
+            <a:pPr algn="ctr"/>
+            <a:r>
+              <a:rPr sz="1050" b="0" i="0">
+                <a:solidFill>
+                  <a:srgbClr val="5F5F5F"/>
+                </a:solidFill>
+                <a:latin typeface="Calibri"/>
+              </a:rPr>
+              <a:t>71 automated tests</a:t>
+            </a:r>
+          </a:p>
+        </p:txBody>
+      </p:sp>
+      <p:sp>
+        <p:nvSpPr>
+          <p:cNvPr id="11" name="Tool 7"/>
+          <p:cNvSpPr/>
+          <p:nvPr/>
+        </p:nvSpPr>
+        <p:spPr>
+          <a:xfrm>
+            <a:off x="4663440" y="2331720"/>
+            <a:ext cx="1920240" cy="777240"/>
+          </a:xfrm>
+          <a:prstGeom prst="roundRect">
+            <a:avLst/>
+          </a:prstGeom>
+          <a:solidFill>
+            <a:srgbClr val="FFFFFF"/>
+          </a:solidFill>
+          <a:ln w="12700">
+            <a:solidFill>
+              <a:srgbClr val="1F4788"/>
+            </a:solidFill>
+          </a:ln>
+          <a:effectLst/>
+        </p:spPr>
+        <p:style>
+          <a:lnRef idx="1">
+            <a:schemeClr val="accent1"/>
+          </a:lnRef>
+          <a:fillRef idx="3">
+            <a:schemeClr val="accent1"/>
+          </a:fillRef>
+          <a:effectRef idx="2">
+            <a:schemeClr val="accent1"/>
+          </a:effectRef>
+          <a:fontRef idx="minor">
+            <a:schemeClr val="lt1"/>
+          </a:fontRef>
+        </p:style>
+        <p:txBody>
+          <a:bodyPr wrap="square" lIns="54864" rIns="54864" rtlCol="0" anchor="ctr"/>
+          <a:lstStyle/>
+          <a:p>
+            <a:pPr algn="ctr"/>
+            <a:r>
+              <a:rPr sz="1300" b="1" i="0">
+                <a:solidFill>
+                  <a:srgbClr val="1F4788"/>
+                </a:solidFill>
+                <a:latin typeface="Calibri"/>
+              </a:rPr>
+              <a:t>Code quality checks</a:t>
+            </a:r>
+          </a:p>
+          <a:p>
+            <a:pPr algn="ctr"/>
+            <a:r>
+              <a:rPr sz="1050" b="0" i="0">
+                <a:solidFill>
+                  <a:srgbClr val="5F5F5F"/>
+                </a:solidFill>
+                <a:latin typeface="Calibri"/>
+              </a:rPr>
+              <a:t>lint and security scans</a:t>
+            </a:r>
+          </a:p>
+        </p:txBody>
+      </p:sp>
+      <p:sp>
+        <p:nvSpPr>
+          <p:cNvPr id="12" name="Tool 8"/>
+          <p:cNvSpPr/>
+          <p:nvPr/>
+        </p:nvSpPr>
+        <p:spPr>
+          <a:xfrm>
+            <a:off x="6766559" y="2331720"/>
+            <a:ext cx="1920240" cy="777240"/>
+          </a:xfrm>
+          <a:prstGeom prst="roundRect">
+            <a:avLst/>
+          </a:prstGeom>
+          <a:solidFill>
+            <a:srgbClr val="FFFFFF"/>
+          </a:solidFill>
+          <a:ln w="12700">
+            <a:solidFill>
+              <a:srgbClr val="1F4788"/>
+            </a:solidFill>
+          </a:ln>
+          <a:effectLst/>
+        </p:spPr>
+        <p:style>
+          <a:lnRef idx="1">
+            <a:schemeClr val="accent1"/>
+          </a:lnRef>
+          <a:fillRef idx="3">
+            <a:schemeClr val="accent1"/>
+          </a:fillRef>
+          <a:effectRef idx="2">
+            <a:schemeClr val="accent1"/>
+          </a:effectRef>
+          <a:fontRef idx="minor">
+            <a:schemeClr val="lt1"/>
+          </a:fontRef>
+        </p:style>
+        <p:txBody>
+          <a:bodyPr wrap="square" lIns="54864" rIns="54864" rtlCol="0" anchor="ctr"/>
+          <a:lstStyle/>
+          <a:p>
+            <a:pPr algn="ctr"/>
+            <a:r>
+              <a:rPr sz="1300" b="1" i="0">
+                <a:solidFill>
+                  <a:srgbClr val="1F4788"/>
+                </a:solidFill>
+                <a:latin typeface="Calibri"/>
+              </a:rPr>
+              <a:t>evaluate.py</a:t>
+            </a:r>
+          </a:p>
+          <a:p>
+            <a:pPr algn="ctr"/>
+            <a:r>
+              <a:rPr sz="1050" b="0" i="0">
+                <a:solidFill>
+                  <a:srgbClr val="5F5F5F"/>
+                </a:solidFill>
+                <a:latin typeface="Calibri"/>
+              </a:rPr>
+              <a:t>organisers’ official scorer</a:t>
             </a:r>
           </a:p>
         </p:txBody>
@@ -4190,7 +4615,7 @@
         </p:nvSpPr>
         <p:spPr>
           <a:xfrm>
-            <a:off x="457200" y="3337560"/>
+            <a:off x="457200" y="3291840"/>
             <a:ext cx="8229600" cy="320040"/>
           </a:xfrm>
           <a:prstGeom prst="rect">
@@ -4211,7 +4636,7 @@
                 </a:solidFill>
                 <a:latin typeface="Calibri"/>
               </a:rPr>
-              <a:t>Competitive Advantage Summary</a:t>
+              <a:t>Engineering Practices</a:t>
             </a:r>
           </a:p>
         </p:txBody>
@@ -4224,7 +4649,7 @@
         </p:nvSpPr>
         <p:spPr>
           <a:xfrm>
-            <a:off x="640080" y="3703320"/>
+            <a:off x="640080" y="3657600"/>
             <a:ext cx="7863840" cy="1005840"/>
           </a:xfrm>
           <a:prstGeom prst="rect">
@@ -4252,7 +4677,7 @@
                 </a:solidFill>
                 <a:latin typeface="Calibri"/>
               </a:rPr>
-              <a:t>Why choose us: shoppers get answers they can check, with a product ID or policy section next to every fact, and retailers never promise what they don’t sell.</a:t>
+              <a:t>Core logic separate from the web layer; all settings in config.yaml; secrets only in .env.</a:t>
             </a:r>
           </a:p>
           <a:p>
@@ -4270,7 +4695,7 @@
                 </a:solidFill>
                 <a:latin typeface="Calibri"/>
               </a:rPr>
-              <a:t>Versus alternatives: general chatbots answer confidently even when wrong; ours is fast, nearly free, and honest by design.</a:t>
+              <a:t>Structured logging, timeouts on every network call, input validation and rate limiting on the API.</a:t>
             </a:r>
           </a:p>
         </p:txBody>
@@ -4283,8 +4708,8 @@
 </p:sld>
 </file>
 
-<file path=ppt/slides/slide16.xml><?xml version="1.0" encoding="utf-8"?>
-<p:sld xmlns:a="http://schemas.openxmlformats.org/drawingml/2006/main" xmlns:p="http://schemas.openxmlformats.org/presentationml/2006/main" xmlns:r="http://schemas.openxmlformats.org/officeDocument/2006/relationships">
+<file path=ppt/slides/slide6.xml><?xml version="1.0" encoding="utf-8"?>
+<p:sld xmlns:a="http://schemas.openxmlformats.org/drawingml/2006/main" xmlns:r="http://schemas.openxmlformats.org/officeDocument/2006/relationships" xmlns:p="http://schemas.openxmlformats.org/presentationml/2006/main">
   <p:cSld>
     <p:bg>
       <p:bgPr>
@@ -4300,7 +4725,14 @@
         <p:cNvGrpSpPr/>
         <p:nvPr/>
       </p:nvGrpSpPr>
-      <p:grpSpPr/>
+      <p:grpSpPr>
+        <a:xfrm>
+          <a:off x="0" y="0"/>
+          <a:ext cx="0" cy="0"/>
+          <a:chOff x="0" y="0"/>
+          <a:chExt cx="0" cy="0"/>
+        </a:xfrm>
+      </p:grpSpPr>
       <p:sp>
         <p:nvSpPr>
           <p:cNvPr id="2" name="Title bar"/>
@@ -4342,6 +4774,7 @@
           <a:lstStyle/>
           <a:p>
             <a:pPr algn="ctr"/>
+            <a:endParaRPr/>
           </a:p>
         </p:txBody>
       </p:sp>
@@ -4374,66 +4807,30 @@
                 </a:solidFill>
                 <a:latin typeface="Calibri"/>
               </a:rPr>
-              <a:t>Tools &amp; Technologies</a:t>
-            </a:r>
-          </a:p>
-        </p:txBody>
-      </p:sp>
-      <p:sp>
-        <p:nvSpPr>
-          <p:cNvPr id="4" name="TextBox 3"/>
-          <p:cNvSpPr txBox="1"/>
-          <p:nvPr/>
-        </p:nvSpPr>
-        <p:spPr>
-          <a:xfrm>
-            <a:off x="457200" y="1005840"/>
-            <a:ext cx="8229600" cy="320040"/>
-          </a:xfrm>
-          <a:prstGeom prst="rect">
-            <a:avLst/>
-          </a:prstGeom>
-          <a:noFill/>
-        </p:spPr>
-        <p:txBody>
-          <a:bodyPr wrap="square" anchor="ctr">
-            <a:spAutoFit/>
-          </a:bodyPr>
-          <a:lstStyle/>
-          <a:p>
-            <a:r>
-              <a:rPr sz="2000" b="1" i="0">
-                <a:solidFill>
-                  <a:srgbClr val="1F4788"/>
-                </a:solidFill>
-                <a:latin typeface="Calibri"/>
-              </a:rPr>
-              <a:t>Tech Stack</a:t>
-            </a:r>
-          </a:p>
-        </p:txBody>
-      </p:sp>
-      <p:sp>
-        <p:nvSpPr>
-          <p:cNvPr id="5" name="Tool 1"/>
+              <a:t>Unique Selling Proposition (USP)</a:t>
+            </a:r>
+          </a:p>
+        </p:txBody>
+      </p:sp>
+      <p:sp>
+        <p:nvSpPr>
+          <p:cNvPr id="4" name="Rectangle 3"/>
           <p:cNvSpPr/>
           <p:nvPr/>
         </p:nvSpPr>
         <p:spPr>
           <a:xfrm>
-            <a:off x="457200" y="1417320"/>
-            <a:ext cx="1920240" cy="777240"/>
-          </a:xfrm>
-          <a:prstGeom prst="roundRect">
+            <a:off x="731520" y="1005840"/>
+            <a:ext cx="2468880" cy="73152"/>
+          </a:xfrm>
+          <a:prstGeom prst="rect">
             <a:avLst/>
           </a:prstGeom>
           <a:solidFill>
-            <a:srgbClr val="FFFFFF"/>
+            <a:srgbClr val="00A4EF"/>
           </a:solidFill>
-          <a:ln w="12700">
-            <a:solidFill>
-              <a:srgbClr val="1F4788"/>
-            </a:solidFill>
+          <a:ln>
+            <a:noFill/>
           </a:ln>
           <a:effectLst/>
         </p:spPr>
@@ -4452,55 +4849,115 @@
           </a:fontRef>
         </p:style>
         <p:txBody>
-          <a:bodyPr rtlCol="0" anchor="ctr" wrap="square" lIns="54864" rIns="54864"/>
+          <a:bodyPr rtlCol="0" anchor="ctr"/>
           <a:lstStyle/>
           <a:p>
             <a:pPr algn="ctr"/>
-            <a:r>
-              <a:rPr sz="1300" b="1" i="0">
+            <a:endParaRPr/>
+          </a:p>
+        </p:txBody>
+      </p:sp>
+      <p:sp>
+        <p:nvSpPr>
+          <p:cNvPr id="5" name="TextBox 4"/>
+          <p:cNvSpPr txBox="1"/>
+          <p:nvPr/>
+        </p:nvSpPr>
+        <p:spPr>
+          <a:xfrm>
+            <a:off x="731520" y="1143000"/>
+            <a:ext cx="2468880" cy="320040"/>
+          </a:xfrm>
+          <a:prstGeom prst="rect">
+            <a:avLst/>
+          </a:prstGeom>
+          <a:noFill/>
+        </p:spPr>
+        <p:txBody>
+          <a:bodyPr wrap="square" anchor="t">
+            <a:spAutoFit/>
+          </a:bodyPr>
+          <a:lstStyle/>
+          <a:p>
+            <a:pPr algn="ctr"/>
+            <a:r>
+              <a:rPr sz="1400" b="1" i="0">
                 <a:solidFill>
                   <a:srgbClr val="1F4788"/>
                 </a:solidFill>
                 <a:latin typeface="Calibri"/>
               </a:rPr>
-              <a:t>Python 3.11 + uv</a:t>
-            </a:r>
-          </a:p>
+              <a:t>Key Differentiator 1</a:t>
+            </a:r>
+          </a:p>
+        </p:txBody>
+      </p:sp>
+      <p:sp>
+        <p:nvSpPr>
+          <p:cNvPr id="6" name="TextBox 5"/>
+          <p:cNvSpPr txBox="1"/>
+          <p:nvPr/>
+        </p:nvSpPr>
+        <p:spPr>
+          <a:xfrm>
+            <a:off x="731520" y="1508760"/>
+            <a:ext cx="2468880" cy="1645920"/>
+          </a:xfrm>
+          <a:prstGeom prst="rect">
+            <a:avLst/>
+          </a:prstGeom>
+          <a:noFill/>
+        </p:spPr>
+        <p:txBody>
+          <a:bodyPr wrap="square" anchor="t">
+            <a:spAutoFit/>
+          </a:bodyPr>
+          <a:lstStyle/>
           <a:p>
             <a:pPr algn="ctr"/>
             <a:r>
-              <a:rPr sz="1050" b="0" i="0">
-                <a:solidFill>
-                  <a:srgbClr val="5F5F5F"/>
-                </a:solidFill>
-                <a:latin typeface="Calibri"/>
-              </a:rPr>
-              <a:t>language, locked dependencies</a:t>
-            </a:r>
-          </a:p>
-        </p:txBody>
-      </p:sp>
-      <p:sp>
-        <p:nvSpPr>
-          <p:cNvPr id="6" name="Tool 2"/>
+              <a:rPr sz="1200" b="1" i="0">
+                <a:solidFill>
+                  <a:srgbClr val="1F4788"/>
+                </a:solidFill>
+                <a:latin typeface="Calibri"/>
+              </a:rPr>
+              <a:t>Prices cannot be invented</a:t>
+            </a:r>
+          </a:p>
+          <a:p>
+            <a:pPr algn="ctr"/>
+            <a:r>
+              <a:rPr sz="1200" b="0" i="0">
+                <a:solidFill>
+                  <a:srgbClr val="1F4788"/>
+                </a:solidFill>
+                <a:latin typeface="Calibri"/>
+              </a:rPr>
+              <a:t>Code copies every price from the catalogue and the guard re-checks every ₹ amount: 0 hallucinated prices.</a:t>
+            </a:r>
+          </a:p>
+        </p:txBody>
+      </p:sp>
+      <p:sp>
+        <p:nvSpPr>
+          <p:cNvPr id="7" name="Rectangle 6"/>
           <p:cNvSpPr/>
           <p:nvPr/>
         </p:nvSpPr>
         <p:spPr>
           <a:xfrm>
-            <a:off x="2560320" y="1417320"/>
-            <a:ext cx="1920240" cy="777240"/>
-          </a:xfrm>
-          <a:prstGeom prst="roundRect">
+            <a:off x="3566160" y="1005840"/>
+            <a:ext cx="2468880" cy="73152"/>
+          </a:xfrm>
+          <a:prstGeom prst="rect">
             <a:avLst/>
           </a:prstGeom>
           <a:solidFill>
-            <a:srgbClr val="FFFFFF"/>
+            <a:srgbClr val="00A4EF"/>
           </a:solidFill>
-          <a:ln w="12700">
-            <a:solidFill>
-              <a:srgbClr val="1F4788"/>
-            </a:solidFill>
+          <a:ln>
+            <a:noFill/>
           </a:ln>
           <a:effectLst/>
         </p:spPr>
@@ -4519,55 +4976,115 @@
           </a:fontRef>
         </p:style>
         <p:txBody>
-          <a:bodyPr rtlCol="0" anchor="ctr" wrap="square" lIns="54864" rIns="54864"/>
+          <a:bodyPr rtlCol="0" anchor="ctr"/>
           <a:lstStyle/>
           <a:p>
             <a:pPr algn="ctr"/>
-            <a:r>
-              <a:rPr sz="1300" b="1" i="0">
+            <a:endParaRPr/>
+          </a:p>
+        </p:txBody>
+      </p:sp>
+      <p:sp>
+        <p:nvSpPr>
+          <p:cNvPr id="8" name="TextBox 7"/>
+          <p:cNvSpPr txBox="1"/>
+          <p:nvPr/>
+        </p:nvSpPr>
+        <p:spPr>
+          <a:xfrm>
+            <a:off x="3566160" y="1143000"/>
+            <a:ext cx="2468880" cy="320040"/>
+          </a:xfrm>
+          <a:prstGeom prst="rect">
+            <a:avLst/>
+          </a:prstGeom>
+          <a:noFill/>
+        </p:spPr>
+        <p:txBody>
+          <a:bodyPr wrap="square" anchor="t">
+            <a:spAutoFit/>
+          </a:bodyPr>
+          <a:lstStyle/>
+          <a:p>
+            <a:pPr algn="ctr"/>
+            <a:r>
+              <a:rPr sz="1400" b="1" i="0">
                 <a:solidFill>
                   <a:srgbClr val="1F4788"/>
                 </a:solidFill>
                 <a:latin typeface="Calibri"/>
               </a:rPr>
-              <a:t>FastAPI + Pydantic</a:t>
-            </a:r>
-          </a:p>
+              <a:t>Key Differentiator 2</a:t>
+            </a:r>
+          </a:p>
+        </p:txBody>
+      </p:sp>
+      <p:sp>
+        <p:nvSpPr>
+          <p:cNvPr id="9" name="TextBox 8"/>
+          <p:cNvSpPr txBox="1"/>
+          <p:nvPr/>
+        </p:nvSpPr>
+        <p:spPr>
+          <a:xfrm>
+            <a:off x="3566160" y="1508760"/>
+            <a:ext cx="2468880" cy="1645920"/>
+          </a:xfrm>
+          <a:prstGeom prst="rect">
+            <a:avLst/>
+          </a:prstGeom>
+          <a:noFill/>
+        </p:spPr>
+        <p:txBody>
+          <a:bodyPr wrap="square" anchor="t">
+            <a:spAutoFit/>
+          </a:bodyPr>
+          <a:lstStyle/>
           <a:p>
             <a:pPr algn="ctr"/>
             <a:r>
-              <a:rPr sz="1050" b="0" i="0">
-                <a:solidFill>
-                  <a:srgbClr val="5F5F5F"/>
-                </a:solidFill>
-                <a:latin typeface="Calibri"/>
-              </a:rPr>
-              <a:t>API and validation</a:t>
-            </a:r>
-          </a:p>
-        </p:txBody>
-      </p:sp>
-      <p:sp>
-        <p:nvSpPr>
-          <p:cNvPr id="7" name="Tool 3"/>
+              <a:rPr sz="1200" b="1" i="0">
+                <a:solidFill>
+                  <a:srgbClr val="1F4788"/>
+                </a:solidFill>
+                <a:latin typeface="Calibri"/>
+              </a:rPr>
+              <a:t>Rules first, LLM only when needed</a:t>
+            </a:r>
+          </a:p>
+          <a:p>
+            <a:pPr algn="ctr"/>
+            <a:r>
+              <a:rPr sz="1200" b="0" i="0">
+                <a:solidFill>
+                  <a:srgbClr val="1F4788"/>
+                </a:solidFill>
+                <a:latin typeface="Calibri"/>
+              </a:rPr>
+              <a:t>~1 ms and $0 per query. The LLM only rewrites unclear messages and never states a fact.</a:t>
+            </a:r>
+          </a:p>
+        </p:txBody>
+      </p:sp>
+      <p:sp>
+        <p:nvSpPr>
+          <p:cNvPr id="10" name="Rectangle 9"/>
           <p:cNvSpPr/>
           <p:nvPr/>
         </p:nvSpPr>
         <p:spPr>
           <a:xfrm>
-            <a:off x="4663440" y="1417320"/>
-            <a:ext cx="1920240" cy="777240"/>
-          </a:xfrm>
-          <a:prstGeom prst="roundRect">
+            <a:off x="6400800" y="1005840"/>
+            <a:ext cx="2468880" cy="73152"/>
+          </a:xfrm>
+          <a:prstGeom prst="rect">
             <a:avLst/>
           </a:prstGeom>
           <a:solidFill>
-            <a:srgbClr val="FFFFFF"/>
+            <a:srgbClr val="00A4EF"/>
           </a:solidFill>
-          <a:ln w="12700">
-            <a:solidFill>
-              <a:srgbClr val="1F4788"/>
-            </a:solidFill>
+          <a:ln>
+            <a:noFill/>
           </a:ln>
           <a:effectLst/>
         </p:spPr>
@@ -4586,399 +5103,126 @@
           </a:fontRef>
         </p:style>
         <p:txBody>
-          <a:bodyPr rtlCol="0" anchor="ctr" wrap="square" lIns="54864" rIns="54864"/>
+          <a:bodyPr rtlCol="0" anchor="ctr"/>
           <a:lstStyle/>
           <a:p>
             <a:pPr algn="ctr"/>
-            <a:r>
-              <a:rPr sz="1300" b="1" i="0">
+            <a:endParaRPr/>
+          </a:p>
+        </p:txBody>
+      </p:sp>
+      <p:sp>
+        <p:nvSpPr>
+          <p:cNvPr id="11" name="TextBox 10"/>
+          <p:cNvSpPr txBox="1"/>
+          <p:nvPr/>
+        </p:nvSpPr>
+        <p:spPr>
+          <a:xfrm>
+            <a:off x="6400800" y="1143000"/>
+            <a:ext cx="2468880" cy="320040"/>
+          </a:xfrm>
+          <a:prstGeom prst="rect">
+            <a:avLst/>
+          </a:prstGeom>
+          <a:noFill/>
+        </p:spPr>
+        <p:txBody>
+          <a:bodyPr wrap="square" anchor="t">
+            <a:spAutoFit/>
+          </a:bodyPr>
+          <a:lstStyle/>
+          <a:p>
+            <a:pPr algn="ctr"/>
+            <a:r>
+              <a:rPr sz="1400" b="1" i="0">
                 <a:solidFill>
                   <a:srgbClr val="1F4788"/>
                 </a:solidFill>
                 <a:latin typeface="Calibri"/>
               </a:rPr>
-              <a:t>rapidfuzz</a:t>
-            </a:r>
-          </a:p>
+              <a:t>Key Differentiator 3</a:t>
+            </a:r>
+          </a:p>
+        </p:txBody>
+      </p:sp>
+      <p:sp>
+        <p:nvSpPr>
+          <p:cNvPr id="12" name="TextBox 11"/>
+          <p:cNvSpPr txBox="1"/>
+          <p:nvPr/>
+        </p:nvSpPr>
+        <p:spPr>
+          <a:xfrm>
+            <a:off x="6400800" y="1508760"/>
+            <a:ext cx="2468880" cy="1645920"/>
+          </a:xfrm>
+          <a:prstGeom prst="rect">
+            <a:avLst/>
+          </a:prstGeom>
+          <a:noFill/>
+        </p:spPr>
+        <p:txBody>
+          <a:bodyPr wrap="square" anchor="t">
+            <a:spAutoFit/>
+          </a:bodyPr>
+          <a:lstStyle/>
           <a:p>
             <a:pPr algn="ctr"/>
             <a:r>
-              <a:rPr sz="1050" b="0" i="0">
-                <a:solidFill>
-                  <a:srgbClr val="5F5F5F"/>
-                </a:solidFill>
-                <a:latin typeface="Calibri"/>
-              </a:rPr>
-              <a:t>fuzzy name matching</a:t>
-            </a:r>
-          </a:p>
-        </p:txBody>
-      </p:sp>
-      <p:sp>
-        <p:nvSpPr>
-          <p:cNvPr id="8" name="Tool 4"/>
-          <p:cNvSpPr/>
-          <p:nvPr/>
-        </p:nvSpPr>
-        <p:spPr>
-          <a:xfrm>
-            <a:off x="6766559" y="1417320"/>
-            <a:ext cx="1920240" cy="777240"/>
-          </a:xfrm>
-          <a:prstGeom prst="roundRect">
-            <a:avLst/>
-          </a:prstGeom>
-          <a:solidFill>
-            <a:srgbClr val="FFFFFF"/>
-          </a:solidFill>
-          <a:ln w="12700">
-            <a:solidFill>
-              <a:srgbClr val="1F4788"/>
-            </a:solidFill>
-          </a:ln>
-          <a:effectLst/>
-        </p:spPr>
-        <p:style>
-          <a:lnRef idx="1">
-            <a:schemeClr val="accent1"/>
-          </a:lnRef>
-          <a:fillRef idx="3">
-            <a:schemeClr val="accent1"/>
-          </a:fillRef>
-          <a:effectRef idx="2">
-            <a:schemeClr val="accent1"/>
-          </a:effectRef>
-          <a:fontRef idx="minor">
-            <a:schemeClr val="lt1"/>
-          </a:fontRef>
-        </p:style>
-        <p:txBody>
-          <a:bodyPr rtlCol="0" anchor="ctr" wrap="square" lIns="54864" rIns="54864"/>
-          <a:lstStyle/>
+              <a:rPr sz="1200" b="1" i="0">
+                <a:solidFill>
+                  <a:srgbClr val="1F4788"/>
+                </a:solidFill>
+                <a:latin typeface="Calibri"/>
+              </a:rPr>
+              <a:t>Built for Indian shoppers</a:t>
+            </a:r>
+          </a:p>
           <a:p>
             <a:pPr algn="ctr"/>
             <a:r>
-              <a:rPr sz="1300" b="1" i="0">
+              <a:rPr sz="1200" b="0" i="0">
                 <a:solidFill>
                   <a:srgbClr val="1F4788"/>
                 </a:solidFill>
                 <a:latin typeface="Calibri"/>
               </a:rPr>
-              <a:t>HTML / CSS / JS</a:t>
-            </a:r>
-          </a:p>
-          <a:p>
-            <a:pPr algn="ctr"/>
-            <a:r>
-              <a:rPr sz="1050" b="0" i="0">
-                <a:solidFill>
-                  <a:srgbClr val="5F5F5F"/>
-                </a:solidFill>
-                <a:latin typeface="Calibri"/>
-              </a:rPr>
-              <a:t>chat UI with Sources panel</a:t>
-            </a:r>
-          </a:p>
-        </p:txBody>
-      </p:sp>
-      <p:sp>
-        <p:nvSpPr>
-          <p:cNvPr id="9" name="Tool 5"/>
-          <p:cNvSpPr/>
-          <p:nvPr/>
-        </p:nvSpPr>
-        <p:spPr>
-          <a:xfrm>
-            <a:off x="457200" y="2331720"/>
-            <a:ext cx="1920240" cy="777240"/>
-          </a:xfrm>
-          <a:prstGeom prst="roundRect">
-            <a:avLst/>
-          </a:prstGeom>
-          <a:solidFill>
-            <a:srgbClr val="FFFFFF"/>
-          </a:solidFill>
-          <a:ln w="12700">
-            <a:solidFill>
-              <a:srgbClr val="1F4788"/>
-            </a:solidFill>
-          </a:ln>
-          <a:effectLst/>
-        </p:spPr>
-        <p:style>
-          <a:lnRef idx="1">
-            <a:schemeClr val="accent1"/>
-          </a:lnRef>
-          <a:fillRef idx="3">
-            <a:schemeClr val="accent1"/>
-          </a:fillRef>
-          <a:effectRef idx="2">
-            <a:schemeClr val="accent1"/>
-          </a:effectRef>
-          <a:fontRef idx="minor">
-            <a:schemeClr val="lt1"/>
-          </a:fontRef>
-        </p:style>
-        <p:txBody>
-          <a:bodyPr rtlCol="0" anchor="ctr" wrap="square" lIns="54864" rIns="54864"/>
-          <a:lstStyle/>
-          <a:p>
-            <a:pPr algn="ctr"/>
-            <a:r>
-              <a:rPr sz="1300" b="1" i="0">
+              <a:t>Understands Hinglish, misspellings and descriptions like “baal sukhane wala machine”, and remembers budget and filters across turns.</a:t>
+            </a:r>
+          </a:p>
+        </p:txBody>
+      </p:sp>
+      <p:sp>
+        <p:nvSpPr>
+          <p:cNvPr id="13" name="TextBox 12"/>
+          <p:cNvSpPr txBox="1"/>
+          <p:nvPr/>
+        </p:nvSpPr>
+        <p:spPr>
+          <a:xfrm>
+            <a:off x="457200" y="3337560"/>
+            <a:ext cx="8229600" cy="320040"/>
+          </a:xfrm>
+          <a:prstGeom prst="rect">
+            <a:avLst/>
+          </a:prstGeom>
+          <a:noFill/>
+        </p:spPr>
+        <p:txBody>
+          <a:bodyPr wrap="square" anchor="ctr">
+            <a:spAutoFit/>
+          </a:bodyPr>
+          <a:lstStyle/>
+          <a:p>
+            <a:r>
+              <a:rPr sz="1600" b="1" i="0">
                 <a:solidFill>
                   <a:srgbClr val="1F4788"/>
                 </a:solidFill>
                 <a:latin typeface="Calibri"/>
               </a:rPr>
-              <a:t>Groq API</a:t>
-            </a:r>
-          </a:p>
-          <a:p>
-            <a:pPr algn="ctr"/>
-            <a:r>
-              <a:rPr sz="1050" b="0" i="0">
-                <a:solidFill>
-                  <a:srgbClr val="5F5F5F"/>
-                </a:solidFill>
-                <a:latin typeface="Calibri"/>
-              </a:rPr>
-              <a:t>gpt-oss-20b LLM fallback</a:t>
-            </a:r>
-          </a:p>
-        </p:txBody>
-      </p:sp>
-      <p:sp>
-        <p:nvSpPr>
-          <p:cNvPr id="10" name="Tool 6"/>
-          <p:cNvSpPr/>
-          <p:nvPr/>
-        </p:nvSpPr>
-        <p:spPr>
-          <a:xfrm>
-            <a:off x="2560320" y="2331720"/>
-            <a:ext cx="1920240" cy="777240"/>
-          </a:xfrm>
-          <a:prstGeom prst="roundRect">
-            <a:avLst/>
-          </a:prstGeom>
-          <a:solidFill>
-            <a:srgbClr val="FFFFFF"/>
-          </a:solidFill>
-          <a:ln w="12700">
-            <a:solidFill>
-              <a:srgbClr val="1F4788"/>
-            </a:solidFill>
-          </a:ln>
-          <a:effectLst/>
-        </p:spPr>
-        <p:style>
-          <a:lnRef idx="1">
-            <a:schemeClr val="accent1"/>
-          </a:lnRef>
-          <a:fillRef idx="3">
-            <a:schemeClr val="accent1"/>
-          </a:fillRef>
-          <a:effectRef idx="2">
-            <a:schemeClr val="accent1"/>
-          </a:effectRef>
-          <a:fontRef idx="minor">
-            <a:schemeClr val="lt1"/>
-          </a:fontRef>
-        </p:style>
-        <p:txBody>
-          <a:bodyPr rtlCol="0" anchor="ctr" wrap="square" lIns="54864" rIns="54864"/>
-          <a:lstStyle/>
-          <a:p>
-            <a:pPr algn="ctr"/>
-            <a:r>
-              <a:rPr sz="1300" b="1" i="0">
-                <a:solidFill>
-                  <a:srgbClr val="1F4788"/>
-                </a:solidFill>
-                <a:latin typeface="Calibri"/>
-              </a:rPr>
-              <a:t>pytest</a:t>
-            </a:r>
-          </a:p>
-          <a:p>
-            <a:pPr algn="ctr"/>
-            <a:r>
-              <a:rPr sz="1050" b="0" i="0">
-                <a:solidFill>
-                  <a:srgbClr val="5F5F5F"/>
-                </a:solidFill>
-                <a:latin typeface="Calibri"/>
-              </a:rPr>
-              <a:t>71 automated tests</a:t>
-            </a:r>
-          </a:p>
-        </p:txBody>
-      </p:sp>
-      <p:sp>
-        <p:nvSpPr>
-          <p:cNvPr id="11" name="Tool 7"/>
-          <p:cNvSpPr/>
-          <p:nvPr/>
-        </p:nvSpPr>
-        <p:spPr>
-          <a:xfrm>
-            <a:off x="4663440" y="2331720"/>
-            <a:ext cx="1920240" cy="777240"/>
-          </a:xfrm>
-          <a:prstGeom prst="roundRect">
-            <a:avLst/>
-          </a:prstGeom>
-          <a:solidFill>
-            <a:srgbClr val="FFFFFF"/>
-          </a:solidFill>
-          <a:ln w="12700">
-            <a:solidFill>
-              <a:srgbClr val="1F4788"/>
-            </a:solidFill>
-          </a:ln>
-          <a:effectLst/>
-        </p:spPr>
-        <p:style>
-          <a:lnRef idx="1">
-            <a:schemeClr val="accent1"/>
-          </a:lnRef>
-          <a:fillRef idx="3">
-            <a:schemeClr val="accent1"/>
-          </a:fillRef>
-          <a:effectRef idx="2">
-            <a:schemeClr val="accent1"/>
-          </a:effectRef>
-          <a:fontRef idx="minor">
-            <a:schemeClr val="lt1"/>
-          </a:fontRef>
-        </p:style>
-        <p:txBody>
-          <a:bodyPr rtlCol="0" anchor="ctr" wrap="square" lIns="54864" rIns="54864"/>
-          <a:lstStyle/>
-          <a:p>
-            <a:pPr algn="ctr"/>
-            <a:r>
-              <a:rPr sz="1300" b="1" i="0">
-                <a:solidFill>
-                  <a:srgbClr val="1F4788"/>
-                </a:solidFill>
-                <a:latin typeface="Calibri"/>
-              </a:rPr>
-              <a:t>Code quality checks</a:t>
-            </a:r>
-          </a:p>
-          <a:p>
-            <a:pPr algn="ctr"/>
-            <a:r>
-              <a:rPr sz="1050" b="0" i="0">
-                <a:solidFill>
-                  <a:srgbClr val="5F5F5F"/>
-                </a:solidFill>
-                <a:latin typeface="Calibri"/>
-              </a:rPr>
-              <a:t>lint and security scans</a:t>
-            </a:r>
-          </a:p>
-        </p:txBody>
-      </p:sp>
-      <p:sp>
-        <p:nvSpPr>
-          <p:cNvPr id="12" name="Tool 8"/>
-          <p:cNvSpPr/>
-          <p:nvPr/>
-        </p:nvSpPr>
-        <p:spPr>
-          <a:xfrm>
-            <a:off x="6766559" y="2331720"/>
-            <a:ext cx="1920240" cy="777240"/>
-          </a:xfrm>
-          <a:prstGeom prst="roundRect">
-            <a:avLst/>
-          </a:prstGeom>
-          <a:solidFill>
-            <a:srgbClr val="FFFFFF"/>
-          </a:solidFill>
-          <a:ln w="12700">
-            <a:solidFill>
-              <a:srgbClr val="1F4788"/>
-            </a:solidFill>
-          </a:ln>
-          <a:effectLst/>
-        </p:spPr>
-        <p:style>
-          <a:lnRef idx="1">
-            <a:schemeClr val="accent1"/>
-          </a:lnRef>
-          <a:fillRef idx="3">
-            <a:schemeClr val="accent1"/>
-          </a:fillRef>
-          <a:effectRef idx="2">
-            <a:schemeClr val="accent1"/>
-          </a:effectRef>
-          <a:fontRef idx="minor">
-            <a:schemeClr val="lt1"/>
-          </a:fontRef>
-        </p:style>
-        <p:txBody>
-          <a:bodyPr rtlCol="0" anchor="ctr" wrap="square" lIns="54864" rIns="54864"/>
-          <a:lstStyle/>
-          <a:p>
-            <a:pPr algn="ctr"/>
-            <a:r>
-              <a:rPr sz="1300" b="1" i="0">
-                <a:solidFill>
-                  <a:srgbClr val="1F4788"/>
-                </a:solidFill>
-                <a:latin typeface="Calibri"/>
-              </a:rPr>
-              <a:t>evaluate.py</a:t>
-            </a:r>
-          </a:p>
-          <a:p>
-            <a:pPr algn="ctr"/>
-            <a:r>
-              <a:rPr sz="1050" b="0" i="0">
-                <a:solidFill>
-                  <a:srgbClr val="5F5F5F"/>
-                </a:solidFill>
-                <a:latin typeface="Calibri"/>
-              </a:rPr>
-              <a:t>organisers’ official scorer</a:t>
-            </a:r>
-          </a:p>
-        </p:txBody>
-      </p:sp>
-      <p:sp>
-        <p:nvSpPr>
-          <p:cNvPr id="13" name="TextBox 12"/>
-          <p:cNvSpPr txBox="1"/>
-          <p:nvPr/>
-        </p:nvSpPr>
-        <p:spPr>
-          <a:xfrm>
-            <a:off x="457200" y="3291840"/>
-            <a:ext cx="8229600" cy="320040"/>
-          </a:xfrm>
-          <a:prstGeom prst="rect">
-            <a:avLst/>
-          </a:prstGeom>
-          <a:noFill/>
-        </p:spPr>
-        <p:txBody>
-          <a:bodyPr wrap="square" anchor="ctr">
-            <a:spAutoFit/>
-          </a:bodyPr>
-          <a:lstStyle/>
-          <a:p>
-            <a:r>
-              <a:rPr sz="1600" b="1" i="0">
-                <a:solidFill>
-                  <a:srgbClr val="1F4788"/>
-                </a:solidFill>
-                <a:latin typeface="Calibri"/>
-              </a:rPr>
-              <a:t>Engineering Practices</a:t>
+              <a:t>Competitive Advantage Summary</a:t>
             </a:r>
           </a:p>
         </p:txBody>
@@ -4991,7 +5235,7 @@
         </p:nvSpPr>
         <p:spPr>
           <a:xfrm>
-            <a:off x="640080" y="3657600"/>
+            <a:off x="640080" y="3703320"/>
             <a:ext cx="7863840" cy="1005840"/>
           </a:xfrm>
           <a:prstGeom prst="rect">
@@ -5019,7 +5263,7 @@
                 </a:solidFill>
                 <a:latin typeface="Calibri"/>
               </a:rPr>
-              <a:t>Core logic separate from the web layer; all settings in config.yaml; secrets only in .env.</a:t>
+              <a:t>Why choose us: shoppers get answers they can check, with a product ID or policy section next to every fact, and retailers never promise what they don’t sell.</a:t>
             </a:r>
           </a:p>
           <a:p>
@@ -5037,7 +5281,7 @@
                 </a:solidFill>
                 <a:latin typeface="Calibri"/>
               </a:rPr>
-              <a:t>Structured logging, timeouts on every network call, input validation and rate limiting on the API.</a:t>
+              <a:t>Versus alternatives: general chatbots answer confidently even when wrong; ours is fast, nearly free, and honest by design.</a:t>
             </a:r>
           </a:p>
         </p:txBody>
@@ -5050,8 +5294,8 @@
 </p:sld>
 </file>
 
-<file path=ppt/slides/slide17.xml><?xml version="1.0" encoding="utf-8"?>
-<p:sld xmlns:a="http://schemas.openxmlformats.org/drawingml/2006/main" xmlns:p="http://schemas.openxmlformats.org/presentationml/2006/main" xmlns:r="http://schemas.openxmlformats.org/officeDocument/2006/relationships">
+<file path=ppt/slides/slide7.xml><?xml version="1.0" encoding="utf-8"?>
+<p:sld xmlns:a="http://schemas.openxmlformats.org/drawingml/2006/main" xmlns:r="http://schemas.openxmlformats.org/officeDocument/2006/relationships" xmlns:p="http://schemas.openxmlformats.org/presentationml/2006/main">
   <p:cSld>
     <p:bg>
       <p:bgPr>
@@ -5067,7 +5311,14 @@
         <p:cNvGrpSpPr/>
         <p:nvPr/>
       </p:nvGrpSpPr>
-      <p:grpSpPr/>
+      <p:grpSpPr>
+        <a:xfrm>
+          <a:off x="0" y="0"/>
+          <a:ext cx="0" cy="0"/>
+          <a:chOff x="0" y="0"/>
+          <a:chExt cx="0" cy="0"/>
+        </a:xfrm>
+      </p:grpSpPr>
       <p:sp>
         <p:nvSpPr>
           <p:cNvPr id="2" name="Title bar"/>
@@ -5109,6 +5360,7 @@
           <a:lstStyle/>
           <a:p>
             <a:pPr algn="ctr"/>
+            <a:endParaRPr/>
           </a:p>
         </p:txBody>
       </p:sp>
@@ -5221,6 +5473,7 @@
           <a:lstStyle/>
           <a:p>
             <a:pPr algn="ctr"/>
+            <a:endParaRPr/>
           </a:p>
         </p:txBody>
       </p:sp>
@@ -5271,7 +5524,7 @@
           <a:lstStyle/>
           <a:p>
             <a:r>
-              <a:rPr sz="1400" b="1" i="0">
+              <a:rPr sz="1400" b="1" i="0" dirty="0">
                 <a:solidFill>
                   <a:srgbClr val="1F4788"/>
                 </a:solidFill>
@@ -5311,7 +5564,7 @@
                 </a:solidFill>
                 <a:latin typeface="Calibri"/>
               </a:rPr>
-              <a:t>ANSWER</a:t>
+              <a:t>ANSWER · English</a:t>
             </a:r>
           </a:p>
         </p:txBody>
@@ -5345,7 +5598,7 @@
                 </a:solidFill>
                 <a:latin typeface="Calibri"/>
               </a:rPr>
-              <a:t>Chargit QuillBolt red earphones kitne ke</a:t>
+              <a:t>Price of Chargit QuillBolt red earphones?</a:t>
             </a:r>
           </a:p>
         </p:txBody>
@@ -5379,7 +5632,7 @@
                 </a:solidFill>
                 <a:latin typeface="Calibri"/>
               </a:rPr>
-              <a:t>CLARIFY</a:t>
+              <a:t>CLARIFY · Hinglish</a:t>
             </a:r>
           </a:p>
         </p:txBody>
@@ -5447,7 +5700,7 @@
                 </a:solidFill>
                 <a:latin typeface="Calibri"/>
               </a:rPr>
-              <a:t>POLICY</a:t>
+              <a:t>POLICY · English</a:t>
             </a:r>
           </a:p>
         </p:txBody>
@@ -5481,7 +5734,7 @@
                 </a:solidFill>
                 <a:latin typeface="Calibri"/>
               </a:rPr>
-              <a:t>earbuds ki seal khol di, return ho jayega?</a:t>
+              <a:t>Can I return earbuds after opening the seal?</a:t>
             </a:r>
           </a:p>
         </p:txBody>
@@ -5515,7 +5768,7 @@
                 </a:solidFill>
                 <a:latin typeface="Calibri"/>
               </a:rPr>
-              <a:t>REFUSE</a:t>
+              <a:t>REFUSE · Hinglish</a:t>
             </a:r>
           </a:p>
         </p:txBody>
@@ -5549,7 +5802,7 @@
                 </a:solidFill>
                 <a:latin typeface="Calibri"/>
               </a:rPr>
-              <a:t>redmi note 13 price</a:t>
+              <a:t>iphone 15 milega?</a:t>
             </a:r>
           </a:p>
         </p:txBody>
@@ -5583,7 +5836,7 @@
                 </a:solidFill>
                 <a:latin typeface="Calibri"/>
               </a:rPr>
-              <a:t>MULTI-TURN</a:t>
+              <a:t>MULTI-TURN · Hinglish</a:t>
             </a:r>
           </a:p>
         </p:txBody>
@@ -5651,7 +5904,7 @@
                 </a:solidFill>
                 <a:latin typeface="Calibri"/>
               </a:rPr>
-              <a:t>LLM</a:t>
+              <a:t>LLM · English</a:t>
             </a:r>
           </a:p>
         </p:txBody>
@@ -5685,7 +5938,7 @@
                 </a:solidFill>
                 <a:latin typeface="Calibri"/>
               </a:rPr>
-              <a:t>bread garam karne wali machine kitne ki</a:t>
+              <a:t>How much is a machine that toasts bread?</a:t>
             </a:r>
           </a:p>
         </p:txBody>
@@ -5759,8 +6012,8 @@
 </p:sld>
 </file>
 
-<file path=ppt/slides/slide18.xml><?xml version="1.0" encoding="utf-8"?>
-<p:sld xmlns:a="http://schemas.openxmlformats.org/drawingml/2006/main" xmlns:p="http://schemas.openxmlformats.org/presentationml/2006/main" xmlns:r="http://schemas.openxmlformats.org/officeDocument/2006/relationships">
+<file path=ppt/slides/slide8.xml><?xml version="1.0" encoding="utf-8"?>
+<p:sld xmlns:a="http://schemas.openxmlformats.org/drawingml/2006/main" xmlns:r="http://schemas.openxmlformats.org/officeDocument/2006/relationships" xmlns:p="http://schemas.openxmlformats.org/presentationml/2006/main">
   <p:cSld>
     <p:bg>
       <p:bgPr>
@@ -5776,7 +6029,14 @@
         <p:cNvGrpSpPr/>
         <p:nvPr/>
       </p:nvGrpSpPr>
-      <p:grpSpPr/>
+      <p:grpSpPr>
+        <a:xfrm>
+          <a:off x="0" y="0"/>
+          <a:ext cx="0" cy="0"/>
+          <a:chOff x="0" y="0"/>
+          <a:chExt cx="0" cy="0"/>
+        </a:xfrm>
+      </p:grpSpPr>
       <p:sp>
         <p:nvSpPr>
           <p:cNvPr id="2" name="Title bar"/>
@@ -5818,6 +6078,7 @@
           <a:lstStyle/>
           <a:p>
             <a:pPr algn="ctr"/>
+            <a:endParaRPr/>
           </a:p>
         </p:txBody>
       </p:sp>
@@ -5850,20 +6111,470 @@
                 </a:solidFill>
                 <a:latin typeface="Calibri"/>
               </a:rPr>
-              <a:t>Limitations &amp; Next Steps</a:t>
-            </a:r>
-          </a:p>
-        </p:txBody>
-      </p:sp>
-      <p:sp>
-        <p:nvSpPr>
-          <p:cNvPr id="4" name="TextBox 3"/>
-          <p:cNvSpPr txBox="1"/>
-          <p:nvPr/>
-        </p:nvSpPr>
-        <p:spPr>
-          <a:xfrm>
-            <a:off x="457200" y="1005840"/>
+              <a:t>Results &amp; Evaluation</a:t>
+            </a:r>
+          </a:p>
+        </p:txBody>
+      </p:sp>
+      <p:sp>
+        <p:nvSpPr>
+          <p:cNvPr id="4" name="Rectangle 3"/>
+          <p:cNvSpPr/>
+          <p:nvPr/>
+        </p:nvSpPr>
+        <p:spPr>
+          <a:xfrm>
+            <a:off x="731520" y="1005840"/>
+            <a:ext cx="2468880" cy="73152"/>
+          </a:xfrm>
+          <a:prstGeom prst="rect">
+            <a:avLst/>
+          </a:prstGeom>
+          <a:solidFill>
+            <a:srgbClr val="00A4EF"/>
+          </a:solidFill>
+          <a:ln>
+            <a:noFill/>
+          </a:ln>
+          <a:effectLst/>
+        </p:spPr>
+        <p:style>
+          <a:lnRef idx="1">
+            <a:schemeClr val="accent1"/>
+          </a:lnRef>
+          <a:fillRef idx="3">
+            <a:schemeClr val="accent1"/>
+          </a:fillRef>
+          <a:effectRef idx="2">
+            <a:schemeClr val="accent1"/>
+          </a:effectRef>
+          <a:fontRef idx="minor">
+            <a:schemeClr val="lt1"/>
+          </a:fontRef>
+        </p:style>
+        <p:txBody>
+          <a:bodyPr rtlCol="0" anchor="ctr"/>
+          <a:lstStyle/>
+          <a:p>
+            <a:pPr algn="ctr"/>
+            <a:endParaRPr/>
+          </a:p>
+        </p:txBody>
+      </p:sp>
+      <p:sp>
+        <p:nvSpPr>
+          <p:cNvPr id="5" name="TextBox 4"/>
+          <p:cNvSpPr txBox="1"/>
+          <p:nvPr/>
+        </p:nvSpPr>
+        <p:spPr>
+          <a:xfrm>
+            <a:off x="731520" y="1115568"/>
+            <a:ext cx="2468880" cy="594360"/>
+          </a:xfrm>
+          <a:prstGeom prst="rect">
+            <a:avLst/>
+          </a:prstGeom>
+          <a:noFill/>
+        </p:spPr>
+        <p:txBody>
+          <a:bodyPr wrap="square" anchor="ctr">
+            <a:spAutoFit/>
+          </a:bodyPr>
+          <a:lstStyle/>
+          <a:p>
+            <a:pPr algn="ctr"/>
+            <a:r>
+              <a:rPr sz="3600" b="1" i="0">
+                <a:solidFill>
+                  <a:srgbClr val="1F4788"/>
+                </a:solidFill>
+                <a:latin typeface="Calibri"/>
+              </a:rPr>
+              <a:t>1.000</a:t>
+            </a:r>
+          </a:p>
+        </p:txBody>
+      </p:sp>
+      <p:sp>
+        <p:nvSpPr>
+          <p:cNvPr id="6" name="TextBox 5"/>
+          <p:cNvSpPr txBox="1"/>
+          <p:nvPr/>
+        </p:nvSpPr>
+        <p:spPr>
+          <a:xfrm>
+            <a:off x="731520" y="1737360"/>
+            <a:ext cx="2468880" cy="320040"/>
+          </a:xfrm>
+          <a:prstGeom prst="rect">
+            <a:avLst/>
+          </a:prstGeom>
+          <a:noFill/>
+        </p:spPr>
+        <p:txBody>
+          <a:bodyPr wrap="square" anchor="t">
+            <a:spAutoFit/>
+          </a:bodyPr>
+          <a:lstStyle/>
+          <a:p>
+            <a:pPr algn="ctr"/>
+            <a:r>
+              <a:rPr sz="1400" b="1" i="0">
+                <a:solidFill>
+                  <a:srgbClr val="1F4788"/>
+                </a:solidFill>
+                <a:latin typeface="Calibri"/>
+              </a:rPr>
+              <a:t>Dev score (baseline 0.73)</a:t>
+            </a:r>
+          </a:p>
+        </p:txBody>
+      </p:sp>
+      <p:sp>
+        <p:nvSpPr>
+          <p:cNvPr id="7" name="TextBox 6"/>
+          <p:cNvSpPr txBox="1"/>
+          <p:nvPr/>
+        </p:nvSpPr>
+        <p:spPr>
+          <a:xfrm>
+            <a:off x="731520" y="2103120"/>
+            <a:ext cx="2468880" cy="1005840"/>
+          </a:xfrm>
+          <a:prstGeom prst="rect">
+            <a:avLst/>
+          </a:prstGeom>
+          <a:noFill/>
+        </p:spPr>
+        <p:txBody>
+          <a:bodyPr wrap="square" anchor="t">
+            <a:spAutoFit/>
+          </a:bodyPr>
+          <a:lstStyle/>
+          <a:p>
+            <a:pPr algn="ctr"/>
+            <a:r>
+              <a:rPr sz="1200" b="0" i="0">
+                <a:solidFill>
+                  <a:srgbClr val="2D2D2D"/>
+                </a:solidFill>
+                <a:latin typeface="Calibri"/>
+              </a:rPr>
+              <a:t>Official evaluate.py on 40 dev questions: action, grounding and helpfulness all perfect.</a:t>
+            </a:r>
+          </a:p>
+        </p:txBody>
+      </p:sp>
+      <p:sp>
+        <p:nvSpPr>
+          <p:cNvPr id="8" name="Rectangle 7"/>
+          <p:cNvSpPr/>
+          <p:nvPr/>
+        </p:nvSpPr>
+        <p:spPr>
+          <a:xfrm>
+            <a:off x="3566160" y="1005840"/>
+            <a:ext cx="2468880" cy="73152"/>
+          </a:xfrm>
+          <a:prstGeom prst="rect">
+            <a:avLst/>
+          </a:prstGeom>
+          <a:solidFill>
+            <a:srgbClr val="00A4EF"/>
+          </a:solidFill>
+          <a:ln>
+            <a:noFill/>
+          </a:ln>
+          <a:effectLst/>
+        </p:spPr>
+        <p:style>
+          <a:lnRef idx="1">
+            <a:schemeClr val="accent1"/>
+          </a:lnRef>
+          <a:fillRef idx="3">
+            <a:schemeClr val="accent1"/>
+          </a:fillRef>
+          <a:effectRef idx="2">
+            <a:schemeClr val="accent1"/>
+          </a:effectRef>
+          <a:fontRef idx="minor">
+            <a:schemeClr val="lt1"/>
+          </a:fontRef>
+        </p:style>
+        <p:txBody>
+          <a:bodyPr rtlCol="0" anchor="ctr"/>
+          <a:lstStyle/>
+          <a:p>
+            <a:pPr algn="ctr"/>
+            <a:endParaRPr/>
+          </a:p>
+        </p:txBody>
+      </p:sp>
+      <p:sp>
+        <p:nvSpPr>
+          <p:cNvPr id="9" name="TextBox 8"/>
+          <p:cNvSpPr txBox="1"/>
+          <p:nvPr/>
+        </p:nvSpPr>
+        <p:spPr>
+          <a:xfrm>
+            <a:off x="3566160" y="1115568"/>
+            <a:ext cx="2468880" cy="594360"/>
+          </a:xfrm>
+          <a:prstGeom prst="rect">
+            <a:avLst/>
+          </a:prstGeom>
+          <a:noFill/>
+        </p:spPr>
+        <p:txBody>
+          <a:bodyPr wrap="square" anchor="ctr">
+            <a:spAutoFit/>
+          </a:bodyPr>
+          <a:lstStyle/>
+          <a:p>
+            <a:pPr algn="ctr"/>
+            <a:r>
+              <a:rPr sz="3600" b="1" i="0">
+                <a:solidFill>
+                  <a:srgbClr val="1F4788"/>
+                </a:solidFill>
+                <a:latin typeface="Calibri"/>
+              </a:rPr>
+              <a:t>0</a:t>
+            </a:r>
+          </a:p>
+        </p:txBody>
+      </p:sp>
+      <p:sp>
+        <p:nvSpPr>
+          <p:cNvPr id="10" name="TextBox 9"/>
+          <p:cNvSpPr txBox="1"/>
+          <p:nvPr/>
+        </p:nvSpPr>
+        <p:spPr>
+          <a:xfrm>
+            <a:off x="3566160" y="1737360"/>
+            <a:ext cx="2468880" cy="320040"/>
+          </a:xfrm>
+          <a:prstGeom prst="rect">
+            <a:avLst/>
+          </a:prstGeom>
+          <a:noFill/>
+        </p:spPr>
+        <p:txBody>
+          <a:bodyPr wrap="square" anchor="t">
+            <a:spAutoFit/>
+          </a:bodyPr>
+          <a:lstStyle/>
+          <a:p>
+            <a:pPr algn="ctr"/>
+            <a:r>
+              <a:rPr sz="1400" b="1" i="0">
+                <a:solidFill>
+                  <a:srgbClr val="1F4788"/>
+                </a:solidFill>
+                <a:latin typeface="Calibri"/>
+              </a:rPr>
+              <a:t>Hallucinated prices</a:t>
+            </a:r>
+          </a:p>
+        </p:txBody>
+      </p:sp>
+      <p:sp>
+        <p:nvSpPr>
+          <p:cNvPr id="11" name="TextBox 10"/>
+          <p:cNvSpPr txBox="1"/>
+          <p:nvPr/>
+        </p:nvSpPr>
+        <p:spPr>
+          <a:xfrm>
+            <a:off x="3566160" y="2103120"/>
+            <a:ext cx="2468880" cy="1005840"/>
+          </a:xfrm>
+          <a:prstGeom prst="rect">
+            <a:avLst/>
+          </a:prstGeom>
+          <a:noFill/>
+        </p:spPr>
+        <p:txBody>
+          <a:bodyPr wrap="square" anchor="t">
+            <a:spAutoFit/>
+          </a:bodyPr>
+          <a:lstStyle/>
+          <a:p>
+            <a:pPr algn="ctr"/>
+            <a:r>
+              <a:rPr sz="1200" b="0" i="0">
+                <a:solidFill>
+                  <a:srgbClr val="2D2D2D"/>
+                </a:solidFill>
+                <a:latin typeface="Calibri"/>
+              </a:rPr>
+              <a:t>Every ₹ amount is copied from the catalogue and re-checked by the price guard.</a:t>
+            </a:r>
+          </a:p>
+        </p:txBody>
+      </p:sp>
+      <p:sp>
+        <p:nvSpPr>
+          <p:cNvPr id="12" name="Rectangle 11"/>
+          <p:cNvSpPr/>
+          <p:nvPr/>
+        </p:nvSpPr>
+        <p:spPr>
+          <a:xfrm>
+            <a:off x="6400800" y="1005840"/>
+            <a:ext cx="2468880" cy="73152"/>
+          </a:xfrm>
+          <a:prstGeom prst="rect">
+            <a:avLst/>
+          </a:prstGeom>
+          <a:solidFill>
+            <a:srgbClr val="00A4EF"/>
+          </a:solidFill>
+          <a:ln>
+            <a:noFill/>
+          </a:ln>
+          <a:effectLst/>
+        </p:spPr>
+        <p:style>
+          <a:lnRef idx="1">
+            <a:schemeClr val="accent1"/>
+          </a:lnRef>
+          <a:fillRef idx="3">
+            <a:schemeClr val="accent1"/>
+          </a:fillRef>
+          <a:effectRef idx="2">
+            <a:schemeClr val="accent1"/>
+          </a:effectRef>
+          <a:fontRef idx="minor">
+            <a:schemeClr val="lt1"/>
+          </a:fontRef>
+        </p:style>
+        <p:txBody>
+          <a:bodyPr rtlCol="0" anchor="ctr"/>
+          <a:lstStyle/>
+          <a:p>
+            <a:pPr algn="ctr"/>
+            <a:endParaRPr/>
+          </a:p>
+        </p:txBody>
+      </p:sp>
+      <p:sp>
+        <p:nvSpPr>
+          <p:cNvPr id="13" name="TextBox 12"/>
+          <p:cNvSpPr txBox="1"/>
+          <p:nvPr/>
+        </p:nvSpPr>
+        <p:spPr>
+          <a:xfrm>
+            <a:off x="6400800" y="1115568"/>
+            <a:ext cx="2468880" cy="594360"/>
+          </a:xfrm>
+          <a:prstGeom prst="rect">
+            <a:avLst/>
+          </a:prstGeom>
+          <a:noFill/>
+        </p:spPr>
+        <p:txBody>
+          <a:bodyPr wrap="square" anchor="ctr">
+            <a:spAutoFit/>
+          </a:bodyPr>
+          <a:lstStyle/>
+          <a:p>
+            <a:pPr algn="ctr"/>
+            <a:r>
+              <a:rPr sz="3600" b="1" i="0">
+                <a:solidFill>
+                  <a:srgbClr val="1F4788"/>
+                </a:solidFill>
+                <a:latin typeface="Calibri"/>
+              </a:rPr>
+              <a:t>~1 ms</a:t>
+            </a:r>
+          </a:p>
+        </p:txBody>
+      </p:sp>
+      <p:sp>
+        <p:nvSpPr>
+          <p:cNvPr id="14" name="TextBox 13"/>
+          <p:cNvSpPr txBox="1"/>
+          <p:nvPr/>
+        </p:nvSpPr>
+        <p:spPr>
+          <a:xfrm>
+            <a:off x="6400800" y="1737360"/>
+            <a:ext cx="2468880" cy="320040"/>
+          </a:xfrm>
+          <a:prstGeom prst="rect">
+            <a:avLst/>
+          </a:prstGeom>
+          <a:noFill/>
+        </p:spPr>
+        <p:txBody>
+          <a:bodyPr wrap="square" anchor="t">
+            <a:spAutoFit/>
+          </a:bodyPr>
+          <a:lstStyle/>
+          <a:p>
+            <a:pPr algn="ctr"/>
+            <a:r>
+              <a:rPr sz="1400" b="1" i="0">
+                <a:solidFill>
+                  <a:srgbClr val="1F4788"/>
+                </a:solidFill>
+                <a:latin typeface="Calibri"/>
+              </a:rPr>
+              <a:t>Per query, $0 cost</a:t>
+            </a:r>
+          </a:p>
+        </p:txBody>
+      </p:sp>
+      <p:sp>
+        <p:nvSpPr>
+          <p:cNvPr id="15" name="TextBox 14"/>
+          <p:cNvSpPr txBox="1"/>
+          <p:nvPr/>
+        </p:nvSpPr>
+        <p:spPr>
+          <a:xfrm>
+            <a:off x="6400800" y="2103120"/>
+            <a:ext cx="2468880" cy="1005840"/>
+          </a:xfrm>
+          <a:prstGeom prst="rect">
+            <a:avLst/>
+          </a:prstGeom>
+          <a:noFill/>
+        </p:spPr>
+        <p:txBody>
+          <a:bodyPr wrap="square" anchor="t">
+            <a:spAutoFit/>
+          </a:bodyPr>
+          <a:lstStyle/>
+          <a:p>
+            <a:pPr algn="ctr"/>
+            <a:r>
+              <a:rPr sz="1200" b="0" i="0">
+                <a:solidFill>
+                  <a:srgbClr val="2D2D2D"/>
+                </a:solidFill>
+                <a:latin typeface="Calibri"/>
+              </a:rPr>
+              <a:t>Rules answer offline with 0 tokens. The LLM fallback uses ~900 tokens, ~0.5 s, ~$0.0001.</a:t>
+            </a:r>
+          </a:p>
+        </p:txBody>
+      </p:sp>
+      <p:sp>
+        <p:nvSpPr>
+          <p:cNvPr id="16" name="TextBox 15"/>
+          <p:cNvSpPr txBox="1"/>
+          <p:nvPr/>
+        </p:nvSpPr>
+        <p:spPr>
+          <a:xfrm>
+            <a:off x="457200" y="3246120"/>
             <a:ext cx="8229600" cy="320040"/>
           </a:xfrm>
           <a:prstGeom prst="rect">
@@ -5878,27 +6589,27 @@
           <a:lstStyle/>
           <a:p>
             <a:r>
-              <a:rPr sz="2000" b="1" i="0">
+              <a:rPr sz="1600" b="1" i="0">
                 <a:solidFill>
                   <a:srgbClr val="1F4788"/>
                 </a:solidFill>
                 <a:latin typeface="Calibri"/>
               </a:rPr>
-              <a:t>Known Limitations</a:t>
-            </a:r>
-          </a:p>
-        </p:txBody>
-      </p:sp>
-      <p:sp>
-        <p:nvSpPr>
-          <p:cNvPr id="5" name="TextBox 4"/>
-          <p:cNvSpPr txBox="1"/>
-          <p:nvPr/>
-        </p:nvSpPr>
-        <p:spPr>
-          <a:xfrm>
-            <a:off x="640080" y="1371600"/>
-            <a:ext cx="7863840" cy="1463040"/>
+              <a:t>Test Set and Quality Checks</a:t>
+            </a:r>
+          </a:p>
+        </p:txBody>
+      </p:sp>
+      <p:sp>
+        <p:nvSpPr>
+          <p:cNvPr id="17" name="TextBox 16"/>
+          <p:cNvSpPr txBox="1"/>
+          <p:nvPr/>
+        </p:nvSpPr>
+        <p:spPr>
+          <a:xfrm>
+            <a:off x="640080" y="3611880"/>
+            <a:ext cx="7863840" cy="1097280"/>
           </a:xfrm>
           <a:prstGeom prst="rect">
             <a:avLst/>
@@ -5919,13 +6630,13 @@
               <a:buChar char="•"/>
             </a:pPr>
             <a:r>
-              <a:rPr sz="1500" b="0" i="0">
+              <a:rPr sz="1400" b="0" i="0">
                 <a:solidFill>
                   <a:srgbClr val="2D2D2D"/>
                 </a:solidFill>
                 <a:latin typeface="Calibri"/>
               </a:rPr>
-              <a:t>The Hinglish word list is hand-written; very unusual phrasing can still be refused.</a:t>
+              <a:t>150 test questions answered: 82 answer, 30 clarify, 38 refuse, close to the expected test mix.</a:t>
             </a:r>
           </a:p>
           <a:p>
@@ -5937,13 +6648,13 @@
               <a:buChar char="•"/>
             </a:pPr>
             <a:r>
-              <a:rPr sz="1500" b="0" i="0">
+              <a:rPr sz="1400" b="0" i="0">
                 <a:solidFill>
                   <a:srgbClr val="2D2D2D"/>
                 </a:solidFill>
                 <a:latin typeface="Calibri"/>
               </a:rPr>
-              <a:t>The LLM fallback needs network access, adds ~0.5 s, and can occasionally pick the wrong product type.</a:t>
+              <a:t>71 automated tests pass; ruff lint clean; pip-audit finds no known vulnerabilities.</a:t>
             </a:r>
           </a:p>
           <a:p>
@@ -5955,623 +6666,13 @@
               <a:buChar char="•"/>
             </a:pPr>
             <a:r>
-              <a:rPr sz="1500" b="0" i="0">
+              <a:rPr sz="1400" b="0" i="0">
                 <a:solidFill>
                   <a:srgbClr val="2D2D2D"/>
                 </a:solidFill>
                 <a:latin typeface="Calibri"/>
               </a:rPr>
-              <a:t>Conversation memory and rate limiting are in-memory: demo scale, no user accounts.</a:t>
-            </a:r>
-          </a:p>
-        </p:txBody>
-      </p:sp>
-      <p:sp>
-        <p:nvSpPr>
-          <p:cNvPr id="6" name="TextBox 5"/>
-          <p:cNvSpPr txBox="1"/>
-          <p:nvPr/>
-        </p:nvSpPr>
-        <p:spPr>
-          <a:xfrm>
-            <a:off x="457200" y="2788920"/>
-            <a:ext cx="8229600" cy="320040"/>
-          </a:xfrm>
-          <a:prstGeom prst="rect">
-            <a:avLst/>
-          </a:prstGeom>
-          <a:noFill/>
-        </p:spPr>
-        <p:txBody>
-          <a:bodyPr wrap="square" anchor="ctr">
-            <a:spAutoFit/>
-          </a:bodyPr>
-          <a:lstStyle/>
-          <a:p>
-            <a:r>
-              <a:rPr sz="2000" b="1" i="0">
-                <a:solidFill>
-                  <a:srgbClr val="1F4788"/>
-                </a:solidFill>
-                <a:latin typeface="Calibri"/>
-              </a:rPr>
-              <a:t>Next Steps</a:t>
-            </a:r>
-          </a:p>
-        </p:txBody>
-      </p:sp>
-      <p:sp>
-        <p:nvSpPr>
-          <p:cNvPr id="7" name="TextBox 6"/>
-          <p:cNvSpPr txBox="1"/>
-          <p:nvPr/>
-        </p:nvSpPr>
-        <p:spPr>
-          <a:xfrm>
-            <a:off x="640080" y="3154680"/>
-            <a:ext cx="7863840" cy="1463040"/>
-          </a:xfrm>
-          <a:prstGeom prst="rect">
-            <a:avLst/>
-          </a:prstGeom>
-          <a:noFill/>
-        </p:spPr>
-        <p:txBody>
-          <a:bodyPr wrap="square" anchor="t">
-            <a:spAutoFit/>
-          </a:bodyPr>
-          <a:lstStyle/>
-          <a:p>
-            <a:pPr marL="342900" indent="-342900">
-              <a:spcAft>
-                <a:spcPts val="400"/>
-              </a:spcAft>
-              <a:buSzPct val="100000"/>
-              <a:buChar char="•"/>
-            </a:pPr>
-            <a:r>
-              <a:rPr sz="1500" b="0" i="0">
-                <a:solidFill>
-                  <a:srgbClr val="2D2D2D"/>
-                </a:solidFill>
-                <a:latin typeface="Calibri"/>
-              </a:rPr>
-              <a:t>Learn new Hinglish words and product aliases from real shopper logs.</a:t>
-            </a:r>
-          </a:p>
-          <a:p>
-            <a:pPr marL="342900" indent="-342900">
-              <a:spcAft>
-                <a:spcPts val="400"/>
-              </a:spcAft>
-              <a:buSzPct val="100000"/>
-              <a:buChar char="•"/>
-            </a:pPr>
-            <a:r>
-              <a:rPr sz="1500" b="0" i="0">
-                <a:solidFill>
-                  <a:srgbClr val="2D2D2D"/>
-                </a:solidFill>
-                <a:latin typeface="Calibri"/>
-              </a:rPr>
-              <a:t>Add a feedback button so wrong answers are flagged and reviewed.</a:t>
-            </a:r>
-          </a:p>
-          <a:p>
-            <a:pPr marL="342900" indent="-342900">
-              <a:spcAft>
-                <a:spcPts val="400"/>
-              </a:spcAft>
-              <a:buSzPct val="100000"/>
-              <a:buChar char="•"/>
-            </a:pPr>
-            <a:r>
-              <a:rPr sz="1500" b="0" i="0">
-                <a:solidFill>
-                  <a:srgbClr val="2D2D2D"/>
-                </a:solidFill>
-                <a:latin typeface="Calibri"/>
-              </a:rPr>
-              <a:t>Move memory to a shared store and add authentication for production use.</a:t>
-            </a:r>
-          </a:p>
-        </p:txBody>
-      </p:sp>
-    </p:spTree>
-  </p:cSld>
-  <p:clrMapOvr>
-    <a:masterClrMapping/>
-  </p:clrMapOvr>
-</p:sld>
-</file>
-
-<file path=ppt/slides/slide19.xml><?xml version="1.0" encoding="utf-8"?>
-<p:sld xmlns:a="http://schemas.openxmlformats.org/drawingml/2006/main" xmlns:p="http://schemas.openxmlformats.org/presentationml/2006/main" xmlns:r="http://schemas.openxmlformats.org/officeDocument/2006/relationships">
-  <p:cSld>
-    <p:bg>
-      <p:bgPr>
-        <a:solidFill>
-          <a:srgbClr val="1F4788"/>
-        </a:solidFill>
-        <a:effectLst/>
-      </p:bgPr>
-    </p:bg>
-    <p:spTree>
-      <p:nvGrpSpPr>
-        <p:cNvPr id="1" name=""/>
-        <p:cNvGrpSpPr/>
-        <p:nvPr/>
-      </p:nvGrpSpPr>
-      <p:grpSpPr/>
-      <p:sp>
-        <p:nvSpPr>
-          <p:cNvPr id="2" name="TextBox 1"/>
-          <p:cNvSpPr txBox="1"/>
-          <p:nvPr/>
-        </p:nvSpPr>
-        <p:spPr>
-          <a:xfrm>
-            <a:off x="457200" y="1554480"/>
-            <a:ext cx="8229600" cy="731520"/>
-          </a:xfrm>
-          <a:prstGeom prst="rect">
-            <a:avLst/>
-          </a:prstGeom>
-          <a:noFill/>
-        </p:spPr>
-        <p:txBody>
-          <a:bodyPr wrap="square" anchor="ctr">
-            <a:spAutoFit/>
-          </a:bodyPr>
-          <a:lstStyle/>
-          <a:p>
-            <a:pPr algn="ctr"/>
-            <a:r>
-              <a:rPr sz="5400" b="1" i="0">
-                <a:solidFill>
-                  <a:srgbClr val="FFFFFF"/>
-                </a:solidFill>
-                <a:latin typeface="Calibri"/>
-              </a:rPr>
-              <a:t>THANK YOU</a:t>
-            </a:r>
-          </a:p>
-        </p:txBody>
-      </p:sp>
-      <p:sp>
-        <p:nvSpPr>
-          <p:cNvPr id="3" name="TextBox 2"/>
-          <p:cNvSpPr txBox="1"/>
-          <p:nvPr/>
-        </p:nvSpPr>
-        <p:spPr>
-          <a:xfrm>
-            <a:off x="457200" y="2331720"/>
-            <a:ext cx="8229600" cy="457200"/>
-          </a:xfrm>
-          <a:prstGeom prst="rect">
-            <a:avLst/>
-          </a:prstGeom>
-          <a:noFill/>
-        </p:spPr>
-        <p:txBody>
-          <a:bodyPr wrap="square" anchor="ctr">
-            <a:spAutoFit/>
-          </a:bodyPr>
-          <a:lstStyle/>
-          <a:p>
-            <a:pPr algn="ctr"/>
-            <a:r>
-              <a:rPr sz="2800" b="0" i="0">
-                <a:solidFill>
-                  <a:srgbClr val="00A4EF"/>
-                </a:solidFill>
-                <a:latin typeface="Calibri"/>
-              </a:rPr>
-              <a:t>Questions?</a:t>
-            </a:r>
-          </a:p>
-        </p:txBody>
-      </p:sp>
-      <p:sp>
-        <p:nvSpPr>
-          <p:cNvPr id="4" name="TextBox 3"/>
-          <p:cNvSpPr txBox="1"/>
-          <p:nvPr/>
-        </p:nvSpPr>
-        <p:spPr>
-          <a:xfrm>
-            <a:off x="457200" y="3108960"/>
-            <a:ext cx="8229600" cy="365760"/>
-          </a:xfrm>
-          <a:prstGeom prst="rect">
-            <a:avLst/>
-          </a:prstGeom>
-          <a:noFill/>
-        </p:spPr>
-        <p:txBody>
-          <a:bodyPr wrap="square" anchor="t">
-            <a:spAutoFit/>
-          </a:bodyPr>
-          <a:lstStyle/>
-          <a:p>
-            <a:pPr algn="ctr"/>
-            <a:r>
-              <a:rPr sz="1600" b="0" i="0">
-                <a:solidFill>
-                  <a:srgbClr val="FFFFFF"/>
-                </a:solidFill>
-                <a:latin typeface="Calibri"/>
-              </a:rPr>
-              <a:t>Tech Titans · Retail (R3) · Shopping Assistant that doesn’t lie</a:t>
-            </a:r>
-          </a:p>
-        </p:txBody>
-      </p:sp>
-    </p:spTree>
-  </p:cSld>
-  <p:clrMapOvr>
-    <a:masterClrMapping/>
-  </p:clrMapOvr>
-</p:sld>
-</file>
-
-<file path=ppt/slides/slide8.xml><?xml version="1.0" encoding="utf-8"?>
-<p:sld xmlns:a="http://schemas.openxmlformats.org/drawingml/2006/main" xmlns:p="http://schemas.openxmlformats.org/presentationml/2006/main" xmlns:r="http://schemas.openxmlformats.org/officeDocument/2006/relationships">
-  <p:cSld>
-    <p:bg>
-      <p:bgPr>
-        <a:solidFill>
-          <a:srgbClr val="1F4788"/>
-        </a:solidFill>
-        <a:effectLst/>
-      </p:bgPr>
-    </p:bg>
-    <p:spTree>
-      <p:nvGrpSpPr>
-        <p:cNvPr id="1" name=""/>
-        <p:cNvGrpSpPr/>
-        <p:nvPr/>
-      </p:nvGrpSpPr>
-      <p:grpSpPr/>
-      <p:sp>
-        <p:nvSpPr>
-          <p:cNvPr id="2" name="TextBox 1"/>
-          <p:cNvSpPr txBox="1"/>
-          <p:nvPr/>
-        </p:nvSpPr>
-        <p:spPr>
-          <a:xfrm>
-            <a:off x="457200" y="1097280"/>
-            <a:ext cx="8229600" cy="548640"/>
-          </a:xfrm>
-          <a:prstGeom prst="rect">
-            <a:avLst/>
-          </a:prstGeom>
-          <a:noFill/>
-        </p:spPr>
-        <p:txBody>
-          <a:bodyPr wrap="square" anchor="ctr">
-            <a:spAutoFit/>
-          </a:bodyPr>
-          <a:lstStyle/>
-          <a:p>
-            <a:pPr algn="ctr"/>
-            <a:r>
-              <a:rPr sz="5400" b="1" i="0">
-                <a:solidFill>
-                  <a:srgbClr val="FFFFFF"/>
-                </a:solidFill>
-                <a:latin typeface="Calibri"/>
-              </a:rPr>
-              <a:t>L1 JURY PRESENTATION</a:t>
-            </a:r>
-          </a:p>
-        </p:txBody>
-      </p:sp>
-      <p:sp>
-        <p:nvSpPr>
-          <p:cNvPr id="3" name="TextBox 2"/>
-          <p:cNvSpPr txBox="1"/>
-          <p:nvPr/>
-        </p:nvSpPr>
-        <p:spPr>
-          <a:xfrm>
-            <a:off x="457200" y="1737360"/>
-            <a:ext cx="8229600" cy="365760"/>
-          </a:xfrm>
-          <a:prstGeom prst="rect">
-            <a:avLst/>
-          </a:prstGeom>
-          <a:noFill/>
-        </p:spPr>
-        <p:txBody>
-          <a:bodyPr wrap="square" anchor="ctr">
-            <a:spAutoFit/>
-          </a:bodyPr>
-          <a:lstStyle/>
-          <a:p>
-            <a:pPr algn="ctr"/>
-            <a:r>
-              <a:rPr sz="2800" b="0" i="0">
-                <a:solidFill>
-                  <a:srgbClr val="00A4EF"/>
-                </a:solidFill>
-                <a:latin typeface="Calibri"/>
-              </a:rPr>
-              <a:t>AI Frontier Challenge 2026 · Offline Hackathon L1</a:t>
-            </a:r>
-          </a:p>
-        </p:txBody>
-      </p:sp>
-      <p:sp>
-        <p:nvSpPr>
-          <p:cNvPr id="4" name="TextBox 3"/>
-          <p:cNvSpPr txBox="1"/>
-          <p:nvPr/>
-        </p:nvSpPr>
-        <p:spPr>
-          <a:xfrm>
-            <a:off x="914400" y="2560320"/>
-            <a:ext cx="3200400" cy="274320"/>
-          </a:xfrm>
-          <a:prstGeom prst="rect">
-            <a:avLst/>
-          </a:prstGeom>
-          <a:noFill/>
-        </p:spPr>
-        <p:txBody>
-          <a:bodyPr wrap="square" anchor="t">
-            <a:spAutoFit/>
-          </a:bodyPr>
-          <a:lstStyle/>
-          <a:p>
-            <a:r>
-              <a:rPr sz="1400" b="1" i="0">
-                <a:solidFill>
-                  <a:srgbClr val="F5F5F5"/>
-                </a:solidFill>
-                <a:latin typeface="Calibri"/>
-              </a:rPr>
-              <a:t>Team Name</a:t>
-            </a:r>
-          </a:p>
-        </p:txBody>
-      </p:sp>
-      <p:sp>
-        <p:nvSpPr>
-          <p:cNvPr id="5" name="TextBox 4"/>
-          <p:cNvSpPr txBox="1"/>
-          <p:nvPr/>
-        </p:nvSpPr>
-        <p:spPr>
-          <a:xfrm>
-            <a:off x="914400" y="2880360"/>
-            <a:ext cx="3200400" cy="320040"/>
-          </a:xfrm>
-          <a:prstGeom prst="rect">
-            <a:avLst/>
-          </a:prstGeom>
-          <a:noFill/>
-        </p:spPr>
-        <p:txBody>
-          <a:bodyPr wrap="square" anchor="t">
-            <a:spAutoFit/>
-          </a:bodyPr>
-          <a:lstStyle/>
-          <a:p>
-            <a:r>
-              <a:rPr sz="1800" b="0" i="0">
-                <a:solidFill>
-                  <a:srgbClr val="FFFFFF"/>
-                </a:solidFill>
-                <a:latin typeface="Calibri"/>
-              </a:rPr>
-              <a:t>Tech Titans (TEAM-001450)</a:t>
-            </a:r>
-          </a:p>
-        </p:txBody>
-      </p:sp>
-      <p:sp>
-        <p:nvSpPr>
-          <p:cNvPr id="6" name="TextBox 5"/>
-          <p:cNvSpPr txBox="1"/>
-          <p:nvPr/>
-        </p:nvSpPr>
-        <p:spPr>
-          <a:xfrm>
-            <a:off x="5029200" y="2560320"/>
-            <a:ext cx="3200400" cy="274320"/>
-          </a:xfrm>
-          <a:prstGeom prst="rect">
-            <a:avLst/>
-          </a:prstGeom>
-          <a:noFill/>
-        </p:spPr>
-        <p:txBody>
-          <a:bodyPr wrap="square" anchor="t">
-            <a:spAutoFit/>
-          </a:bodyPr>
-          <a:lstStyle/>
-          <a:p>
-            <a:r>
-              <a:rPr sz="1400" b="1" i="0">
-                <a:solidFill>
-                  <a:srgbClr val="F5F5F5"/>
-                </a:solidFill>
-                <a:latin typeface="Calibri"/>
-              </a:rPr>
-              <a:t>Team Leader</a:t>
-            </a:r>
-          </a:p>
-        </p:txBody>
-      </p:sp>
-      <p:sp>
-        <p:nvSpPr>
-          <p:cNvPr id="7" name="TextBox 6"/>
-          <p:cNvSpPr txBox="1"/>
-          <p:nvPr/>
-        </p:nvSpPr>
-        <p:spPr>
-          <a:xfrm>
-            <a:off x="5029200" y="2880360"/>
-            <a:ext cx="3200400" cy="320040"/>
-          </a:xfrm>
-          <a:prstGeom prst="rect">
-            <a:avLst/>
-          </a:prstGeom>
-          <a:noFill/>
-        </p:spPr>
-        <p:txBody>
-          <a:bodyPr wrap="square" anchor="t">
-            <a:spAutoFit/>
-          </a:bodyPr>
-          <a:lstStyle/>
-          <a:p>
-            <a:r>
-              <a:rPr sz="1800" b="0" i="0">
-                <a:solidFill>
-                  <a:srgbClr val="FFFFFF"/>
-                </a:solidFill>
-                <a:latin typeface="Calibri"/>
-              </a:rPr>
-              <a:t>Varun Raj Chevala</a:t>
-            </a:r>
-          </a:p>
-        </p:txBody>
-      </p:sp>
-      <p:sp>
-        <p:nvSpPr>
-          <p:cNvPr id="8" name="TextBox 7"/>
-          <p:cNvSpPr txBox="1"/>
-          <p:nvPr/>
-        </p:nvSpPr>
-        <p:spPr>
-          <a:xfrm>
-            <a:off x="914400" y="3383280"/>
-            <a:ext cx="3200400" cy="274320"/>
-          </a:xfrm>
-          <a:prstGeom prst="rect">
-            <a:avLst/>
-          </a:prstGeom>
-          <a:noFill/>
-        </p:spPr>
-        <p:txBody>
-          <a:bodyPr wrap="square" anchor="t">
-            <a:spAutoFit/>
-          </a:bodyPr>
-          <a:lstStyle/>
-          <a:p>
-            <a:r>
-              <a:rPr sz="1400" b="1" i="0">
-                <a:solidFill>
-                  <a:srgbClr val="F5F5F5"/>
-                </a:solidFill>
-                <a:latin typeface="Calibri"/>
-              </a:rPr>
-              <a:t>Track</a:t>
-            </a:r>
-          </a:p>
-        </p:txBody>
-      </p:sp>
-      <p:sp>
-        <p:nvSpPr>
-          <p:cNvPr id="9" name="TextBox 8"/>
-          <p:cNvSpPr txBox="1"/>
-          <p:nvPr/>
-        </p:nvSpPr>
-        <p:spPr>
-          <a:xfrm>
-            <a:off x="914400" y="3703320"/>
-            <a:ext cx="3200400" cy="320040"/>
-          </a:xfrm>
-          <a:prstGeom prst="rect">
-            <a:avLst/>
-          </a:prstGeom>
-          <a:noFill/>
-        </p:spPr>
-        <p:txBody>
-          <a:bodyPr wrap="square" anchor="t">
-            <a:spAutoFit/>
-          </a:bodyPr>
-          <a:lstStyle/>
-          <a:p>
-            <a:r>
-              <a:rPr sz="1800" b="0" i="0">
-                <a:solidFill>
-                  <a:srgbClr val="FFFFFF"/>
-                </a:solidFill>
-                <a:latin typeface="Calibri"/>
-              </a:rPr>
-              <a:t>Retail (R3): Shopping Assistant</a:t>
-            </a:r>
-          </a:p>
-        </p:txBody>
-      </p:sp>
-      <p:sp>
-        <p:nvSpPr>
-          <p:cNvPr id="10" name="TextBox 9"/>
-          <p:cNvSpPr txBox="1"/>
-          <p:nvPr/>
-        </p:nvSpPr>
-        <p:spPr>
-          <a:xfrm>
-            <a:off x="5029200" y="3383280"/>
-            <a:ext cx="3200400" cy="274320"/>
-          </a:xfrm>
-          <a:prstGeom prst="rect">
-            <a:avLst/>
-          </a:prstGeom>
-          <a:noFill/>
-        </p:spPr>
-        <p:txBody>
-          <a:bodyPr wrap="square" anchor="t">
-            <a:spAutoFit/>
-          </a:bodyPr>
-          <a:lstStyle/>
-          <a:p>
-            <a:r>
-              <a:rPr sz="1400" b="1" i="0">
-                <a:solidFill>
-                  <a:srgbClr val="F5F5F5"/>
-                </a:solidFill>
-                <a:latin typeface="Calibri"/>
-              </a:rPr>
-              <a:t>Date</a:t>
-            </a:r>
-          </a:p>
-        </p:txBody>
-      </p:sp>
-      <p:sp>
-        <p:nvSpPr>
-          <p:cNvPr id="11" name="TextBox 10"/>
-          <p:cNvSpPr txBox="1"/>
-          <p:nvPr/>
-        </p:nvSpPr>
-        <p:spPr>
-          <a:xfrm>
-            <a:off x="5029200" y="3703320"/>
-            <a:ext cx="3200400" cy="320040"/>
-          </a:xfrm>
-          <a:prstGeom prst="rect">
-            <a:avLst/>
-          </a:prstGeom>
-          <a:noFill/>
-        </p:spPr>
-        <p:txBody>
-          <a:bodyPr wrap="square" anchor="t">
-            <a:spAutoFit/>
-          </a:bodyPr>
-          <a:lstStyle/>
-          <a:p>
-            <a:r>
-              <a:rPr sz="1800" b="0" i="0">
-                <a:solidFill>
-                  <a:srgbClr val="FFFFFF"/>
-                </a:solidFill>
-                <a:latin typeface="Calibri"/>
-              </a:rPr>
-              <a:t>Oct 30, 2026</a:t>
+              <a:t>Every example in our questions guide was verified against the live assistant.</a:t>
             </a:r>
           </a:p>
         </p:txBody>
@@ -6585,7 +6686,7 @@
 </file>
 
 <file path=ppt/slides/slide9.xml><?xml version="1.0" encoding="utf-8"?>
-<p:sld xmlns:a="http://schemas.openxmlformats.org/drawingml/2006/main" xmlns:p="http://schemas.openxmlformats.org/presentationml/2006/main" xmlns:r="http://schemas.openxmlformats.org/officeDocument/2006/relationships">
+<p:sld xmlns:a="http://schemas.openxmlformats.org/drawingml/2006/main" xmlns:r="http://schemas.openxmlformats.org/officeDocument/2006/relationships" xmlns:p="http://schemas.openxmlformats.org/presentationml/2006/main">
   <p:cSld>
     <p:bg>
       <p:bgPr>
@@ -6601,7 +6702,14 @@
         <p:cNvGrpSpPr/>
         <p:nvPr/>
       </p:nvGrpSpPr>
-      <p:grpSpPr/>
+      <p:grpSpPr>
+        <a:xfrm>
+          <a:off x="0" y="0"/>
+          <a:ext cx="0" cy="0"/>
+          <a:chOff x="0" y="0"/>
+          <a:chExt cx="0" cy="0"/>
+        </a:xfrm>
+      </p:grpSpPr>
       <p:sp>
         <p:nvSpPr>
           <p:cNvPr id="2" name="Title bar"/>
@@ -6643,6 +6751,7 @@
           <a:lstStyle/>
           <a:p>
             <a:pPr algn="ctr"/>
+            <a:endParaRPr/>
           </a:p>
         </p:txBody>
       </p:sp>
@@ -6675,7 +6784,7 @@
                 </a:solidFill>
                 <a:latin typeface="Calibri"/>
               </a:rPr>
-              <a:t>Use Case</a:t>
+              <a:t>Responsible AI</a:t>
             </a:r>
           </a:p>
         </p:txBody>
@@ -6709,7 +6818,7 @@
                 </a:solidFill>
                 <a:latin typeface="Calibri"/>
               </a:rPr>
-              <a:t>Problem Statement</a:t>
+              <a:t>How Every Answer Stays Grounded</a:t>
             </a:r>
           </a:p>
         </p:txBody>
@@ -6722,8 +6831,8 @@
         </p:nvSpPr>
         <p:spPr>
           <a:xfrm>
-            <a:off x="640080" y="1417320"/>
-            <a:ext cx="7863840" cy="1371600"/>
+            <a:off x="640080" y="1371600"/>
+            <a:ext cx="7863840" cy="1463040"/>
           </a:xfrm>
           <a:prstGeom prst="rect">
             <a:avLst/>
@@ -6744,13 +6853,13 @@
               <a:buChar char="•"/>
             </a:pPr>
             <a:r>
-              <a:rPr sz="1600" b="0" i="0">
+              <a:rPr sz="1500" b="0" i="0">
                 <a:solidFill>
                   <a:srgbClr val="2D2D2D"/>
                 </a:solidFill>
                 <a:latin typeface="Calibri"/>
               </a:rPr>
-              <a:t>Shopping chatbots often invent products, prices and return rules that are not in the catalogue, and shoppers act on them.</a:t>
+              <a:t>Every fact carries a product ID or policy section, and the Sources panel shows the exact catalogue row.</a:t>
             </a:r>
           </a:p>
           <a:p>
@@ -6762,13 +6871,13 @@
               <a:buChar char="•"/>
             </a:pPr>
             <a:r>
-              <a:rPr sz="1600" b="0" i="0">
+              <a:rPr sz="1500" b="0" i="0">
                 <a:solidFill>
                   <a:srgbClr val="2D2D2D"/>
                 </a:solidFill>
                 <a:latin typeface="Calibri"/>
               </a:rPr>
-              <a:t>Affected: online shoppers, and retailers who must honour what their bot says.</a:t>
+              <a:t>Missing ≠ false: if the catalogue doesn’t list a feature, the assistant says so instead of guessing.</a:t>
             </a:r>
           </a:p>
           <a:p>
@@ -6780,13 +6889,13 @@
               <a:buChar char="•"/>
             </a:pPr>
             <a:r>
-              <a:rPr sz="1600" b="0" i="0">
+              <a:rPr sz="1500" b="0" i="0">
                 <a:solidFill>
                   <a:srgbClr val="2D2D2D"/>
                 </a:solidFill>
                 <a:latin typeface="Calibri"/>
               </a:rPr>
-              <a:t>Impact: in Moffatt v. Air Canada (2024), a tribunal made the airline pay for a refund rule its chatbot got wrong.</a:t>
+              <a:t>It asks which product is meant when several match, and refuses unsold items, other brands and policy gaps.</a:t>
             </a:r>
           </a:p>
         </p:txBody>
@@ -6799,7 +6908,7 @@
         </p:nvSpPr>
         <p:spPr>
           <a:xfrm>
-            <a:off x="457200" y="2834640"/>
+            <a:off x="457200" y="2788920"/>
             <a:ext cx="8229600" cy="320040"/>
           </a:xfrm>
           <a:prstGeom prst="rect">
@@ -6820,7 +6929,7 @@
                 </a:solidFill>
                 <a:latin typeface="Calibri"/>
               </a:rPr>
-              <a:t>Market Opportunity</a:t>
+              <a:t>Safe Use of the LLM</a:t>
             </a:r>
           </a:p>
         </p:txBody>
@@ -6833,8 +6942,8 @@
         </p:nvSpPr>
         <p:spPr>
           <a:xfrm>
-            <a:off x="640080" y="3246120"/>
-            <a:ext cx="7863840" cy="1371600"/>
+            <a:off x="640080" y="3154680"/>
+            <a:ext cx="7863840" cy="1463040"/>
           </a:xfrm>
           <a:prstGeom prst="rect">
             <a:avLst/>
@@ -6855,13 +6964,13 @@
               <a:buChar char="•"/>
             </a:pPr>
             <a:r>
-              <a:rPr sz="1600" b="0" i="0">
+              <a:rPr sz="1500" b="0" i="0">
                 <a:solidFill>
                   <a:srgbClr val="2D2D2D"/>
                 </a:solidFill>
                 <a:latin typeface="Calibri"/>
               </a:rPr>
-              <a:t>India’s online retail is expected to grow from US$75 billion in 2024 to US$260 billion by 2030 (Deloitte and FICCI, 2025).</a:t>
+              <a:t>Fallback only, and it never writes prices, stock or IDs; its output is validated and invented brands are dropped.</a:t>
             </a:r>
           </a:p>
           <a:p>
@@ -6873,13 +6982,13 @@
               <a:buChar char="•"/>
             </a:pPr>
             <a:r>
-              <a:rPr sz="1600" b="0" i="0">
+              <a:rPr sz="1500" b="0" i="0">
                 <a:solidFill>
                   <a:srgbClr val="2D2D2D"/>
                 </a:solidFill>
                 <a:latin typeface="Calibri"/>
               </a:rPr>
-              <a:t>Target users: India’s online shoppers, expected to reach 400 million by 2030 (Redseer).</a:t>
+              <a:t>Shopper text is treated as data (prompt-injection safe); the API key lives in .env, never in code.</a:t>
             </a:r>
           </a:p>
           <a:p>
@@ -6891,13 +7000,13 @@
               <a:buChar char="•"/>
             </a:pPr>
             <a:r>
-              <a:rPr sz="1600" b="0" i="0">
+              <a:rPr sz="1500" b="0" i="0">
                 <a:solidFill>
                   <a:srgbClr val="2D2D2D"/>
                 </a:solidFill>
                 <a:latin typeface="Calibri"/>
               </a:rPr>
-              <a:t>Smaller retailers need a low-cost assistant that states only catalogue facts.</a:t>
+              <a:t>Timeouts, retries and rate-limit handling; if Groq is down, the rules keep answering offline.</a:t>
             </a:r>
           </a:p>
         </p:txBody>

--- a/Shopping Assistant Presentation.pptx
+++ b/Shopping Assistant Presentation.pptx
@@ -13,8 +13,8 @@
     <p:sldId id="265" r:id="rId4"/>
     <p:sldId id="266" r:id="rId5"/>
     <p:sldId id="271" r:id="rId6"/>
-    <p:sldId id="270" r:id="rId7"/>
-    <p:sldId id="272" r:id="rId8"/>
+    <p:sldId id="272" r:id="rId7"/>
+    <p:sldId id="270" r:id="rId8"/>
     <p:sldId id="267" r:id="rId9"/>
     <p:sldId id="268" r:id="rId10"/>
     <p:sldId id="269" r:id="rId11"/>
@@ -649,7 +649,7 @@
           <a:lstStyle/>
           <a:p>
             <a:r>
-              <a:t>Three differentiators, then the one-line comparison with general-purpose chatbots.</a:t>
+              <a:t>Live demo at http://127.0.0.1:8000. Suggested order: price, clarify, follow-up 'lavender wali', a policy question, a refusal, then the LLM fallback question.</a:t>
             </a:r>
           </a:p>
         </p:txBody>
@@ -695,7 +695,7 @@
           <a:lstStyle/>
           <a:p>
             <a:r>
-              <a:t>Live demo at http://127.0.0.1:8000. Suggested order: price, clarify, follow-up 'lavender wali', a policy question, a refusal, then the LLM fallback question.</a:t>
+              <a:t>Three differentiators, then the one-line comparison with general-purpose chatbots.</a:t>
             </a:r>
           </a:p>
         </p:txBody>
@@ -4807,27 +4807,61 @@
                 </a:solidFill>
                 <a:latin typeface="Calibri"/>
               </a:rPr>
-              <a:t>Unique Selling Proposition (USP)</a:t>
-            </a:r>
-          </a:p>
-        </p:txBody>
-      </p:sp>
-      <p:sp>
-        <p:nvSpPr>
-          <p:cNvPr id="4" name="Rectangle 3"/>
+              <a:t>Demo</a:t>
+            </a:r>
+          </a:p>
+        </p:txBody>
+      </p:sp>
+      <p:sp>
+        <p:nvSpPr>
+          <p:cNvPr id="4" name="TextBox 3"/>
+          <p:cNvSpPr txBox="1"/>
+          <p:nvPr/>
+        </p:nvSpPr>
+        <p:spPr>
+          <a:xfrm>
+            <a:off x="457200" y="914400"/>
+            <a:ext cx="8229600" cy="320040"/>
+          </a:xfrm>
+          <a:prstGeom prst="rect">
+            <a:avLst/>
+          </a:prstGeom>
+          <a:noFill/>
+        </p:spPr>
+        <p:txBody>
+          <a:bodyPr wrap="square" anchor="ctr">
+            <a:spAutoFit/>
+          </a:bodyPr>
+          <a:lstStyle/>
+          <a:p>
+            <a:r>
+              <a:rPr sz="1800" b="1" i="0">
+                <a:solidFill>
+                  <a:srgbClr val="1F4788"/>
+                </a:solidFill>
+                <a:latin typeface="Calibri"/>
+              </a:rPr>
+              <a:t>Live Demonstration</a:t>
+            </a:r>
+          </a:p>
+        </p:txBody>
+      </p:sp>
+      <p:sp>
+        <p:nvSpPr>
+          <p:cNvPr id="5" name="Screenshot frame"/>
           <p:cNvSpPr/>
           <p:nvPr/>
         </p:nvSpPr>
         <p:spPr>
           <a:xfrm>
-            <a:off x="731520" y="1005840"/>
-            <a:ext cx="2468880" cy="73152"/>
+            <a:off x="457200" y="1280160"/>
+            <a:ext cx="5029200" cy="3008376"/>
           </a:xfrm>
           <a:prstGeom prst="rect">
             <a:avLst/>
           </a:prstGeom>
           <a:solidFill>
-            <a:srgbClr val="00A4EF"/>
+            <a:srgbClr val="F5F5F5"/>
           </a:solidFill>
           <a:ln>
             <a:noFill/>
@@ -4857,16 +4891,74 @@
           </a:p>
         </p:txBody>
       </p:sp>
-      <p:sp>
-        <p:nvSpPr>
-          <p:cNvPr id="5" name="TextBox 4"/>
-          <p:cNvSpPr txBox="1"/>
-          <p:nvPr/>
-        </p:nvSpPr>
-        <p:spPr>
-          <a:xfrm>
-            <a:off x="731520" y="1143000"/>
-            <a:ext cx="2468880" cy="320040"/>
+      <p:pic>
+        <p:nvPicPr>
+          <p:cNvPr id="6" name="Chatbot screenshot" descr="Chatbot screenshot: a clarify reply listing four yoga mats, the follow-up 'lavender wali' answered, and the Sources panel"/>
+          <p:cNvPicPr>
+            <a:picLocks noChangeAspect="1"/>
+          </p:cNvPicPr>
+          <p:nvPr/>
+        </p:nvPicPr>
+        <p:blipFill>
+          <a:blip r:embed="rId3"/>
+          <a:stretch>
+            <a:fillRect/>
+          </a:stretch>
+        </p:blipFill>
+        <p:spPr>
+          <a:xfrm>
+            <a:off x="502920" y="1325880"/>
+            <a:ext cx="4937760" cy="2948940"/>
+          </a:xfrm>
+          <a:prstGeom prst="rect">
+            <a:avLst/>
+          </a:prstGeom>
+        </p:spPr>
+      </p:pic>
+      <p:sp>
+        <p:nvSpPr>
+          <p:cNvPr id="7" name="TextBox 6"/>
+          <p:cNvSpPr txBox="1"/>
+          <p:nvPr/>
+        </p:nvSpPr>
+        <p:spPr>
+          <a:xfrm>
+            <a:off x="5715000" y="1280160"/>
+            <a:ext cx="3017520" cy="320040"/>
+          </a:xfrm>
+          <a:prstGeom prst="rect">
+            <a:avLst/>
+          </a:prstGeom>
+          <a:noFill/>
+        </p:spPr>
+        <p:txBody>
+          <a:bodyPr wrap="square" anchor="ctr">
+            <a:spAutoFit/>
+          </a:bodyPr>
+          <a:lstStyle/>
+          <a:p>
+            <a:r>
+              <a:rPr sz="1400" b="1" i="0" dirty="0">
+                <a:solidFill>
+                  <a:srgbClr val="1F4788"/>
+                </a:solidFill>
+                <a:latin typeface="Calibri"/>
+              </a:rPr>
+              <a:t>Try These Questions</a:t>
+            </a:r>
+          </a:p>
+        </p:txBody>
+      </p:sp>
+      <p:sp>
+        <p:nvSpPr>
+          <p:cNvPr id="8" name="TextBox 7"/>
+          <p:cNvSpPr txBox="1"/>
+          <p:nvPr/>
+        </p:nvSpPr>
+        <p:spPr>
+          <a:xfrm>
+            <a:off x="5715000" y="1645920"/>
+            <a:ext cx="3017520" cy="182880"/>
           </a:xfrm>
           <a:prstGeom prst="rect">
             <a:avLst/>
@@ -4879,42 +4971,432 @@
           </a:bodyPr>
           <a:lstStyle/>
           <a:p>
-            <a:pPr algn="ctr"/>
-            <a:r>
-              <a:rPr sz="1400" b="1" i="0">
+            <a:r>
+              <a:rPr sz="1000" b="1" i="0">
+                <a:solidFill>
+                  <a:srgbClr val="00A4EF"/>
+                </a:solidFill>
+                <a:latin typeface="Calibri"/>
+              </a:rPr>
+              <a:t>ANSWER · English</a:t>
+            </a:r>
+          </a:p>
+        </p:txBody>
+      </p:sp>
+      <p:sp>
+        <p:nvSpPr>
+          <p:cNvPr id="9" name="TextBox 8"/>
+          <p:cNvSpPr txBox="1"/>
+          <p:nvPr/>
+        </p:nvSpPr>
+        <p:spPr>
+          <a:xfrm>
+            <a:off x="5715000" y="1810512"/>
+            <a:ext cx="3017520" cy="256032"/>
+          </a:xfrm>
+          <a:prstGeom prst="rect">
+            <a:avLst/>
+          </a:prstGeom>
+          <a:noFill/>
+        </p:spPr>
+        <p:txBody>
+          <a:bodyPr wrap="square" anchor="t">
+            <a:spAutoFit/>
+          </a:bodyPr>
+          <a:lstStyle/>
+          <a:p>
+            <a:r>
+              <a:rPr sz="1100" b="0" i="0">
+                <a:solidFill>
+                  <a:srgbClr val="2D2D2D"/>
+                </a:solidFill>
+                <a:latin typeface="Calibri"/>
+              </a:rPr>
+              <a:t>Price of Chargit QuillBolt red earphones?</a:t>
+            </a:r>
+          </a:p>
+        </p:txBody>
+      </p:sp>
+      <p:sp>
+        <p:nvSpPr>
+          <p:cNvPr id="10" name="TextBox 9"/>
+          <p:cNvSpPr txBox="1"/>
+          <p:nvPr/>
+        </p:nvSpPr>
+        <p:spPr>
+          <a:xfrm>
+            <a:off x="5715000" y="2084832"/>
+            <a:ext cx="3017520" cy="182880"/>
+          </a:xfrm>
+          <a:prstGeom prst="rect">
+            <a:avLst/>
+          </a:prstGeom>
+          <a:noFill/>
+        </p:spPr>
+        <p:txBody>
+          <a:bodyPr wrap="square" anchor="t">
+            <a:spAutoFit/>
+          </a:bodyPr>
+          <a:lstStyle/>
+          <a:p>
+            <a:r>
+              <a:rPr sz="1000" b="1" i="0">
+                <a:solidFill>
+                  <a:srgbClr val="00A4EF"/>
+                </a:solidFill>
+                <a:latin typeface="Calibri"/>
+              </a:rPr>
+              <a:t>CLARIFY · Hinglish</a:t>
+            </a:r>
+          </a:p>
+        </p:txBody>
+      </p:sp>
+      <p:sp>
+        <p:nvSpPr>
+          <p:cNvPr id="11" name="TextBox 10"/>
+          <p:cNvSpPr txBox="1"/>
+          <p:nvPr/>
+        </p:nvSpPr>
+        <p:spPr>
+          <a:xfrm>
+            <a:off x="5715000" y="2249424"/>
+            <a:ext cx="3017520" cy="256032"/>
+          </a:xfrm>
+          <a:prstGeom prst="rect">
+            <a:avLst/>
+          </a:prstGeom>
+          <a:noFill/>
+        </p:spPr>
+        <p:txBody>
+          <a:bodyPr wrap="square" anchor="t">
+            <a:spAutoFit/>
+          </a:bodyPr>
+          <a:lstStyle/>
+          <a:p>
+            <a:r>
+              <a:rPr sz="1100" b="0" i="0">
+                <a:solidFill>
+                  <a:srgbClr val="2D2D2D"/>
+                </a:solidFill>
+                <a:latin typeface="Calibri"/>
+              </a:rPr>
+              <a:t>green running shoes kitne ke hai</a:t>
+            </a:r>
+          </a:p>
+        </p:txBody>
+      </p:sp>
+      <p:sp>
+        <p:nvSpPr>
+          <p:cNvPr id="12" name="TextBox 11"/>
+          <p:cNvSpPr txBox="1"/>
+          <p:nvPr/>
+        </p:nvSpPr>
+        <p:spPr>
+          <a:xfrm>
+            <a:off x="5715000" y="2523744"/>
+            <a:ext cx="3017520" cy="182880"/>
+          </a:xfrm>
+          <a:prstGeom prst="rect">
+            <a:avLst/>
+          </a:prstGeom>
+          <a:noFill/>
+        </p:spPr>
+        <p:txBody>
+          <a:bodyPr wrap="square" anchor="t">
+            <a:spAutoFit/>
+          </a:bodyPr>
+          <a:lstStyle/>
+          <a:p>
+            <a:r>
+              <a:rPr sz="1000" b="1" i="0">
+                <a:solidFill>
+                  <a:srgbClr val="00A4EF"/>
+                </a:solidFill>
+                <a:latin typeface="Calibri"/>
+              </a:rPr>
+              <a:t>POLICY · English</a:t>
+            </a:r>
+          </a:p>
+        </p:txBody>
+      </p:sp>
+      <p:sp>
+        <p:nvSpPr>
+          <p:cNvPr id="13" name="TextBox 12"/>
+          <p:cNvSpPr txBox="1"/>
+          <p:nvPr/>
+        </p:nvSpPr>
+        <p:spPr>
+          <a:xfrm>
+            <a:off x="5715000" y="2688336"/>
+            <a:ext cx="3017520" cy="256032"/>
+          </a:xfrm>
+          <a:prstGeom prst="rect">
+            <a:avLst/>
+          </a:prstGeom>
+          <a:noFill/>
+        </p:spPr>
+        <p:txBody>
+          <a:bodyPr wrap="square" anchor="t">
+            <a:spAutoFit/>
+          </a:bodyPr>
+          <a:lstStyle/>
+          <a:p>
+            <a:r>
+              <a:rPr sz="1100" b="0" i="0">
+                <a:solidFill>
+                  <a:srgbClr val="2D2D2D"/>
+                </a:solidFill>
+                <a:latin typeface="Calibri"/>
+              </a:rPr>
+              <a:t>Can I return earbuds after opening the seal?</a:t>
+            </a:r>
+          </a:p>
+        </p:txBody>
+      </p:sp>
+      <p:sp>
+        <p:nvSpPr>
+          <p:cNvPr id="14" name="TextBox 13"/>
+          <p:cNvSpPr txBox="1"/>
+          <p:nvPr/>
+        </p:nvSpPr>
+        <p:spPr>
+          <a:xfrm>
+            <a:off x="5715000" y="2962656"/>
+            <a:ext cx="3017520" cy="182880"/>
+          </a:xfrm>
+          <a:prstGeom prst="rect">
+            <a:avLst/>
+          </a:prstGeom>
+          <a:noFill/>
+        </p:spPr>
+        <p:txBody>
+          <a:bodyPr wrap="square" anchor="t">
+            <a:spAutoFit/>
+          </a:bodyPr>
+          <a:lstStyle/>
+          <a:p>
+            <a:r>
+              <a:rPr sz="1000" b="1" i="0">
+                <a:solidFill>
+                  <a:srgbClr val="00A4EF"/>
+                </a:solidFill>
+                <a:latin typeface="Calibri"/>
+              </a:rPr>
+              <a:t>REFUSE · Hinglish</a:t>
+            </a:r>
+          </a:p>
+        </p:txBody>
+      </p:sp>
+      <p:sp>
+        <p:nvSpPr>
+          <p:cNvPr id="15" name="TextBox 14"/>
+          <p:cNvSpPr txBox="1"/>
+          <p:nvPr/>
+        </p:nvSpPr>
+        <p:spPr>
+          <a:xfrm>
+            <a:off x="5715000" y="3127248"/>
+            <a:ext cx="3017520" cy="256032"/>
+          </a:xfrm>
+          <a:prstGeom prst="rect">
+            <a:avLst/>
+          </a:prstGeom>
+          <a:noFill/>
+        </p:spPr>
+        <p:txBody>
+          <a:bodyPr wrap="square" anchor="t">
+            <a:spAutoFit/>
+          </a:bodyPr>
+          <a:lstStyle/>
+          <a:p>
+            <a:r>
+              <a:rPr sz="1100" b="0" i="0">
+                <a:solidFill>
+                  <a:srgbClr val="2D2D2D"/>
+                </a:solidFill>
+                <a:latin typeface="Calibri"/>
+              </a:rPr>
+              <a:t>iphone 15 milega?</a:t>
+            </a:r>
+          </a:p>
+        </p:txBody>
+      </p:sp>
+      <p:sp>
+        <p:nvSpPr>
+          <p:cNvPr id="16" name="TextBox 15"/>
+          <p:cNvSpPr txBox="1"/>
+          <p:nvPr/>
+        </p:nvSpPr>
+        <p:spPr>
+          <a:xfrm>
+            <a:off x="5715000" y="3401568"/>
+            <a:ext cx="3017520" cy="182880"/>
+          </a:xfrm>
+          <a:prstGeom prst="rect">
+            <a:avLst/>
+          </a:prstGeom>
+          <a:noFill/>
+        </p:spPr>
+        <p:txBody>
+          <a:bodyPr wrap="square" anchor="t">
+            <a:spAutoFit/>
+          </a:bodyPr>
+          <a:lstStyle/>
+          <a:p>
+            <a:r>
+              <a:rPr sz="1000" b="1" i="0">
+                <a:solidFill>
+                  <a:srgbClr val="00A4EF"/>
+                </a:solidFill>
+                <a:latin typeface="Calibri"/>
+              </a:rPr>
+              <a:t>MULTI-TURN · Hinglish</a:t>
+            </a:r>
+          </a:p>
+        </p:txBody>
+      </p:sp>
+      <p:sp>
+        <p:nvSpPr>
+          <p:cNvPr id="17" name="TextBox 16"/>
+          <p:cNvSpPr txBox="1"/>
+          <p:nvPr/>
+        </p:nvSpPr>
+        <p:spPr>
+          <a:xfrm>
+            <a:off x="5715000" y="3566160"/>
+            <a:ext cx="3017520" cy="256032"/>
+          </a:xfrm>
+          <a:prstGeom prst="rect">
+            <a:avLst/>
+          </a:prstGeom>
+          <a:noFill/>
+        </p:spPr>
+        <p:txBody>
+          <a:bodyPr wrap="square" anchor="t">
+            <a:spAutoFit/>
+          </a:bodyPr>
+          <a:lstStyle/>
+          <a:p>
+            <a:r>
+              <a:rPr sz="1100" b="0" i="0">
+                <a:solidFill>
+                  <a:srgbClr val="2D2D2D"/>
+                </a:solidFill>
+                <a:latin typeface="Calibri"/>
+              </a:rPr>
+              <a:t>6 mm yoga mat chahiye → TPE wali 600 ke andar</a:t>
+            </a:r>
+          </a:p>
+        </p:txBody>
+      </p:sp>
+      <p:sp>
+        <p:nvSpPr>
+          <p:cNvPr id="18" name="TextBox 17"/>
+          <p:cNvSpPr txBox="1"/>
+          <p:nvPr/>
+        </p:nvSpPr>
+        <p:spPr>
+          <a:xfrm>
+            <a:off x="5715000" y="3840480"/>
+            <a:ext cx="3017520" cy="182880"/>
+          </a:xfrm>
+          <a:prstGeom prst="rect">
+            <a:avLst/>
+          </a:prstGeom>
+          <a:noFill/>
+        </p:spPr>
+        <p:txBody>
+          <a:bodyPr wrap="square" anchor="t">
+            <a:spAutoFit/>
+          </a:bodyPr>
+          <a:lstStyle/>
+          <a:p>
+            <a:r>
+              <a:rPr sz="1000" b="1" i="0">
+                <a:solidFill>
+                  <a:srgbClr val="00A4EF"/>
+                </a:solidFill>
+                <a:latin typeface="Calibri"/>
+              </a:rPr>
+              <a:t>LLM · English</a:t>
+            </a:r>
+          </a:p>
+        </p:txBody>
+      </p:sp>
+      <p:sp>
+        <p:nvSpPr>
+          <p:cNvPr id="19" name="TextBox 18"/>
+          <p:cNvSpPr txBox="1"/>
+          <p:nvPr/>
+        </p:nvSpPr>
+        <p:spPr>
+          <a:xfrm>
+            <a:off x="5715000" y="4005072"/>
+            <a:ext cx="3017520" cy="256032"/>
+          </a:xfrm>
+          <a:prstGeom prst="rect">
+            <a:avLst/>
+          </a:prstGeom>
+          <a:noFill/>
+        </p:spPr>
+        <p:txBody>
+          <a:bodyPr wrap="square" anchor="t">
+            <a:spAutoFit/>
+          </a:bodyPr>
+          <a:lstStyle/>
+          <a:p>
+            <a:r>
+              <a:rPr sz="1100" b="0" i="0">
+                <a:solidFill>
+                  <a:srgbClr val="2D2D2D"/>
+                </a:solidFill>
+                <a:latin typeface="Calibri"/>
+              </a:rPr>
+              <a:t>How much is a machine that toasts bread?</a:t>
+            </a:r>
+          </a:p>
+        </p:txBody>
+      </p:sp>
+      <p:sp>
+        <p:nvSpPr>
+          <p:cNvPr id="20" name="TextBox 19"/>
+          <p:cNvSpPr txBox="1"/>
+          <p:nvPr/>
+        </p:nvSpPr>
+        <p:spPr>
+          <a:xfrm>
+            <a:off x="457200" y="4389120"/>
+            <a:ext cx="8229600" cy="274320"/>
+          </a:xfrm>
+          <a:prstGeom prst="rect">
+            <a:avLst/>
+          </a:prstGeom>
+          <a:noFill/>
+        </p:spPr>
+        <p:txBody>
+          <a:bodyPr wrap="square" anchor="t">
+            <a:spAutoFit/>
+          </a:bodyPr>
+          <a:lstStyle/>
+          <a:p>
+            <a:r>
+              <a:rPr sz="1200" b="1" i="0">
                 <a:solidFill>
                   <a:srgbClr val="1F4788"/>
                 </a:solidFill>
                 <a:latin typeface="Calibri"/>
               </a:rPr>
-              <a:t>Key Differentiator 1</a:t>
-            </a:r>
-          </a:p>
-        </p:txBody>
-      </p:sp>
-      <p:sp>
-        <p:nvSpPr>
-          <p:cNvPr id="6" name="TextBox 5"/>
-          <p:cNvSpPr txBox="1"/>
-          <p:nvPr/>
-        </p:nvSpPr>
-        <p:spPr>
-          <a:xfrm>
-            <a:off x="731520" y="1508760"/>
-            <a:ext cx="2468880" cy="1645920"/>
-          </a:xfrm>
-          <a:prstGeom prst="rect">
-            <a:avLst/>
-          </a:prstGeom>
-          <a:noFill/>
-        </p:spPr>
-        <p:txBody>
-          <a:bodyPr wrap="square" anchor="t">
-            <a:spAutoFit/>
-          </a:bodyPr>
-          <a:lstStyle/>
-          <a:p>
-            <a:pPr algn="ctr"/>
+              <a:t>Chatbot: </a:t>
+            </a:r>
+            <a:r>
+              <a:rPr sz="1200" b="0" i="0">
+                <a:solidFill>
+                  <a:srgbClr val="1F4788"/>
+                </a:solidFill>
+                <a:latin typeface="Calibri"/>
+              </a:rPr>
+              <a:t>http://127.0.0.1:8000    </a:t>
+            </a:r>
             <a:r>
               <a:rPr sz="1200" b="1" i="0">
                 <a:solidFill>
@@ -4922,11 +5404,8 @@
                 </a:solidFill>
                 <a:latin typeface="Calibri"/>
               </a:rPr>
-              <a:t>Prices cannot be invented</a:t>
-            </a:r>
-          </a:p>
-          <a:p>
-            <a:pPr algn="ctr"/>
+              <a:t>API docs: </a:t>
+            </a:r>
             <a:r>
               <a:rPr sz="1200" b="0" i="0">
                 <a:solidFill>
@@ -4934,354 +5413,7 @@
                 </a:solidFill>
                 <a:latin typeface="Calibri"/>
               </a:rPr>
-              <a:t>Code copies every price from the catalogue and the guard re-checks every ₹ amount: 0 hallucinated prices.</a:t>
-            </a:r>
-          </a:p>
-        </p:txBody>
-      </p:sp>
-      <p:sp>
-        <p:nvSpPr>
-          <p:cNvPr id="7" name="Rectangle 6"/>
-          <p:cNvSpPr/>
-          <p:nvPr/>
-        </p:nvSpPr>
-        <p:spPr>
-          <a:xfrm>
-            <a:off x="3566160" y="1005840"/>
-            <a:ext cx="2468880" cy="73152"/>
-          </a:xfrm>
-          <a:prstGeom prst="rect">
-            <a:avLst/>
-          </a:prstGeom>
-          <a:solidFill>
-            <a:srgbClr val="00A4EF"/>
-          </a:solidFill>
-          <a:ln>
-            <a:noFill/>
-          </a:ln>
-          <a:effectLst/>
-        </p:spPr>
-        <p:style>
-          <a:lnRef idx="1">
-            <a:schemeClr val="accent1"/>
-          </a:lnRef>
-          <a:fillRef idx="3">
-            <a:schemeClr val="accent1"/>
-          </a:fillRef>
-          <a:effectRef idx="2">
-            <a:schemeClr val="accent1"/>
-          </a:effectRef>
-          <a:fontRef idx="minor">
-            <a:schemeClr val="lt1"/>
-          </a:fontRef>
-        </p:style>
-        <p:txBody>
-          <a:bodyPr rtlCol="0" anchor="ctr"/>
-          <a:lstStyle/>
-          <a:p>
-            <a:pPr algn="ctr"/>
-            <a:endParaRPr/>
-          </a:p>
-        </p:txBody>
-      </p:sp>
-      <p:sp>
-        <p:nvSpPr>
-          <p:cNvPr id="8" name="TextBox 7"/>
-          <p:cNvSpPr txBox="1"/>
-          <p:nvPr/>
-        </p:nvSpPr>
-        <p:spPr>
-          <a:xfrm>
-            <a:off x="3566160" y="1143000"/>
-            <a:ext cx="2468880" cy="320040"/>
-          </a:xfrm>
-          <a:prstGeom prst="rect">
-            <a:avLst/>
-          </a:prstGeom>
-          <a:noFill/>
-        </p:spPr>
-        <p:txBody>
-          <a:bodyPr wrap="square" anchor="t">
-            <a:spAutoFit/>
-          </a:bodyPr>
-          <a:lstStyle/>
-          <a:p>
-            <a:pPr algn="ctr"/>
-            <a:r>
-              <a:rPr sz="1400" b="1" i="0">
-                <a:solidFill>
-                  <a:srgbClr val="1F4788"/>
-                </a:solidFill>
-                <a:latin typeface="Calibri"/>
-              </a:rPr>
-              <a:t>Key Differentiator 2</a:t>
-            </a:r>
-          </a:p>
-        </p:txBody>
-      </p:sp>
-      <p:sp>
-        <p:nvSpPr>
-          <p:cNvPr id="9" name="TextBox 8"/>
-          <p:cNvSpPr txBox="1"/>
-          <p:nvPr/>
-        </p:nvSpPr>
-        <p:spPr>
-          <a:xfrm>
-            <a:off x="3566160" y="1508760"/>
-            <a:ext cx="2468880" cy="1645920"/>
-          </a:xfrm>
-          <a:prstGeom prst="rect">
-            <a:avLst/>
-          </a:prstGeom>
-          <a:noFill/>
-        </p:spPr>
-        <p:txBody>
-          <a:bodyPr wrap="square" anchor="t">
-            <a:spAutoFit/>
-          </a:bodyPr>
-          <a:lstStyle/>
-          <a:p>
-            <a:pPr algn="ctr"/>
-            <a:r>
-              <a:rPr sz="1200" b="1" i="0">
-                <a:solidFill>
-                  <a:srgbClr val="1F4788"/>
-                </a:solidFill>
-                <a:latin typeface="Calibri"/>
-              </a:rPr>
-              <a:t>Rules first, LLM only when needed</a:t>
-            </a:r>
-          </a:p>
-          <a:p>
-            <a:pPr algn="ctr"/>
-            <a:r>
-              <a:rPr sz="1200" b="0" i="0">
-                <a:solidFill>
-                  <a:srgbClr val="1F4788"/>
-                </a:solidFill>
-                <a:latin typeface="Calibri"/>
-              </a:rPr>
-              <a:t>~1 ms and $0 per query. The LLM only rewrites unclear messages and never states a fact.</a:t>
-            </a:r>
-          </a:p>
-        </p:txBody>
-      </p:sp>
-      <p:sp>
-        <p:nvSpPr>
-          <p:cNvPr id="10" name="Rectangle 9"/>
-          <p:cNvSpPr/>
-          <p:nvPr/>
-        </p:nvSpPr>
-        <p:spPr>
-          <a:xfrm>
-            <a:off x="6400800" y="1005840"/>
-            <a:ext cx="2468880" cy="73152"/>
-          </a:xfrm>
-          <a:prstGeom prst="rect">
-            <a:avLst/>
-          </a:prstGeom>
-          <a:solidFill>
-            <a:srgbClr val="00A4EF"/>
-          </a:solidFill>
-          <a:ln>
-            <a:noFill/>
-          </a:ln>
-          <a:effectLst/>
-        </p:spPr>
-        <p:style>
-          <a:lnRef idx="1">
-            <a:schemeClr val="accent1"/>
-          </a:lnRef>
-          <a:fillRef idx="3">
-            <a:schemeClr val="accent1"/>
-          </a:fillRef>
-          <a:effectRef idx="2">
-            <a:schemeClr val="accent1"/>
-          </a:effectRef>
-          <a:fontRef idx="minor">
-            <a:schemeClr val="lt1"/>
-          </a:fontRef>
-        </p:style>
-        <p:txBody>
-          <a:bodyPr rtlCol="0" anchor="ctr"/>
-          <a:lstStyle/>
-          <a:p>
-            <a:pPr algn="ctr"/>
-            <a:endParaRPr/>
-          </a:p>
-        </p:txBody>
-      </p:sp>
-      <p:sp>
-        <p:nvSpPr>
-          <p:cNvPr id="11" name="TextBox 10"/>
-          <p:cNvSpPr txBox="1"/>
-          <p:nvPr/>
-        </p:nvSpPr>
-        <p:spPr>
-          <a:xfrm>
-            <a:off x="6400800" y="1143000"/>
-            <a:ext cx="2468880" cy="320040"/>
-          </a:xfrm>
-          <a:prstGeom prst="rect">
-            <a:avLst/>
-          </a:prstGeom>
-          <a:noFill/>
-        </p:spPr>
-        <p:txBody>
-          <a:bodyPr wrap="square" anchor="t">
-            <a:spAutoFit/>
-          </a:bodyPr>
-          <a:lstStyle/>
-          <a:p>
-            <a:pPr algn="ctr"/>
-            <a:r>
-              <a:rPr sz="1400" b="1" i="0">
-                <a:solidFill>
-                  <a:srgbClr val="1F4788"/>
-                </a:solidFill>
-                <a:latin typeface="Calibri"/>
-              </a:rPr>
-              <a:t>Key Differentiator 3</a:t>
-            </a:r>
-          </a:p>
-        </p:txBody>
-      </p:sp>
-      <p:sp>
-        <p:nvSpPr>
-          <p:cNvPr id="12" name="TextBox 11"/>
-          <p:cNvSpPr txBox="1"/>
-          <p:nvPr/>
-        </p:nvSpPr>
-        <p:spPr>
-          <a:xfrm>
-            <a:off x="6400800" y="1508760"/>
-            <a:ext cx="2468880" cy="1645920"/>
-          </a:xfrm>
-          <a:prstGeom prst="rect">
-            <a:avLst/>
-          </a:prstGeom>
-          <a:noFill/>
-        </p:spPr>
-        <p:txBody>
-          <a:bodyPr wrap="square" anchor="t">
-            <a:spAutoFit/>
-          </a:bodyPr>
-          <a:lstStyle/>
-          <a:p>
-            <a:pPr algn="ctr"/>
-            <a:r>
-              <a:rPr sz="1200" b="1" i="0">
-                <a:solidFill>
-                  <a:srgbClr val="1F4788"/>
-                </a:solidFill>
-                <a:latin typeface="Calibri"/>
-              </a:rPr>
-              <a:t>Built for Indian shoppers</a:t>
-            </a:r>
-          </a:p>
-          <a:p>
-            <a:pPr algn="ctr"/>
-            <a:r>
-              <a:rPr sz="1200" b="0" i="0">
-                <a:solidFill>
-                  <a:srgbClr val="1F4788"/>
-                </a:solidFill>
-                <a:latin typeface="Calibri"/>
-              </a:rPr>
-              <a:t>Understands Hinglish, misspellings and descriptions like “baal sukhane wala machine”, and remembers budget and filters across turns.</a:t>
-            </a:r>
-          </a:p>
-        </p:txBody>
-      </p:sp>
-      <p:sp>
-        <p:nvSpPr>
-          <p:cNvPr id="13" name="TextBox 12"/>
-          <p:cNvSpPr txBox="1"/>
-          <p:nvPr/>
-        </p:nvSpPr>
-        <p:spPr>
-          <a:xfrm>
-            <a:off x="457200" y="3337560"/>
-            <a:ext cx="8229600" cy="320040"/>
-          </a:xfrm>
-          <a:prstGeom prst="rect">
-            <a:avLst/>
-          </a:prstGeom>
-          <a:noFill/>
-        </p:spPr>
-        <p:txBody>
-          <a:bodyPr wrap="square" anchor="ctr">
-            <a:spAutoFit/>
-          </a:bodyPr>
-          <a:lstStyle/>
-          <a:p>
-            <a:r>
-              <a:rPr sz="1600" b="1" i="0">
-                <a:solidFill>
-                  <a:srgbClr val="1F4788"/>
-                </a:solidFill>
-                <a:latin typeface="Calibri"/>
-              </a:rPr>
-              <a:t>Competitive Advantage Summary</a:t>
-            </a:r>
-          </a:p>
-        </p:txBody>
-      </p:sp>
-      <p:sp>
-        <p:nvSpPr>
-          <p:cNvPr id="14" name="TextBox 13"/>
-          <p:cNvSpPr txBox="1"/>
-          <p:nvPr/>
-        </p:nvSpPr>
-        <p:spPr>
-          <a:xfrm>
-            <a:off x="640080" y="3703320"/>
-            <a:ext cx="7863840" cy="1005840"/>
-          </a:xfrm>
-          <a:prstGeom prst="rect">
-            <a:avLst/>
-          </a:prstGeom>
-          <a:noFill/>
-        </p:spPr>
-        <p:txBody>
-          <a:bodyPr wrap="square" anchor="t">
-            <a:spAutoFit/>
-          </a:bodyPr>
-          <a:lstStyle/>
-          <a:p>
-            <a:pPr marL="342900" indent="-342900">
-              <a:spcAft>
-                <a:spcPts val="400"/>
-              </a:spcAft>
-              <a:buSzPct val="100000"/>
-              <a:buChar char="•"/>
-            </a:pPr>
-            <a:r>
-              <a:rPr sz="1400" b="0" i="0">
-                <a:solidFill>
-                  <a:srgbClr val="2D2D2D"/>
-                </a:solidFill>
-                <a:latin typeface="Calibri"/>
-              </a:rPr>
-              <a:t>Why choose us: shoppers get answers they can check, with a product ID or policy section next to every fact, and retailers never promise what they don’t sell.</a:t>
-            </a:r>
-          </a:p>
-          <a:p>
-            <a:pPr marL="342900" indent="-342900">
-              <a:spcAft>
-                <a:spcPts val="400"/>
-              </a:spcAft>
-              <a:buSzPct val="100000"/>
-              <a:buChar char="•"/>
-            </a:pPr>
-            <a:r>
-              <a:rPr sz="1400" b="0" i="0">
-                <a:solidFill>
-                  <a:srgbClr val="2D2D2D"/>
-                </a:solidFill>
-                <a:latin typeface="Calibri"/>
-              </a:rPr>
-              <a:t>Versus alternatives: general chatbots answer confidently even when wrong; ours is fast, nearly free, and honest by design.</a:t>
+              <a:t>http://127.0.0.1:8000/api/docs</a:t>
             </a:r>
           </a:p>
         </p:txBody>
@@ -5393,61 +5525,27 @@
                 </a:solidFill>
                 <a:latin typeface="Calibri"/>
               </a:rPr>
-              <a:t>Demo</a:t>
-            </a:r>
-          </a:p>
-        </p:txBody>
-      </p:sp>
-      <p:sp>
-        <p:nvSpPr>
-          <p:cNvPr id="4" name="TextBox 3"/>
-          <p:cNvSpPr txBox="1"/>
-          <p:nvPr/>
-        </p:nvSpPr>
-        <p:spPr>
-          <a:xfrm>
-            <a:off x="457200" y="914400"/>
-            <a:ext cx="8229600" cy="320040"/>
-          </a:xfrm>
-          <a:prstGeom prst="rect">
-            <a:avLst/>
-          </a:prstGeom>
-          <a:noFill/>
-        </p:spPr>
-        <p:txBody>
-          <a:bodyPr wrap="square" anchor="ctr">
-            <a:spAutoFit/>
-          </a:bodyPr>
-          <a:lstStyle/>
-          <a:p>
-            <a:r>
-              <a:rPr sz="1800" b="1" i="0">
-                <a:solidFill>
-                  <a:srgbClr val="1F4788"/>
-                </a:solidFill>
-                <a:latin typeface="Calibri"/>
-              </a:rPr>
-              <a:t>Live Demonstration</a:t>
-            </a:r>
-          </a:p>
-        </p:txBody>
-      </p:sp>
-      <p:sp>
-        <p:nvSpPr>
-          <p:cNvPr id="5" name="Screenshot frame"/>
+              <a:t>Unique Selling Proposition (USP)</a:t>
+            </a:r>
+          </a:p>
+        </p:txBody>
+      </p:sp>
+      <p:sp>
+        <p:nvSpPr>
+          <p:cNvPr id="4" name="Rectangle 3"/>
           <p:cNvSpPr/>
           <p:nvPr/>
         </p:nvSpPr>
         <p:spPr>
           <a:xfrm>
-            <a:off x="457200" y="1280160"/>
-            <a:ext cx="5029200" cy="3008376"/>
+            <a:off x="731520" y="1005840"/>
+            <a:ext cx="2468880" cy="73152"/>
           </a:xfrm>
           <a:prstGeom prst="rect">
             <a:avLst/>
           </a:prstGeom>
           <a:solidFill>
-            <a:srgbClr val="F5F5F5"/>
+            <a:srgbClr val="00A4EF"/>
           </a:solidFill>
           <a:ln>
             <a:noFill/>
@@ -5477,40 +5575,352 @@
           </a:p>
         </p:txBody>
       </p:sp>
-      <p:pic>
-        <p:nvPicPr>
-          <p:cNvPr id="6" name="Chatbot screenshot" descr="Chatbot screenshot: a clarify reply listing four yoga mats, the follow-up 'lavender wali' answered, and the Sources panel"/>
-          <p:cNvPicPr>
-            <a:picLocks noChangeAspect="1"/>
-          </p:cNvPicPr>
-          <p:nvPr/>
-        </p:nvPicPr>
-        <p:blipFill>
-          <a:blip r:embed="rId3"/>
-          <a:stretch>
-            <a:fillRect/>
-          </a:stretch>
-        </p:blipFill>
-        <p:spPr>
-          <a:xfrm>
-            <a:off x="502920" y="1325880"/>
-            <a:ext cx="4937760" cy="2948940"/>
-          </a:xfrm>
-          <a:prstGeom prst="rect">
-            <a:avLst/>
-          </a:prstGeom>
-        </p:spPr>
-      </p:pic>
-      <p:sp>
-        <p:nvSpPr>
-          <p:cNvPr id="7" name="TextBox 6"/>
-          <p:cNvSpPr txBox="1"/>
-          <p:nvPr/>
-        </p:nvSpPr>
-        <p:spPr>
-          <a:xfrm>
-            <a:off x="5715000" y="1280160"/>
-            <a:ext cx="3017520" cy="320040"/>
+      <p:sp>
+        <p:nvSpPr>
+          <p:cNvPr id="5" name="TextBox 4"/>
+          <p:cNvSpPr txBox="1"/>
+          <p:nvPr/>
+        </p:nvSpPr>
+        <p:spPr>
+          <a:xfrm>
+            <a:off x="731520" y="1143000"/>
+            <a:ext cx="2468880" cy="320040"/>
+          </a:xfrm>
+          <a:prstGeom prst="rect">
+            <a:avLst/>
+          </a:prstGeom>
+          <a:noFill/>
+        </p:spPr>
+        <p:txBody>
+          <a:bodyPr wrap="square" anchor="t">
+            <a:spAutoFit/>
+          </a:bodyPr>
+          <a:lstStyle/>
+          <a:p>
+            <a:pPr algn="ctr"/>
+            <a:r>
+              <a:rPr sz="1400" b="1" i="0">
+                <a:solidFill>
+                  <a:srgbClr val="1F4788"/>
+                </a:solidFill>
+                <a:latin typeface="Calibri"/>
+              </a:rPr>
+              <a:t>Key Differentiator 1</a:t>
+            </a:r>
+          </a:p>
+        </p:txBody>
+      </p:sp>
+      <p:sp>
+        <p:nvSpPr>
+          <p:cNvPr id="6" name="TextBox 5"/>
+          <p:cNvSpPr txBox="1"/>
+          <p:nvPr/>
+        </p:nvSpPr>
+        <p:spPr>
+          <a:xfrm>
+            <a:off x="731520" y="1508760"/>
+            <a:ext cx="2468880" cy="1645920"/>
+          </a:xfrm>
+          <a:prstGeom prst="rect">
+            <a:avLst/>
+          </a:prstGeom>
+          <a:noFill/>
+        </p:spPr>
+        <p:txBody>
+          <a:bodyPr wrap="square" anchor="t">
+            <a:spAutoFit/>
+          </a:bodyPr>
+          <a:lstStyle/>
+          <a:p>
+            <a:pPr algn="ctr"/>
+            <a:r>
+              <a:rPr sz="1200" b="1" i="0">
+                <a:solidFill>
+                  <a:srgbClr val="1F4788"/>
+                </a:solidFill>
+                <a:latin typeface="Calibri"/>
+              </a:rPr>
+              <a:t>Prices cannot be invented</a:t>
+            </a:r>
+          </a:p>
+          <a:p>
+            <a:pPr algn="ctr"/>
+            <a:r>
+              <a:rPr sz="1200" b="0" i="0">
+                <a:solidFill>
+                  <a:srgbClr val="1F4788"/>
+                </a:solidFill>
+                <a:latin typeface="Calibri"/>
+              </a:rPr>
+              <a:t>Code copies every price from the catalogue and the guard re-checks every ₹ amount: 0 hallucinated prices.</a:t>
+            </a:r>
+          </a:p>
+        </p:txBody>
+      </p:sp>
+      <p:sp>
+        <p:nvSpPr>
+          <p:cNvPr id="7" name="Rectangle 6"/>
+          <p:cNvSpPr/>
+          <p:nvPr/>
+        </p:nvSpPr>
+        <p:spPr>
+          <a:xfrm>
+            <a:off x="3566160" y="1005840"/>
+            <a:ext cx="2468880" cy="73152"/>
+          </a:xfrm>
+          <a:prstGeom prst="rect">
+            <a:avLst/>
+          </a:prstGeom>
+          <a:solidFill>
+            <a:srgbClr val="00A4EF"/>
+          </a:solidFill>
+          <a:ln>
+            <a:noFill/>
+          </a:ln>
+          <a:effectLst/>
+        </p:spPr>
+        <p:style>
+          <a:lnRef idx="1">
+            <a:schemeClr val="accent1"/>
+          </a:lnRef>
+          <a:fillRef idx="3">
+            <a:schemeClr val="accent1"/>
+          </a:fillRef>
+          <a:effectRef idx="2">
+            <a:schemeClr val="accent1"/>
+          </a:effectRef>
+          <a:fontRef idx="minor">
+            <a:schemeClr val="lt1"/>
+          </a:fontRef>
+        </p:style>
+        <p:txBody>
+          <a:bodyPr rtlCol="0" anchor="ctr"/>
+          <a:lstStyle/>
+          <a:p>
+            <a:pPr algn="ctr"/>
+            <a:endParaRPr/>
+          </a:p>
+        </p:txBody>
+      </p:sp>
+      <p:sp>
+        <p:nvSpPr>
+          <p:cNvPr id="8" name="TextBox 7"/>
+          <p:cNvSpPr txBox="1"/>
+          <p:nvPr/>
+        </p:nvSpPr>
+        <p:spPr>
+          <a:xfrm>
+            <a:off x="3566160" y="1143000"/>
+            <a:ext cx="2468880" cy="320040"/>
+          </a:xfrm>
+          <a:prstGeom prst="rect">
+            <a:avLst/>
+          </a:prstGeom>
+          <a:noFill/>
+        </p:spPr>
+        <p:txBody>
+          <a:bodyPr wrap="square" anchor="t">
+            <a:spAutoFit/>
+          </a:bodyPr>
+          <a:lstStyle/>
+          <a:p>
+            <a:pPr algn="ctr"/>
+            <a:r>
+              <a:rPr sz="1400" b="1" i="0">
+                <a:solidFill>
+                  <a:srgbClr val="1F4788"/>
+                </a:solidFill>
+                <a:latin typeface="Calibri"/>
+              </a:rPr>
+              <a:t>Key Differentiator 2</a:t>
+            </a:r>
+          </a:p>
+        </p:txBody>
+      </p:sp>
+      <p:sp>
+        <p:nvSpPr>
+          <p:cNvPr id="9" name="TextBox 8"/>
+          <p:cNvSpPr txBox="1"/>
+          <p:nvPr/>
+        </p:nvSpPr>
+        <p:spPr>
+          <a:xfrm>
+            <a:off x="3566160" y="1508760"/>
+            <a:ext cx="2468880" cy="1645920"/>
+          </a:xfrm>
+          <a:prstGeom prst="rect">
+            <a:avLst/>
+          </a:prstGeom>
+          <a:noFill/>
+        </p:spPr>
+        <p:txBody>
+          <a:bodyPr wrap="square" anchor="t">
+            <a:spAutoFit/>
+          </a:bodyPr>
+          <a:lstStyle/>
+          <a:p>
+            <a:pPr algn="ctr"/>
+            <a:r>
+              <a:rPr sz="1200" b="1" i="0">
+                <a:solidFill>
+                  <a:srgbClr val="1F4788"/>
+                </a:solidFill>
+                <a:latin typeface="Calibri"/>
+              </a:rPr>
+              <a:t>Rules first, LLM only when needed</a:t>
+            </a:r>
+          </a:p>
+          <a:p>
+            <a:pPr algn="ctr"/>
+            <a:r>
+              <a:rPr sz="1200" b="0" i="0">
+                <a:solidFill>
+                  <a:srgbClr val="1F4788"/>
+                </a:solidFill>
+                <a:latin typeface="Calibri"/>
+              </a:rPr>
+              <a:t>~1 ms and $0 per query. The LLM only rewrites unclear messages and never states a fact.</a:t>
+            </a:r>
+          </a:p>
+        </p:txBody>
+      </p:sp>
+      <p:sp>
+        <p:nvSpPr>
+          <p:cNvPr id="10" name="Rectangle 9"/>
+          <p:cNvSpPr/>
+          <p:nvPr/>
+        </p:nvSpPr>
+        <p:spPr>
+          <a:xfrm>
+            <a:off x="6400800" y="1005840"/>
+            <a:ext cx="2468880" cy="73152"/>
+          </a:xfrm>
+          <a:prstGeom prst="rect">
+            <a:avLst/>
+          </a:prstGeom>
+          <a:solidFill>
+            <a:srgbClr val="00A4EF"/>
+          </a:solidFill>
+          <a:ln>
+            <a:noFill/>
+          </a:ln>
+          <a:effectLst/>
+        </p:spPr>
+        <p:style>
+          <a:lnRef idx="1">
+            <a:schemeClr val="accent1"/>
+          </a:lnRef>
+          <a:fillRef idx="3">
+            <a:schemeClr val="accent1"/>
+          </a:fillRef>
+          <a:effectRef idx="2">
+            <a:schemeClr val="accent1"/>
+          </a:effectRef>
+          <a:fontRef idx="minor">
+            <a:schemeClr val="lt1"/>
+          </a:fontRef>
+        </p:style>
+        <p:txBody>
+          <a:bodyPr rtlCol="0" anchor="ctr"/>
+          <a:lstStyle/>
+          <a:p>
+            <a:pPr algn="ctr"/>
+            <a:endParaRPr/>
+          </a:p>
+        </p:txBody>
+      </p:sp>
+      <p:sp>
+        <p:nvSpPr>
+          <p:cNvPr id="11" name="TextBox 10"/>
+          <p:cNvSpPr txBox="1"/>
+          <p:nvPr/>
+        </p:nvSpPr>
+        <p:spPr>
+          <a:xfrm>
+            <a:off x="6400800" y="1143000"/>
+            <a:ext cx="2468880" cy="320040"/>
+          </a:xfrm>
+          <a:prstGeom prst="rect">
+            <a:avLst/>
+          </a:prstGeom>
+          <a:noFill/>
+        </p:spPr>
+        <p:txBody>
+          <a:bodyPr wrap="square" anchor="t">
+            <a:spAutoFit/>
+          </a:bodyPr>
+          <a:lstStyle/>
+          <a:p>
+            <a:pPr algn="ctr"/>
+            <a:r>
+              <a:rPr sz="1400" b="1" i="0">
+                <a:solidFill>
+                  <a:srgbClr val="1F4788"/>
+                </a:solidFill>
+                <a:latin typeface="Calibri"/>
+              </a:rPr>
+              <a:t>Key Differentiator 3</a:t>
+            </a:r>
+          </a:p>
+        </p:txBody>
+      </p:sp>
+      <p:sp>
+        <p:nvSpPr>
+          <p:cNvPr id="12" name="TextBox 11"/>
+          <p:cNvSpPr txBox="1"/>
+          <p:nvPr/>
+        </p:nvSpPr>
+        <p:spPr>
+          <a:xfrm>
+            <a:off x="6400800" y="1508760"/>
+            <a:ext cx="2468880" cy="1645920"/>
+          </a:xfrm>
+          <a:prstGeom prst="rect">
+            <a:avLst/>
+          </a:prstGeom>
+          <a:noFill/>
+        </p:spPr>
+        <p:txBody>
+          <a:bodyPr wrap="square" anchor="t">
+            <a:spAutoFit/>
+          </a:bodyPr>
+          <a:lstStyle/>
+          <a:p>
+            <a:pPr algn="ctr"/>
+            <a:r>
+              <a:rPr sz="1200" b="1" i="0">
+                <a:solidFill>
+                  <a:srgbClr val="1F4788"/>
+                </a:solidFill>
+                <a:latin typeface="Calibri"/>
+              </a:rPr>
+              <a:t>Built for Indian shoppers</a:t>
+            </a:r>
+          </a:p>
+          <a:p>
+            <a:pPr algn="ctr"/>
+            <a:r>
+              <a:rPr sz="1200" b="0" i="0">
+                <a:solidFill>
+                  <a:srgbClr val="1F4788"/>
+                </a:solidFill>
+                <a:latin typeface="Calibri"/>
+              </a:rPr>
+              <a:t>Understands Hinglish, misspellings and descriptions like “baal sukhane wala machine”, and remembers budget and filters across turns.</a:t>
+            </a:r>
+          </a:p>
+        </p:txBody>
+      </p:sp>
+      <p:sp>
+        <p:nvSpPr>
+          <p:cNvPr id="13" name="TextBox 12"/>
+          <p:cNvSpPr txBox="1"/>
+          <p:nvPr/>
+        </p:nvSpPr>
+        <p:spPr>
+          <a:xfrm>
+            <a:off x="457200" y="3337560"/>
+            <a:ext cx="8229600" cy="320040"/>
           </a:xfrm>
           <a:prstGeom prst="rect">
             <a:avLst/>
@@ -5524,27 +5934,27 @@
           <a:lstStyle/>
           <a:p>
             <a:r>
-              <a:rPr sz="1400" b="1" i="0" dirty="0">
+              <a:rPr sz="1600" b="1" i="0">
                 <a:solidFill>
                   <a:srgbClr val="1F4788"/>
                 </a:solidFill>
                 <a:latin typeface="Calibri"/>
               </a:rPr>
-              <a:t>Try These Questions</a:t>
-            </a:r>
-          </a:p>
-        </p:txBody>
-      </p:sp>
-      <p:sp>
-        <p:nvSpPr>
-          <p:cNvPr id="8" name="TextBox 7"/>
-          <p:cNvSpPr txBox="1"/>
-          <p:nvPr/>
-        </p:nvSpPr>
-        <p:spPr>
-          <a:xfrm>
-            <a:off x="5715000" y="1645920"/>
-            <a:ext cx="3017520" cy="182880"/>
+              <a:t>Competitive Advantage Summary</a:t>
+            </a:r>
+          </a:p>
+        </p:txBody>
+      </p:sp>
+      <p:sp>
+        <p:nvSpPr>
+          <p:cNvPr id="14" name="TextBox 13"/>
+          <p:cNvSpPr txBox="1"/>
+          <p:nvPr/>
+        </p:nvSpPr>
+        <p:spPr>
+          <a:xfrm>
+            <a:off x="640080" y="3703320"/>
+            <a:ext cx="7863840" cy="1005840"/>
           </a:xfrm>
           <a:prstGeom prst="rect">
             <a:avLst/>
@@ -5557,449 +5967,39 @@
           </a:bodyPr>
           <a:lstStyle/>
           <a:p>
-            <a:r>
-              <a:rPr sz="1000" b="1" i="0">
-                <a:solidFill>
-                  <a:srgbClr val="00A4EF"/>
-                </a:solidFill>
-                <a:latin typeface="Calibri"/>
-              </a:rPr>
-              <a:t>ANSWER · English</a:t>
-            </a:r>
-          </a:p>
-        </p:txBody>
-      </p:sp>
-      <p:sp>
-        <p:nvSpPr>
-          <p:cNvPr id="9" name="TextBox 8"/>
-          <p:cNvSpPr txBox="1"/>
-          <p:nvPr/>
-        </p:nvSpPr>
-        <p:spPr>
-          <a:xfrm>
-            <a:off x="5715000" y="1810512"/>
-            <a:ext cx="3017520" cy="256032"/>
-          </a:xfrm>
-          <a:prstGeom prst="rect">
-            <a:avLst/>
-          </a:prstGeom>
-          <a:noFill/>
-        </p:spPr>
-        <p:txBody>
-          <a:bodyPr wrap="square" anchor="t">
-            <a:spAutoFit/>
-          </a:bodyPr>
-          <a:lstStyle/>
-          <a:p>
-            <a:r>
-              <a:rPr sz="1100" b="0" i="0">
+            <a:pPr marL="342900" indent="-342900">
+              <a:spcAft>
+                <a:spcPts val="400"/>
+              </a:spcAft>
+              <a:buSzPct val="100000"/>
+              <a:buChar char="•"/>
+            </a:pPr>
+            <a:r>
+              <a:rPr sz="1400" b="0" i="0">
                 <a:solidFill>
                   <a:srgbClr val="2D2D2D"/>
                 </a:solidFill>
                 <a:latin typeface="Calibri"/>
               </a:rPr>
-              <a:t>Price of Chargit QuillBolt red earphones?</a:t>
-            </a:r>
-          </a:p>
-        </p:txBody>
-      </p:sp>
-      <p:sp>
-        <p:nvSpPr>
-          <p:cNvPr id="10" name="TextBox 9"/>
-          <p:cNvSpPr txBox="1"/>
-          <p:nvPr/>
-        </p:nvSpPr>
-        <p:spPr>
-          <a:xfrm>
-            <a:off x="5715000" y="2084832"/>
-            <a:ext cx="3017520" cy="182880"/>
-          </a:xfrm>
-          <a:prstGeom prst="rect">
-            <a:avLst/>
-          </a:prstGeom>
-          <a:noFill/>
-        </p:spPr>
-        <p:txBody>
-          <a:bodyPr wrap="square" anchor="t">
-            <a:spAutoFit/>
-          </a:bodyPr>
-          <a:lstStyle/>
-          <a:p>
-            <a:r>
-              <a:rPr sz="1000" b="1" i="0">
-                <a:solidFill>
-                  <a:srgbClr val="00A4EF"/>
-                </a:solidFill>
-                <a:latin typeface="Calibri"/>
-              </a:rPr>
-              <a:t>CLARIFY · Hinglish</a:t>
-            </a:r>
-          </a:p>
-        </p:txBody>
-      </p:sp>
-      <p:sp>
-        <p:nvSpPr>
-          <p:cNvPr id="11" name="TextBox 10"/>
-          <p:cNvSpPr txBox="1"/>
-          <p:nvPr/>
-        </p:nvSpPr>
-        <p:spPr>
-          <a:xfrm>
-            <a:off x="5715000" y="2249424"/>
-            <a:ext cx="3017520" cy="256032"/>
-          </a:xfrm>
-          <a:prstGeom prst="rect">
-            <a:avLst/>
-          </a:prstGeom>
-          <a:noFill/>
-        </p:spPr>
-        <p:txBody>
-          <a:bodyPr wrap="square" anchor="t">
-            <a:spAutoFit/>
-          </a:bodyPr>
-          <a:lstStyle/>
-          <a:p>
-            <a:r>
-              <a:rPr sz="1100" b="0" i="0">
+              <a:t>Why choose us: shoppers get answers they can check, with a product ID or policy section next to every fact, and retailers never promise what they don’t sell.</a:t>
+            </a:r>
+          </a:p>
+          <a:p>
+            <a:pPr marL="342900" indent="-342900">
+              <a:spcAft>
+                <a:spcPts val="400"/>
+              </a:spcAft>
+              <a:buSzPct val="100000"/>
+              <a:buChar char="•"/>
+            </a:pPr>
+            <a:r>
+              <a:rPr sz="1400" b="0" i="0">
                 <a:solidFill>
                   <a:srgbClr val="2D2D2D"/>
                 </a:solidFill>
                 <a:latin typeface="Calibri"/>
               </a:rPr>
-              <a:t>green running shoes kitne ke hai</a:t>
-            </a:r>
-          </a:p>
-        </p:txBody>
-      </p:sp>
-      <p:sp>
-        <p:nvSpPr>
-          <p:cNvPr id="12" name="TextBox 11"/>
-          <p:cNvSpPr txBox="1"/>
-          <p:nvPr/>
-        </p:nvSpPr>
-        <p:spPr>
-          <a:xfrm>
-            <a:off x="5715000" y="2523744"/>
-            <a:ext cx="3017520" cy="182880"/>
-          </a:xfrm>
-          <a:prstGeom prst="rect">
-            <a:avLst/>
-          </a:prstGeom>
-          <a:noFill/>
-        </p:spPr>
-        <p:txBody>
-          <a:bodyPr wrap="square" anchor="t">
-            <a:spAutoFit/>
-          </a:bodyPr>
-          <a:lstStyle/>
-          <a:p>
-            <a:r>
-              <a:rPr sz="1000" b="1" i="0">
-                <a:solidFill>
-                  <a:srgbClr val="00A4EF"/>
-                </a:solidFill>
-                <a:latin typeface="Calibri"/>
-              </a:rPr>
-              <a:t>POLICY · English</a:t>
-            </a:r>
-          </a:p>
-        </p:txBody>
-      </p:sp>
-      <p:sp>
-        <p:nvSpPr>
-          <p:cNvPr id="13" name="TextBox 12"/>
-          <p:cNvSpPr txBox="1"/>
-          <p:nvPr/>
-        </p:nvSpPr>
-        <p:spPr>
-          <a:xfrm>
-            <a:off x="5715000" y="2688336"/>
-            <a:ext cx="3017520" cy="256032"/>
-          </a:xfrm>
-          <a:prstGeom prst="rect">
-            <a:avLst/>
-          </a:prstGeom>
-          <a:noFill/>
-        </p:spPr>
-        <p:txBody>
-          <a:bodyPr wrap="square" anchor="t">
-            <a:spAutoFit/>
-          </a:bodyPr>
-          <a:lstStyle/>
-          <a:p>
-            <a:r>
-              <a:rPr sz="1100" b="0" i="0">
-                <a:solidFill>
-                  <a:srgbClr val="2D2D2D"/>
-                </a:solidFill>
-                <a:latin typeface="Calibri"/>
-              </a:rPr>
-              <a:t>Can I return earbuds after opening the seal?</a:t>
-            </a:r>
-          </a:p>
-        </p:txBody>
-      </p:sp>
-      <p:sp>
-        <p:nvSpPr>
-          <p:cNvPr id="14" name="TextBox 13"/>
-          <p:cNvSpPr txBox="1"/>
-          <p:nvPr/>
-        </p:nvSpPr>
-        <p:spPr>
-          <a:xfrm>
-            <a:off x="5715000" y="2962656"/>
-            <a:ext cx="3017520" cy="182880"/>
-          </a:xfrm>
-          <a:prstGeom prst="rect">
-            <a:avLst/>
-          </a:prstGeom>
-          <a:noFill/>
-        </p:spPr>
-        <p:txBody>
-          <a:bodyPr wrap="square" anchor="t">
-            <a:spAutoFit/>
-          </a:bodyPr>
-          <a:lstStyle/>
-          <a:p>
-            <a:r>
-              <a:rPr sz="1000" b="1" i="0">
-                <a:solidFill>
-                  <a:srgbClr val="00A4EF"/>
-                </a:solidFill>
-                <a:latin typeface="Calibri"/>
-              </a:rPr>
-              <a:t>REFUSE · Hinglish</a:t>
-            </a:r>
-          </a:p>
-        </p:txBody>
-      </p:sp>
-      <p:sp>
-        <p:nvSpPr>
-          <p:cNvPr id="15" name="TextBox 14"/>
-          <p:cNvSpPr txBox="1"/>
-          <p:nvPr/>
-        </p:nvSpPr>
-        <p:spPr>
-          <a:xfrm>
-            <a:off x="5715000" y="3127248"/>
-            <a:ext cx="3017520" cy="256032"/>
-          </a:xfrm>
-          <a:prstGeom prst="rect">
-            <a:avLst/>
-          </a:prstGeom>
-          <a:noFill/>
-        </p:spPr>
-        <p:txBody>
-          <a:bodyPr wrap="square" anchor="t">
-            <a:spAutoFit/>
-          </a:bodyPr>
-          <a:lstStyle/>
-          <a:p>
-            <a:r>
-              <a:rPr sz="1100" b="0" i="0">
-                <a:solidFill>
-                  <a:srgbClr val="2D2D2D"/>
-                </a:solidFill>
-                <a:latin typeface="Calibri"/>
-              </a:rPr>
-              <a:t>iphone 15 milega?</a:t>
-            </a:r>
-          </a:p>
-        </p:txBody>
-      </p:sp>
-      <p:sp>
-        <p:nvSpPr>
-          <p:cNvPr id="16" name="TextBox 15"/>
-          <p:cNvSpPr txBox="1"/>
-          <p:nvPr/>
-        </p:nvSpPr>
-        <p:spPr>
-          <a:xfrm>
-            <a:off x="5715000" y="3401568"/>
-            <a:ext cx="3017520" cy="182880"/>
-          </a:xfrm>
-          <a:prstGeom prst="rect">
-            <a:avLst/>
-          </a:prstGeom>
-          <a:noFill/>
-        </p:spPr>
-        <p:txBody>
-          <a:bodyPr wrap="square" anchor="t">
-            <a:spAutoFit/>
-          </a:bodyPr>
-          <a:lstStyle/>
-          <a:p>
-            <a:r>
-              <a:rPr sz="1000" b="1" i="0">
-                <a:solidFill>
-                  <a:srgbClr val="00A4EF"/>
-                </a:solidFill>
-                <a:latin typeface="Calibri"/>
-              </a:rPr>
-              <a:t>MULTI-TURN · Hinglish</a:t>
-            </a:r>
-          </a:p>
-        </p:txBody>
-      </p:sp>
-      <p:sp>
-        <p:nvSpPr>
-          <p:cNvPr id="17" name="TextBox 16"/>
-          <p:cNvSpPr txBox="1"/>
-          <p:nvPr/>
-        </p:nvSpPr>
-        <p:spPr>
-          <a:xfrm>
-            <a:off x="5715000" y="3566160"/>
-            <a:ext cx="3017520" cy="256032"/>
-          </a:xfrm>
-          <a:prstGeom prst="rect">
-            <a:avLst/>
-          </a:prstGeom>
-          <a:noFill/>
-        </p:spPr>
-        <p:txBody>
-          <a:bodyPr wrap="square" anchor="t">
-            <a:spAutoFit/>
-          </a:bodyPr>
-          <a:lstStyle/>
-          <a:p>
-            <a:r>
-              <a:rPr sz="1100" b="0" i="0">
-                <a:solidFill>
-                  <a:srgbClr val="2D2D2D"/>
-                </a:solidFill>
-                <a:latin typeface="Calibri"/>
-              </a:rPr>
-              <a:t>6 mm yoga mat chahiye → TPE wali 600 ke andar</a:t>
-            </a:r>
-          </a:p>
-        </p:txBody>
-      </p:sp>
-      <p:sp>
-        <p:nvSpPr>
-          <p:cNvPr id="18" name="TextBox 17"/>
-          <p:cNvSpPr txBox="1"/>
-          <p:nvPr/>
-        </p:nvSpPr>
-        <p:spPr>
-          <a:xfrm>
-            <a:off x="5715000" y="3840480"/>
-            <a:ext cx="3017520" cy="182880"/>
-          </a:xfrm>
-          <a:prstGeom prst="rect">
-            <a:avLst/>
-          </a:prstGeom>
-          <a:noFill/>
-        </p:spPr>
-        <p:txBody>
-          <a:bodyPr wrap="square" anchor="t">
-            <a:spAutoFit/>
-          </a:bodyPr>
-          <a:lstStyle/>
-          <a:p>
-            <a:r>
-              <a:rPr sz="1000" b="1" i="0">
-                <a:solidFill>
-                  <a:srgbClr val="00A4EF"/>
-                </a:solidFill>
-                <a:latin typeface="Calibri"/>
-              </a:rPr>
-              <a:t>LLM · English</a:t>
-            </a:r>
-          </a:p>
-        </p:txBody>
-      </p:sp>
-      <p:sp>
-        <p:nvSpPr>
-          <p:cNvPr id="19" name="TextBox 18"/>
-          <p:cNvSpPr txBox="1"/>
-          <p:nvPr/>
-        </p:nvSpPr>
-        <p:spPr>
-          <a:xfrm>
-            <a:off x="5715000" y="4005072"/>
-            <a:ext cx="3017520" cy="256032"/>
-          </a:xfrm>
-          <a:prstGeom prst="rect">
-            <a:avLst/>
-          </a:prstGeom>
-          <a:noFill/>
-        </p:spPr>
-        <p:txBody>
-          <a:bodyPr wrap="square" anchor="t">
-            <a:spAutoFit/>
-          </a:bodyPr>
-          <a:lstStyle/>
-          <a:p>
-            <a:r>
-              <a:rPr sz="1100" b="0" i="0">
-                <a:solidFill>
-                  <a:srgbClr val="2D2D2D"/>
-                </a:solidFill>
-                <a:latin typeface="Calibri"/>
-              </a:rPr>
-              <a:t>How much is a machine that toasts bread?</a:t>
-            </a:r>
-          </a:p>
-        </p:txBody>
-      </p:sp>
-      <p:sp>
-        <p:nvSpPr>
-          <p:cNvPr id="20" name="TextBox 19"/>
-          <p:cNvSpPr txBox="1"/>
-          <p:nvPr/>
-        </p:nvSpPr>
-        <p:spPr>
-          <a:xfrm>
-            <a:off x="457200" y="4389120"/>
-            <a:ext cx="8229600" cy="274320"/>
-          </a:xfrm>
-          <a:prstGeom prst="rect">
-            <a:avLst/>
-          </a:prstGeom>
-          <a:noFill/>
-        </p:spPr>
-        <p:txBody>
-          <a:bodyPr wrap="square" anchor="t">
-            <a:spAutoFit/>
-          </a:bodyPr>
-          <a:lstStyle/>
-          <a:p>
-            <a:r>
-              <a:rPr sz="1200" b="1" i="0">
-                <a:solidFill>
-                  <a:srgbClr val="1F4788"/>
-                </a:solidFill>
-                <a:latin typeface="Calibri"/>
-              </a:rPr>
-              <a:t>Chatbot: </a:t>
-            </a:r>
-            <a:r>
-              <a:rPr sz="1200" b="0" i="0">
-                <a:solidFill>
-                  <a:srgbClr val="1F4788"/>
-                </a:solidFill>
-                <a:latin typeface="Calibri"/>
-              </a:rPr>
-              <a:t>http://127.0.0.1:8000    </a:t>
-            </a:r>
-            <a:r>
-              <a:rPr sz="1200" b="1" i="0">
-                <a:solidFill>
-                  <a:srgbClr val="1F4788"/>
-                </a:solidFill>
-                <a:latin typeface="Calibri"/>
-              </a:rPr>
-              <a:t>API docs: </a:t>
-            </a:r>
-            <a:r>
-              <a:rPr sz="1200" b="0" i="0">
-                <a:solidFill>
-                  <a:srgbClr val="1F4788"/>
-                </a:solidFill>
-                <a:latin typeface="Calibri"/>
-              </a:rPr>
-              <a:t>http://127.0.0.1:8000/api/docs</a:t>
+              <a:t>Versus alternatives: general chatbots answer confidently even when wrong; ours is fast, nearly free, and honest by design.</a:t>
             </a:r>
           </a:p>
         </p:txBody>
